--- a/artifacts/x-testing/status-report-qai-2026-09.pptx
+++ b/artifacts/x-testing/status-report-qai-2026-09.pptx
@@ -3107,7 +3107,7 @@
             <a:avLst/>
           </a:prstGeom>
           <a:solidFill>
-            <a:srgbClr val="F8FAFC"/>
+            <a:srgbClr val="F8FAF8"/>
           </a:solidFill>
           <a:ln>
             <a:noFill/>
@@ -3137,84 +3137,23 @@
       </p:sp>
       <p:sp>
         <p:nvSpPr>
-          <p:cNvPr id="3" name="TextBox 2"/>
-          <p:cNvSpPr txBox="1"/>
-          <p:nvPr/>
-        </p:nvSpPr>
-        <p:spPr>
-          <a:xfrm>
-            <a:off x="731520" y="548640"/>
-            <a:ext cx="10698480" cy="1097280"/>
-          </a:xfrm>
-          <a:prstGeom prst="rect">
-            <a:avLst/>
-          </a:prstGeom>
-          <a:noFill/>
-        </p:spPr>
-        <p:txBody>
-          <a:bodyPr wrap="square">
-            <a:spAutoFit/>
-          </a:bodyPr>
-          <a:lstStyle/>
-          <a:p>
-            <a:pPr>
-              <a:defRPr sz="1100" b="1">
-                <a:solidFill>
-                  <a:srgbClr val="2563EB"/>
-                </a:solidFill>
-              </a:defRPr>
-            </a:pPr>
-            <a:r>
-              <a:t>PROJETO QAI • X-TESTING &amp; SANASA</a:t>
-            </a:r>
-          </a:p>
-          <a:p>
-            <a:pPr>
-              <a:defRPr sz="2600" b="1">
-                <a:solidFill>
-                  <a:srgbClr val="0F172A"/>
-                </a:solidFill>
-              </a:defRPr>
-            </a:pPr>
-            <a:r>
-              <a:t>Key Objectives &amp; Estratégia de Fases</a:t>
-            </a:r>
-          </a:p>
-          <a:p>
-            <a:pPr>
-              <a:defRPr sz="1200">
-                <a:solidFill>
-                  <a:srgbClr val="64748B"/>
-                </a:solidFill>
-              </a:defRPr>
-            </a:pPr>
-            <a:r>
-              <a:t>Evolução da operação de testes manuais para esteira autônoma com agentes de IA (OpenClaw + Paperclip)</a:t>
-            </a:r>
-          </a:p>
-        </p:txBody>
-      </p:sp>
-      <p:sp>
-        <p:nvSpPr>
-          <p:cNvPr id="4" name="Rounded Rectangle 3"/>
+          <p:cNvPr id="3" name="Rectangle 2"/>
           <p:cNvSpPr/>
           <p:nvPr/>
         </p:nvSpPr>
         <p:spPr>
           <a:xfrm>
-            <a:off x="731520" y="1828800"/>
-            <a:ext cx="3328416" cy="4389120"/>
-          </a:xfrm>
-          <a:prstGeom prst="roundRect">
+            <a:off x="0" y="0"/>
+            <a:ext cx="12191695" cy="73152"/>
+          </a:xfrm>
+          <a:prstGeom prst="rect">
             <a:avLst/>
           </a:prstGeom>
           <a:solidFill>
-            <a:srgbClr val="FFFFFF"/>
+            <a:srgbClr val="38761D"/>
           </a:solidFill>
-          <a:ln w="19050">
-            <a:solidFill>
-              <a:srgbClr val="E2E8F0"/>
-            </a:solidFill>
+          <a:ln>
+            <a:noFill/>
           </a:ln>
         </p:spPr>
         <p:style>
@@ -3241,23 +3180,147 @@
       </p:sp>
       <p:sp>
         <p:nvSpPr>
-          <p:cNvPr id="5" name="Rectangle 4"/>
+          <p:cNvPr id="4" name="TextBox 3"/>
+          <p:cNvSpPr txBox="1"/>
+          <p:nvPr/>
+        </p:nvSpPr>
+        <p:spPr>
+          <a:xfrm>
+            <a:off x="731520" y="365760"/>
+            <a:ext cx="8686800" cy="1051560"/>
+          </a:xfrm>
+          <a:prstGeom prst="rect">
+            <a:avLst/>
+          </a:prstGeom>
+          <a:noFill/>
+        </p:spPr>
+        <p:txBody>
+          <a:bodyPr wrap="square" lIns="0" tIns="0" rIns="0" bIns="0">
+            <a:spAutoFit/>
+          </a:bodyPr>
+          <a:lstStyle/>
+          <a:p>
+            <a:pPr>
+              <a:defRPr sz="1000" b="1">
+                <a:solidFill>
+                  <a:srgbClr val="FF5722"/>
+                </a:solidFill>
+                <a:latin typeface="Raleway"/>
+              </a:defRPr>
+            </a:pPr>
+            <a:r>
+              <a:t>01 / ESTRATÉGIA OPERACIONAL</a:t>
+            </a:r>
+          </a:p>
+          <a:p>
+            <a:pPr>
+              <a:defRPr sz="2200" b="1">
+                <a:solidFill>
+                  <a:srgbClr val="1A1A1A"/>
+                </a:solidFill>
+                <a:latin typeface="Raleway"/>
+              </a:defRPr>
+            </a:pPr>
+            <a:r>
+              <a:t>Key Objectives &amp; Estratégia de Fases</a:t>
+            </a:r>
+          </a:p>
+          <a:p>
+            <a:pPr>
+              <a:defRPr sz="1100">
+                <a:solidFill>
+                  <a:srgbClr val="7F7F7F"/>
+                </a:solidFill>
+                <a:latin typeface="Raleway"/>
+              </a:defRPr>
+            </a:pPr>
+            <a:r>
+              <a:t>Evolução da operação de testes manuais para esteira autônoma com agentes de IA (OpenClaw + Paperclip)</a:t>
+            </a:r>
+          </a:p>
+        </p:txBody>
+      </p:sp>
+      <p:pic>
+        <p:nvPicPr>
+          <p:cNvPr id="5" name="Picture 4" descr="image2.png"/>
+          <p:cNvPicPr>
+            <a:picLocks noChangeAspect="1"/>
+          </p:cNvPicPr>
+          <p:nvPr/>
+        </p:nvPicPr>
+        <p:blipFill>
+          <a:blip r:embed="rId2"/>
+          <a:stretch>
+            <a:fillRect/>
+          </a:stretch>
+        </p:blipFill>
+        <p:spPr>
+          <a:xfrm>
+            <a:off x="9875520" y="365760"/>
+            <a:ext cx="1600200" cy="869674"/>
+          </a:xfrm>
+          <a:prstGeom prst="rect">
+            <a:avLst/>
+          </a:prstGeom>
+        </p:spPr>
+      </p:pic>
+      <p:sp>
+        <p:nvSpPr>
+          <p:cNvPr id="6" name="TextBox 5"/>
+          <p:cNvSpPr txBox="1"/>
+          <p:nvPr/>
+        </p:nvSpPr>
+        <p:spPr>
+          <a:xfrm>
+            <a:off x="731520" y="6446520"/>
+            <a:ext cx="10728655" cy="320040"/>
+          </a:xfrm>
+          <a:prstGeom prst="rect">
+            <a:avLst/>
+          </a:prstGeom>
+          <a:noFill/>
+        </p:spPr>
+        <p:txBody>
+          <a:bodyPr wrap="none" lIns="0" tIns="0" rIns="0" bIns="0">
+            <a:spAutoFit/>
+          </a:bodyPr>
+          <a:lstStyle/>
+          <a:p>
+            <a:pPr>
+              <a:defRPr sz="800" b="1">
+                <a:solidFill>
+                  <a:srgbClr val="A0A0A0"/>
+                </a:solidFill>
+                <a:latin typeface="Raleway"/>
+              </a:defRPr>
+            </a:pPr>
+            <a:r>
+              <a:t>PROJETO QAI • FÁBRICA DE TESTES X-TESTING  |  ESTEIRA DE QUALIDADE &amp; SANASA  |  WWW.XTESTING.COM.BR</a:t>
+            </a:r>
+          </a:p>
+        </p:txBody>
+      </p:sp>
+      <p:sp>
+        <p:nvSpPr>
+          <p:cNvPr id="7" name="Rounded Rectangle 6"/>
           <p:cNvSpPr/>
           <p:nvPr/>
         </p:nvSpPr>
         <p:spPr>
           <a:xfrm>
-            <a:off x="914400" y="1993392"/>
-            <a:ext cx="1097280" cy="54864"/>
-          </a:xfrm>
-          <a:prstGeom prst="rect">
+            <a:off x="731520" y="1600200"/>
+            <a:ext cx="3328416" cy="4663440"/>
+          </a:xfrm>
+          <a:prstGeom prst="roundRect">
             <a:avLst/>
           </a:prstGeom>
           <a:solidFill>
-            <a:srgbClr val="EA580C"/>
+            <a:srgbClr val="FFFFFF"/>
           </a:solidFill>
-          <a:ln>
-            <a:noFill/>
+          <a:ln w="15240">
+            <a:solidFill>
+              <a:srgbClr val="D8D8D8"/>
+            </a:solidFill>
           </a:ln>
         </p:spPr>
         <p:style>
@@ -3284,165 +3347,23 @@
       </p:sp>
       <p:sp>
         <p:nvSpPr>
-          <p:cNvPr id="6" name="TextBox 5"/>
-          <p:cNvSpPr txBox="1"/>
-          <p:nvPr/>
-        </p:nvSpPr>
-        <p:spPr>
-          <a:xfrm>
-            <a:off x="914400" y="2148840"/>
-            <a:ext cx="2962656" cy="3931920"/>
-          </a:xfrm>
-          <a:prstGeom prst="rect">
-            <a:avLst/>
-          </a:prstGeom>
-          <a:noFill/>
-        </p:spPr>
-        <p:txBody>
-          <a:bodyPr wrap="square">
-            <a:spAutoFit/>
-          </a:bodyPr>
-          <a:lstStyle/>
-          <a:p>
-            <a:pPr>
-              <a:defRPr sz="1000" b="1">
-                <a:solidFill>
-                  <a:srgbClr val="EA580C"/>
-                </a:solidFill>
-              </a:defRPr>
-            </a:pPr>
-            <a:r>
-              <a:t>FASE 01</a:t>
-            </a:r>
-          </a:p>
-          <a:p>
-            <a:pPr>
-              <a:spcAft>
-                <a:spcPts val="600"/>
-              </a:spcAft>
-              <a:defRPr sz="1600" b="1">
-                <a:solidFill>
-                  <a:srgbClr val="0F172A"/>
-                </a:solidFill>
-              </a:defRPr>
-            </a:pPr>
-            <a:r>
-              <a:t>WEB: Testes Manuais</a:t>
-            </a:r>
-          </a:p>
-          <a:p>
-            <a:pPr>
-              <a:spcAft>
-                <a:spcPts val="1000"/>
-              </a:spcAft>
-              <a:defRPr sz="850" b="1">
-                <a:solidFill>
-                  <a:srgbClr val="EA580C"/>
-                </a:solidFill>
-              </a:defRPr>
-            </a:pPr>
-            <a:r>
-              <a:t>EM ANDAMENTO • BASELINE</a:t>
-            </a:r>
-          </a:p>
-          <a:p>
-            <a:pPr>
-              <a:spcAft>
-                <a:spcPts val="1400"/>
-              </a:spcAft>
-              <a:defRPr sz="1050">
-                <a:solidFill>
-                  <a:srgbClr val="64748B"/>
-                </a:solidFill>
-              </a:defRPr>
-            </a:pPr>
-            <a:r>
-              <a:t>Espelhamento dos papéis operacionais e automação do suporte à execução manual.</a:t>
-            </a:r>
-          </a:p>
-          <a:p>
-            <a:pPr>
-              <a:spcAft>
-                <a:spcPts val="600"/>
-              </a:spcAft>
-              <a:defRPr sz="1000">
-                <a:solidFill>
-                  <a:srgbClr val="1E293B"/>
-                </a:solidFill>
-              </a:defRPr>
-            </a:pPr>
-            <a:r>
-              <a:t>•  Extração estruturada de requisitos (Tree-RAG / PageIndex)</a:t>
-            </a:r>
-          </a:p>
-          <a:p>
-            <a:pPr>
-              <a:spcAft>
-                <a:spcPts val="600"/>
-              </a:spcAft>
-              <a:defRPr sz="1000">
-                <a:solidFill>
-                  <a:srgbClr val="1E293B"/>
-                </a:solidFill>
-              </a:defRPr>
-            </a:pPr>
-            <a:r>
-              <a:t>•  Geração de fluxos e regras em BPMN via skill especializada</a:t>
-            </a:r>
-          </a:p>
-          <a:p>
-            <a:pPr>
-              <a:spcAft>
-                <a:spcPts val="600"/>
-              </a:spcAft>
-              <a:defRPr sz="1000">
-                <a:solidFill>
-                  <a:srgbClr val="1E293B"/>
-                </a:solidFill>
-              </a:defRPr>
-            </a:pPr>
-            <a:r>
-              <a:t>•  Elaboração automatizada de Casos de Teste (TestLink)</a:t>
-            </a:r>
-          </a:p>
-          <a:p>
-            <a:pPr>
-              <a:spcAft>
-                <a:spcPts val="600"/>
-              </a:spcAft>
-              <a:defRPr sz="1000">
-                <a:solidFill>
-                  <a:srgbClr val="1E293B"/>
-                </a:solidFill>
-              </a:defRPr>
-            </a:pPr>
-            <a:r>
-              <a:t>•  Triagem e pré-preenchimento de defeitos (Mantis)</a:t>
-            </a:r>
-          </a:p>
-        </p:txBody>
-      </p:sp>
-      <p:sp>
-        <p:nvSpPr>
-          <p:cNvPr id="7" name="Rounded Rectangle 6"/>
+          <p:cNvPr id="8" name="Rectangle 7"/>
           <p:cNvSpPr/>
           <p:nvPr/>
         </p:nvSpPr>
         <p:spPr>
           <a:xfrm>
-            <a:off x="4407408" y="1828800"/>
-            <a:ext cx="3328416" cy="4389120"/>
-          </a:xfrm>
-          <a:prstGeom prst="roundRect">
+            <a:off x="914400" y="1764792"/>
+            <a:ext cx="1097280" cy="54864"/>
+          </a:xfrm>
+          <a:prstGeom prst="rect">
             <a:avLst/>
           </a:prstGeom>
           <a:solidFill>
-            <a:srgbClr val="FFFFFF"/>
+            <a:srgbClr val="38761D"/>
           </a:solidFill>
-          <a:ln w="19050">
-            <a:solidFill>
-              <a:srgbClr val="E2E8F0"/>
-            </a:solidFill>
+          <a:ln>
+            <a:noFill/>
           </a:ln>
         </p:spPr>
         <p:style>
@@ -3469,23 +3390,173 @@
       </p:sp>
       <p:sp>
         <p:nvSpPr>
-          <p:cNvPr id="8" name="Rectangle 7"/>
+          <p:cNvPr id="9" name="TextBox 8"/>
+          <p:cNvSpPr txBox="1"/>
+          <p:nvPr/>
+        </p:nvSpPr>
+        <p:spPr>
+          <a:xfrm>
+            <a:off x="914400" y="1920240"/>
+            <a:ext cx="2962656" cy="4206240"/>
+          </a:xfrm>
+          <a:prstGeom prst="rect">
+            <a:avLst/>
+          </a:prstGeom>
+          <a:noFill/>
+        </p:spPr>
+        <p:txBody>
+          <a:bodyPr wrap="square">
+            <a:spAutoFit/>
+          </a:bodyPr>
+          <a:lstStyle/>
+          <a:p>
+            <a:pPr>
+              <a:defRPr sz="950" b="1">
+                <a:solidFill>
+                  <a:srgbClr val="38761D"/>
+                </a:solidFill>
+                <a:latin typeface="Raleway"/>
+              </a:defRPr>
+            </a:pPr>
+            <a:r>
+              <a:t>FASE 01  •  01</a:t>
+            </a:r>
+          </a:p>
+          <a:p>
+            <a:pPr>
+              <a:spcAft>
+                <a:spcPts val="400"/>
+              </a:spcAft>
+              <a:defRPr sz="1500" b="1">
+                <a:solidFill>
+                  <a:srgbClr val="1A1A1A"/>
+                </a:solidFill>
+                <a:latin typeface="Raleway"/>
+              </a:defRPr>
+            </a:pPr>
+            <a:r>
+              <a:t>WEB: Testes Manuais</a:t>
+            </a:r>
+          </a:p>
+          <a:p>
+            <a:pPr>
+              <a:spcAft>
+                <a:spcPts val="1000"/>
+              </a:spcAft>
+              <a:defRPr sz="850" b="1">
+                <a:solidFill>
+                  <a:srgbClr val="38761D"/>
+                </a:solidFill>
+                <a:latin typeface="Raleway"/>
+              </a:defRPr>
+            </a:pPr>
+            <a:r>
+              <a:t>EM ANDAMENTO • BASELINE</a:t>
+            </a:r>
+          </a:p>
+          <a:p>
+            <a:pPr>
+              <a:spcAft>
+                <a:spcPts val="1400"/>
+              </a:spcAft>
+              <a:defRPr sz="1000">
+                <a:solidFill>
+                  <a:srgbClr val="7F7F7F"/>
+                </a:solidFill>
+                <a:latin typeface="Raleway"/>
+              </a:defRPr>
+            </a:pPr>
+            <a:r>
+              <a:t>Espelhamento dos papéis operacionais e automação do suporte à execução manual.</a:t>
+            </a:r>
+          </a:p>
+          <a:p>
+            <a:pPr>
+              <a:spcAft>
+                <a:spcPts val="600"/>
+              </a:spcAft>
+              <a:defRPr sz="950">
+                <a:solidFill>
+                  <a:srgbClr val="1A1A1A"/>
+                </a:solidFill>
+                <a:latin typeface="Raleway"/>
+              </a:defRPr>
+            </a:pPr>
+            <a:r>
+              <a:t>•  Extração estruturada de requisitos (Tree-RAG / PageIndex)</a:t>
+            </a:r>
+          </a:p>
+          <a:p>
+            <a:pPr>
+              <a:spcAft>
+                <a:spcPts val="600"/>
+              </a:spcAft>
+              <a:defRPr sz="950">
+                <a:solidFill>
+                  <a:srgbClr val="1A1A1A"/>
+                </a:solidFill>
+                <a:latin typeface="Raleway"/>
+              </a:defRPr>
+            </a:pPr>
+            <a:r>
+              <a:t>•  Geração de fluxos e regras em BPMN 2.0 formal</a:t>
+            </a:r>
+          </a:p>
+          <a:p>
+            <a:pPr>
+              <a:spcAft>
+                <a:spcPts val="600"/>
+              </a:spcAft>
+              <a:defRPr sz="950">
+                <a:solidFill>
+                  <a:srgbClr val="1A1A1A"/>
+                </a:solidFill>
+                <a:latin typeface="Raleway"/>
+              </a:defRPr>
+            </a:pPr>
+            <a:r>
+              <a:t>•  Elaboração automatizada de Casos de Teste (TestLink)</a:t>
+            </a:r>
+          </a:p>
+          <a:p>
+            <a:pPr>
+              <a:spcAft>
+                <a:spcPts val="600"/>
+              </a:spcAft>
+              <a:defRPr sz="950">
+                <a:solidFill>
+                  <a:srgbClr val="1A1A1A"/>
+                </a:solidFill>
+                <a:latin typeface="Raleway"/>
+              </a:defRPr>
+            </a:pPr>
+            <a:r>
+              <a:t>•  Triagem e pré-preenchimento de defeitos (Mantis)</a:t>
+            </a:r>
+          </a:p>
+        </p:txBody>
+      </p:sp>
+      <p:sp>
+        <p:nvSpPr>
+          <p:cNvPr id="10" name="Rounded Rectangle 9"/>
           <p:cNvSpPr/>
           <p:nvPr/>
         </p:nvSpPr>
         <p:spPr>
           <a:xfrm>
-            <a:off x="4590288" y="1993392"/>
-            <a:ext cx="1097280" cy="54864"/>
-          </a:xfrm>
-          <a:prstGeom prst="rect">
+            <a:off x="4425696" y="1600200"/>
+            <a:ext cx="3328416" cy="4663440"/>
+          </a:xfrm>
+          <a:prstGeom prst="roundRect">
             <a:avLst/>
           </a:prstGeom>
           <a:solidFill>
-            <a:srgbClr val="2563EB"/>
+            <a:srgbClr val="FFFFFF"/>
           </a:solidFill>
-          <a:ln>
-            <a:noFill/>
+          <a:ln w="15240">
+            <a:solidFill>
+              <a:srgbClr val="D8D8D8"/>
+            </a:solidFill>
           </a:ln>
         </p:spPr>
         <p:style>
@@ -3512,165 +3583,23 @@
       </p:sp>
       <p:sp>
         <p:nvSpPr>
-          <p:cNvPr id="9" name="TextBox 8"/>
-          <p:cNvSpPr txBox="1"/>
-          <p:nvPr/>
-        </p:nvSpPr>
-        <p:spPr>
-          <a:xfrm>
-            <a:off x="4590288" y="2148840"/>
-            <a:ext cx="2962656" cy="3931920"/>
-          </a:xfrm>
-          <a:prstGeom prst="rect">
-            <a:avLst/>
-          </a:prstGeom>
-          <a:noFill/>
-        </p:spPr>
-        <p:txBody>
-          <a:bodyPr wrap="square">
-            <a:spAutoFit/>
-          </a:bodyPr>
-          <a:lstStyle/>
-          <a:p>
-            <a:pPr>
-              <a:defRPr sz="1000" b="1">
-                <a:solidFill>
-                  <a:srgbClr val="2563EB"/>
-                </a:solidFill>
-              </a:defRPr>
-            </a:pPr>
-            <a:r>
-              <a:t>FASE 02</a:t>
-            </a:r>
-          </a:p>
-          <a:p>
-            <a:pPr>
-              <a:spcAft>
-                <a:spcPts val="600"/>
-              </a:spcAft>
-              <a:defRPr sz="1600" b="1">
-                <a:solidFill>
-                  <a:srgbClr val="0F172A"/>
-                </a:solidFill>
-              </a:defRPr>
-            </a:pPr>
-            <a:r>
-              <a:t>WEB: Integração &amp; Aceitação</a:t>
-            </a:r>
-          </a:p>
-          <a:p>
-            <a:pPr>
-              <a:spcAft>
-                <a:spcPts val="1000"/>
-              </a:spcAft>
-              <a:defRPr sz="850" b="1">
-                <a:solidFill>
-                  <a:srgbClr val="2563EB"/>
-                </a:solidFill>
-              </a:defRPr>
-            </a:pPr>
-            <a:r>
-              <a:t>PLANEJADA • SEQUENCIAL</a:t>
-            </a:r>
-          </a:p>
-          <a:p>
-            <a:pPr>
-              <a:spcAft>
-                <a:spcPts val="1400"/>
-              </a:spcAft>
-              <a:defRPr sz="1050">
-                <a:solidFill>
-                  <a:srgbClr val="64748B"/>
-                </a:solidFill>
-              </a:defRPr>
-            </a:pPr>
-            <a:r>
-              <a:t>Automação E2E com execução autônoma no navegador e evidências rastreáveis.</a:t>
-            </a:r>
-          </a:p>
-          <a:p>
-            <a:pPr>
-              <a:spcAft>
-                <a:spcPts val="600"/>
-              </a:spcAft>
-              <a:defRPr sz="1000">
-                <a:solidFill>
-                  <a:srgbClr val="1E293B"/>
-                </a:solidFill>
-              </a:defRPr>
-            </a:pPr>
-            <a:r>
-              <a:t>•  Execução agêntica via Playwright / Camoufox (Ultra Browser)</a:t>
-            </a:r>
-          </a:p>
-          <a:p>
-            <a:pPr>
-              <a:spcAft>
-                <a:spcPts val="600"/>
-              </a:spcAft>
-              <a:defRPr sz="1000">
-                <a:solidFill>
-                  <a:srgbClr val="1E293B"/>
-                </a:solidFill>
-              </a:defRPr>
-            </a:pPr>
-            <a:r>
-              <a:t>•  Validação de integração de APIs e regras de negócio</a:t>
-            </a:r>
-          </a:p>
-          <a:p>
-            <a:pPr>
-              <a:spcAft>
-                <a:spcPts val="600"/>
-              </a:spcAft>
-              <a:defRPr sz="1000">
-                <a:solidFill>
-                  <a:srgbClr val="1E293B"/>
-                </a:solidFill>
-              </a:defRPr>
-            </a:pPr>
-            <a:r>
-              <a:t>•  Geração de evidências com prints e vídeos por passo</a:t>
-            </a:r>
-          </a:p>
-          <a:p>
-            <a:pPr>
-              <a:spcAft>
-                <a:spcPts val="600"/>
-              </a:spcAft>
-              <a:defRPr sz="1000">
-                <a:solidFill>
-                  <a:srgbClr val="1E293B"/>
-                </a:solidFill>
-              </a:defRPr>
-            </a:pPr>
-            <a:r>
-              <a:t>•  Pipeline de regressão contínua integrada ao CI/CD</a:t>
-            </a:r>
-          </a:p>
-        </p:txBody>
-      </p:sp>
-      <p:sp>
-        <p:nvSpPr>
-          <p:cNvPr id="10" name="Rounded Rectangle 9"/>
+          <p:cNvPr id="11" name="Rectangle 10"/>
           <p:cNvSpPr/>
           <p:nvPr/>
         </p:nvSpPr>
         <p:spPr>
           <a:xfrm>
-            <a:off x="8083296" y="1828800"/>
-            <a:ext cx="3328416" cy="4389120"/>
-          </a:xfrm>
-          <a:prstGeom prst="roundRect">
+            <a:off x="4608576" y="1764792"/>
+            <a:ext cx="1097280" cy="54864"/>
+          </a:xfrm>
+          <a:prstGeom prst="rect">
             <a:avLst/>
           </a:prstGeom>
           <a:solidFill>
-            <a:srgbClr val="FFFFFF"/>
+            <a:srgbClr val="509546"/>
           </a:solidFill>
-          <a:ln w="19050">
-            <a:solidFill>
-              <a:srgbClr val="E2E8F0"/>
-            </a:solidFill>
+          <a:ln>
+            <a:noFill/>
           </a:ln>
         </p:spPr>
         <p:style>
@@ -3697,23 +3626,173 @@
       </p:sp>
       <p:sp>
         <p:nvSpPr>
-          <p:cNvPr id="11" name="Rectangle 10"/>
+          <p:cNvPr id="12" name="TextBox 11"/>
+          <p:cNvSpPr txBox="1"/>
+          <p:nvPr/>
+        </p:nvSpPr>
+        <p:spPr>
+          <a:xfrm>
+            <a:off x="4608576" y="1920240"/>
+            <a:ext cx="2962656" cy="4206240"/>
+          </a:xfrm>
+          <a:prstGeom prst="rect">
+            <a:avLst/>
+          </a:prstGeom>
+          <a:noFill/>
+        </p:spPr>
+        <p:txBody>
+          <a:bodyPr wrap="square">
+            <a:spAutoFit/>
+          </a:bodyPr>
+          <a:lstStyle/>
+          <a:p>
+            <a:pPr>
+              <a:defRPr sz="950" b="1">
+                <a:solidFill>
+                  <a:srgbClr val="509546"/>
+                </a:solidFill>
+                <a:latin typeface="Raleway"/>
+              </a:defRPr>
+            </a:pPr>
+            <a:r>
+              <a:t>FASE 02  •  02</a:t>
+            </a:r>
+          </a:p>
+          <a:p>
+            <a:pPr>
+              <a:spcAft>
+                <a:spcPts val="400"/>
+              </a:spcAft>
+              <a:defRPr sz="1500" b="1">
+                <a:solidFill>
+                  <a:srgbClr val="1A1A1A"/>
+                </a:solidFill>
+                <a:latin typeface="Raleway"/>
+              </a:defRPr>
+            </a:pPr>
+            <a:r>
+              <a:t>WEB: Integração &amp; Aceitação</a:t>
+            </a:r>
+          </a:p>
+          <a:p>
+            <a:pPr>
+              <a:spcAft>
+                <a:spcPts val="1000"/>
+              </a:spcAft>
+              <a:defRPr sz="850" b="1">
+                <a:solidFill>
+                  <a:srgbClr val="509546"/>
+                </a:solidFill>
+                <a:latin typeface="Raleway"/>
+              </a:defRPr>
+            </a:pPr>
+            <a:r>
+              <a:t>PLANEJADA • SEQUENCIAL</a:t>
+            </a:r>
+          </a:p>
+          <a:p>
+            <a:pPr>
+              <a:spcAft>
+                <a:spcPts val="1400"/>
+              </a:spcAft>
+              <a:defRPr sz="1000">
+                <a:solidFill>
+                  <a:srgbClr val="7F7F7F"/>
+                </a:solidFill>
+                <a:latin typeface="Raleway"/>
+              </a:defRPr>
+            </a:pPr>
+            <a:r>
+              <a:t>Automação E2E com execução autônoma no navegador e evidências rastreáveis.</a:t>
+            </a:r>
+          </a:p>
+          <a:p>
+            <a:pPr>
+              <a:spcAft>
+                <a:spcPts val="600"/>
+              </a:spcAft>
+              <a:defRPr sz="950">
+                <a:solidFill>
+                  <a:srgbClr val="1A1A1A"/>
+                </a:solidFill>
+                <a:latin typeface="Raleway"/>
+              </a:defRPr>
+            </a:pPr>
+            <a:r>
+              <a:t>•  Execução agêntica via Playwright / Camoufox</a:t>
+            </a:r>
+          </a:p>
+          <a:p>
+            <a:pPr>
+              <a:spcAft>
+                <a:spcPts val="600"/>
+              </a:spcAft>
+              <a:defRPr sz="950">
+                <a:solidFill>
+                  <a:srgbClr val="1A1A1A"/>
+                </a:solidFill>
+                <a:latin typeface="Raleway"/>
+              </a:defRPr>
+            </a:pPr>
+            <a:r>
+              <a:t>•  Validação de integração de APIs e regras de negócio</a:t>
+            </a:r>
+          </a:p>
+          <a:p>
+            <a:pPr>
+              <a:spcAft>
+                <a:spcPts val="600"/>
+              </a:spcAft>
+              <a:defRPr sz="950">
+                <a:solidFill>
+                  <a:srgbClr val="1A1A1A"/>
+                </a:solidFill>
+                <a:latin typeface="Raleway"/>
+              </a:defRPr>
+            </a:pPr>
+            <a:r>
+              <a:t>•  Geração de evidências com prints e vídeos por passo</a:t>
+            </a:r>
+          </a:p>
+          <a:p>
+            <a:pPr>
+              <a:spcAft>
+                <a:spcPts val="600"/>
+              </a:spcAft>
+              <a:defRPr sz="950">
+                <a:solidFill>
+                  <a:srgbClr val="1A1A1A"/>
+                </a:solidFill>
+                <a:latin typeface="Raleway"/>
+              </a:defRPr>
+            </a:pPr>
+            <a:r>
+              <a:t>•  Pipeline de regressão contínua integrada ao CI/CD</a:t>
+            </a:r>
+          </a:p>
+        </p:txBody>
+      </p:sp>
+      <p:sp>
+        <p:nvSpPr>
+          <p:cNvPr id="13" name="Rounded Rectangle 12"/>
           <p:cNvSpPr/>
           <p:nvPr/>
         </p:nvSpPr>
         <p:spPr>
           <a:xfrm>
-            <a:off x="8266176" y="1993392"/>
-            <a:ext cx="1097280" cy="54864"/>
-          </a:xfrm>
-          <a:prstGeom prst="rect">
+            <a:off x="8119872" y="1600200"/>
+            <a:ext cx="3328416" cy="4663440"/>
+          </a:xfrm>
+          <a:prstGeom prst="roundRect">
             <a:avLst/>
           </a:prstGeom>
           <a:solidFill>
-            <a:srgbClr val="9333EA"/>
+            <a:srgbClr val="FFFFFF"/>
           </a:solidFill>
-          <a:ln>
-            <a:noFill/>
+          <a:ln w="15240">
+            <a:solidFill>
+              <a:srgbClr val="D8D8D8"/>
+            </a:solidFill>
           </a:ln>
         </p:spPr>
         <p:style>
@@ -3740,14 +3819,57 @@
       </p:sp>
       <p:sp>
         <p:nvSpPr>
-          <p:cNvPr id="12" name="TextBox 11"/>
+          <p:cNvPr id="14" name="Rectangle 13"/>
+          <p:cNvSpPr/>
+          <p:nvPr/>
+        </p:nvSpPr>
+        <p:spPr>
+          <a:xfrm>
+            <a:off x="8302752" y="1764792"/>
+            <a:ext cx="1097280" cy="54864"/>
+          </a:xfrm>
+          <a:prstGeom prst="rect">
+            <a:avLst/>
+          </a:prstGeom>
+          <a:solidFill>
+            <a:srgbClr val="FF5722"/>
+          </a:solidFill>
+          <a:ln>
+            <a:noFill/>
+          </a:ln>
+        </p:spPr>
+        <p:style>
+          <a:lnRef idx="1">
+            <a:schemeClr val="accent1"/>
+          </a:lnRef>
+          <a:fillRef idx="3">
+            <a:schemeClr val="accent1"/>
+          </a:fillRef>
+          <a:effectRef idx="2">
+            <a:schemeClr val="accent1"/>
+          </a:effectRef>
+          <a:fontRef idx="minor">
+            <a:schemeClr val="lt1"/>
+          </a:fontRef>
+        </p:style>
+        <p:txBody>
+          <a:bodyPr rtlCol="0" anchor="ctr"/>
+          <a:lstStyle/>
+          <a:p>
+            <a:pPr algn="ctr"/>
+          </a:p>
+        </p:txBody>
+      </p:sp>
+      <p:sp>
+        <p:nvSpPr>
+          <p:cNvPr id="15" name="TextBox 14"/>
           <p:cNvSpPr txBox="1"/>
           <p:nvPr/>
         </p:nvSpPr>
         <p:spPr>
           <a:xfrm>
-            <a:off x="8266176" y="2148840"/>
-            <a:ext cx="2962656" cy="3931920"/>
+            <a:off x="8302752" y="1920240"/>
+            <a:ext cx="2962656" cy="4206240"/>
           </a:xfrm>
           <a:prstGeom prst="rect">
             <a:avLst/>
@@ -3761,14 +3883,63 @@
           <a:lstStyle/>
           <a:p>
             <a:pPr>
-              <a:defRPr sz="1000" b="1">
-                <a:solidFill>
-                  <a:srgbClr val="9333EA"/>
-                </a:solidFill>
-              </a:defRPr>
-            </a:pPr>
-            <a:r>
-              <a:t>FASE 03</a:t>
+              <a:defRPr sz="950" b="1">
+                <a:solidFill>
+                  <a:srgbClr val="FF5722"/>
+                </a:solidFill>
+                <a:latin typeface="Raleway"/>
+              </a:defRPr>
+            </a:pPr>
+            <a:r>
+              <a:t>FASE 03  •  03</a:t>
+            </a:r>
+          </a:p>
+          <a:p>
+            <a:pPr>
+              <a:spcAft>
+                <a:spcPts val="400"/>
+              </a:spcAft>
+              <a:defRPr sz="1500" b="1">
+                <a:solidFill>
+                  <a:srgbClr val="1A1A1A"/>
+                </a:solidFill>
+                <a:latin typeface="Raleway"/>
+              </a:defRPr>
+            </a:pPr>
+            <a:r>
+              <a:t>MOBILE: Todos os Anteriores</a:t>
+            </a:r>
+          </a:p>
+          <a:p>
+            <a:pPr>
+              <a:spcAft>
+                <a:spcPts val="1000"/>
+              </a:spcAft>
+              <a:defRPr sz="850" b="1">
+                <a:solidFill>
+                  <a:srgbClr val="FF5722"/>
+                </a:solidFill>
+                <a:latin typeface="Raleway"/>
+              </a:defRPr>
+            </a:pPr>
+            <a:r>
+              <a:t>CONDICIONAL • PÓS-WEB</a:t>
+            </a:r>
+          </a:p>
+          <a:p>
+            <a:pPr>
+              <a:spcAft>
+                <a:spcPts val="1400"/>
+              </a:spcAft>
+              <a:defRPr sz="1000">
+                <a:solidFill>
+                  <a:srgbClr val="7F7F7F"/>
+                </a:solidFill>
+                <a:latin typeface="Raleway"/>
+              </a:defRPr>
+            </a:pPr>
+            <a:r>
+              <a:t>Transposição do ecossistema agêntico completo para aplicações mobile nativas.</a:t>
             </a:r>
           </a:p>
           <a:p>
@@ -3776,44 +3947,15 @@
               <a:spcAft>
                 <a:spcPts val="600"/>
               </a:spcAft>
-              <a:defRPr sz="1600" b="1">
-                <a:solidFill>
-                  <a:srgbClr val="0F172A"/>
-                </a:solidFill>
-              </a:defRPr>
-            </a:pPr>
-            <a:r>
-              <a:t>MOBILE: Todos os Anteriores</a:t>
-            </a:r>
-          </a:p>
-          <a:p>
-            <a:pPr>
-              <a:spcAft>
-                <a:spcPts val="1000"/>
-              </a:spcAft>
-              <a:defRPr sz="850" b="1">
-                <a:solidFill>
-                  <a:srgbClr val="9333EA"/>
-                </a:solidFill>
-              </a:defRPr>
-            </a:pPr>
-            <a:r>
-              <a:t>CONDICIONAL • PÓS-WEB</a:t>
-            </a:r>
-          </a:p>
-          <a:p>
-            <a:pPr>
-              <a:spcAft>
-                <a:spcPts val="1400"/>
-              </a:spcAft>
-              <a:defRPr sz="1050">
-                <a:solidFill>
-                  <a:srgbClr val="64748B"/>
-                </a:solidFill>
-              </a:defRPr>
-            </a:pPr>
-            <a:r>
-              <a:t>Transposição do ecossistema agêntico completo para aplicações mobile nativas.</a:t>
+              <a:defRPr sz="950">
+                <a:solidFill>
+                  <a:srgbClr val="1A1A1A"/>
+                </a:solidFill>
+                <a:latin typeface="Raleway"/>
+              </a:defRPr>
+            </a:pPr>
+            <a:r>
+              <a:t>•  Início condicionado ao término das Fases 01 e 02</a:t>
             </a:r>
           </a:p>
           <a:p>
@@ -3821,14 +3963,15 @@
               <a:spcAft>
                 <a:spcPts val="600"/>
               </a:spcAft>
-              <a:defRPr sz="1000">
-                <a:solidFill>
-                  <a:srgbClr val="1E293B"/>
-                </a:solidFill>
-              </a:defRPr>
-            </a:pPr>
-            <a:r>
-              <a:t>•  Início condicionado ao término das Fases 01 e 02</a:t>
+              <a:defRPr sz="950">
+                <a:solidFill>
+                  <a:srgbClr val="1A1A1A"/>
+                </a:solidFill>
+                <a:latin typeface="Raleway"/>
+              </a:defRPr>
+            </a:pPr>
+            <a:r>
+              <a:t>•  Testes funcionais, usabilidade e fluxos de tela nativos</a:t>
             </a:r>
           </a:p>
           <a:p>
@@ -3836,14 +3979,15 @@
               <a:spcAft>
                 <a:spcPts val="600"/>
               </a:spcAft>
-              <a:defRPr sz="1000">
-                <a:solidFill>
-                  <a:srgbClr val="1E293B"/>
-                </a:solidFill>
-              </a:defRPr>
-            </a:pPr>
-            <a:r>
-              <a:t>•  Testes funcionais, usabilidade e fluxos de tela nativos</a:t>
+              <a:defRPr sz="950">
+                <a:solidFill>
+                  <a:srgbClr val="1A1A1A"/>
+                </a:solidFill>
+                <a:latin typeface="Raleway"/>
+              </a:defRPr>
+            </a:pPr>
+            <a:r>
+              <a:t>•  Integração e testes de aceitação em Android/iOS</a:t>
             </a:r>
           </a:p>
           <a:p>
@@ -3851,25 +3995,11 @@
               <a:spcAft>
                 <a:spcPts val="600"/>
               </a:spcAft>
-              <a:defRPr sz="1000">
-                <a:solidFill>
-                  <a:srgbClr val="1E293B"/>
-                </a:solidFill>
-              </a:defRPr>
-            </a:pPr>
-            <a:r>
-              <a:t>•  Integração e testes de aceitação em Android/iOS</a:t>
-            </a:r>
-          </a:p>
-          <a:p>
-            <a:pPr>
-              <a:spcAft>
-                <a:spcPts val="600"/>
-              </a:spcAft>
-              <a:defRPr sz="1000">
-                <a:solidFill>
-                  <a:srgbClr val="1E293B"/>
-                </a:solidFill>
+              <a:defRPr sz="950">
+                <a:solidFill>
+                  <a:srgbClr val="1A1A1A"/>
+                </a:solidFill>
+                <a:latin typeface="Raleway"/>
               </a:defRPr>
             </a:pPr>
             <a:r>
@@ -3911,7 +4041,7 @@
             <a:avLst/>
           </a:prstGeom>
           <a:solidFill>
-            <a:srgbClr val="F8FAFC"/>
+            <a:srgbClr val="F8FAF8"/>
           </a:solidFill>
           <a:ln>
             <a:noFill/>
@@ -3941,14 +4071,57 @@
       </p:sp>
       <p:sp>
         <p:nvSpPr>
-          <p:cNvPr id="3" name="TextBox 2"/>
+          <p:cNvPr id="3" name="Rectangle 2"/>
+          <p:cNvSpPr/>
+          <p:nvPr/>
+        </p:nvSpPr>
+        <p:spPr>
+          <a:xfrm>
+            <a:off x="0" y="0"/>
+            <a:ext cx="12191695" cy="73152"/>
+          </a:xfrm>
+          <a:prstGeom prst="rect">
+            <a:avLst/>
+          </a:prstGeom>
+          <a:solidFill>
+            <a:srgbClr val="38761D"/>
+          </a:solidFill>
+          <a:ln>
+            <a:noFill/>
+          </a:ln>
+        </p:spPr>
+        <p:style>
+          <a:lnRef idx="1">
+            <a:schemeClr val="accent1"/>
+          </a:lnRef>
+          <a:fillRef idx="3">
+            <a:schemeClr val="accent1"/>
+          </a:fillRef>
+          <a:effectRef idx="2">
+            <a:schemeClr val="accent1"/>
+          </a:effectRef>
+          <a:fontRef idx="minor">
+            <a:schemeClr val="lt1"/>
+          </a:fontRef>
+        </p:style>
+        <p:txBody>
+          <a:bodyPr rtlCol="0" anchor="ctr"/>
+          <a:lstStyle/>
+          <a:p>
+            <a:pPr algn="ctr"/>
+          </a:p>
+        </p:txBody>
+      </p:sp>
+      <p:sp>
+        <p:nvSpPr>
+          <p:cNvPr id="4" name="TextBox 3"/>
           <p:cNvSpPr txBox="1"/>
           <p:nvPr/>
         </p:nvSpPr>
         <p:spPr>
           <a:xfrm>
-            <a:off x="731520" y="457200"/>
-            <a:ext cx="10698480" cy="1005840"/>
+            <a:off x="731520" y="365760"/>
+            <a:ext cx="8686800" cy="1051560"/>
           </a:xfrm>
           <a:prstGeom prst="rect">
             <a:avLst/>
@@ -3956,46 +4129,121 @@
           <a:noFill/>
         </p:spPr>
         <p:txBody>
-          <a:bodyPr wrap="square">
+          <a:bodyPr wrap="square" lIns="0" tIns="0" rIns="0" bIns="0">
             <a:spAutoFit/>
           </a:bodyPr>
           <a:lstStyle/>
           <a:p>
             <a:pPr>
-              <a:defRPr sz="1100" b="1">
-                <a:solidFill>
-                  <a:srgbClr val="2563EB"/>
-                </a:solidFill>
-              </a:defRPr>
-            </a:pPr>
-            <a:r>
-              <a:t>PROJETO QAI • X-TESTING</a:t>
-            </a:r>
-          </a:p>
-          <a:p>
-            <a:pPr>
-              <a:defRPr sz="2400" b="1">
-                <a:solidFill>
-                  <a:srgbClr val="0F172A"/>
-                </a:solidFill>
+              <a:defRPr sz="1000" b="1">
+                <a:solidFill>
+                  <a:srgbClr val="FF5722"/>
+                </a:solidFill>
+                <a:latin typeface="Raleway"/>
+              </a:defRPr>
+            </a:pPr>
+            <a:r>
+              <a:t>02 / ROADMAP ESTRATÉGICO</a:t>
+            </a:r>
+          </a:p>
+          <a:p>
+            <a:pPr>
+              <a:defRPr sz="2200" b="1">
+                <a:solidFill>
+                  <a:srgbClr val="1A1A1A"/>
+                </a:solidFill>
+                <a:latin typeface="Raleway"/>
               </a:defRPr>
             </a:pPr>
             <a:r>
               <a:t>Product Stages Roadmap (Setembro - Dezembro 2026)</a:t>
             </a:r>
           </a:p>
-        </p:txBody>
-      </p:sp>
-      <p:sp>
-        <p:nvSpPr>
-          <p:cNvPr id="4" name="Rectangle 3"/>
+          <a:p>
+            <a:pPr>
+              <a:defRPr sz="1100">
+                <a:solidFill>
+                  <a:srgbClr val="7F7F7F"/>
+                </a:solidFill>
+                <a:latin typeface="Raleway"/>
+              </a:defRPr>
+            </a:pPr>
+            <a:r>
+              <a:t>Evolução estruturada em 4 etapas bimestrais com entregas tangíveis e critérios de avanço</a:t>
+            </a:r>
+          </a:p>
+        </p:txBody>
+      </p:sp>
+      <p:pic>
+        <p:nvPicPr>
+          <p:cNvPr id="5" name="Picture 4" descr="image2.png"/>
+          <p:cNvPicPr>
+            <a:picLocks noChangeAspect="1"/>
+          </p:cNvPicPr>
+          <p:nvPr/>
+        </p:nvPicPr>
+        <p:blipFill>
+          <a:blip r:embed="rId2"/>
+          <a:stretch>
+            <a:fillRect/>
+          </a:stretch>
+        </p:blipFill>
+        <p:spPr>
+          <a:xfrm>
+            <a:off x="9875520" y="365760"/>
+            <a:ext cx="1600200" cy="869674"/>
+          </a:xfrm>
+          <a:prstGeom prst="rect">
+            <a:avLst/>
+          </a:prstGeom>
+        </p:spPr>
+      </p:pic>
+      <p:sp>
+        <p:nvSpPr>
+          <p:cNvPr id="6" name="TextBox 5"/>
+          <p:cNvSpPr txBox="1"/>
+          <p:nvPr/>
+        </p:nvSpPr>
+        <p:spPr>
+          <a:xfrm>
+            <a:off x="731520" y="6446520"/>
+            <a:ext cx="10728655" cy="320040"/>
+          </a:xfrm>
+          <a:prstGeom prst="rect">
+            <a:avLst/>
+          </a:prstGeom>
+          <a:noFill/>
+        </p:spPr>
+        <p:txBody>
+          <a:bodyPr wrap="none" lIns="0" tIns="0" rIns="0" bIns="0">
+            <a:spAutoFit/>
+          </a:bodyPr>
+          <a:lstStyle/>
+          <a:p>
+            <a:pPr>
+              <a:defRPr sz="800" b="1">
+                <a:solidFill>
+                  <a:srgbClr val="A0A0A0"/>
+                </a:solidFill>
+                <a:latin typeface="Raleway"/>
+              </a:defRPr>
+            </a:pPr>
+            <a:r>
+              <a:t>PROJETO QAI • FÁBRICA DE TESTES X-TESTING  |  ESTEIRA DE QUALIDADE &amp; SANASA  |  WWW.XTESTING.COM.BR</a:t>
+            </a:r>
+          </a:p>
+        </p:txBody>
+      </p:sp>
+      <p:sp>
+        <p:nvSpPr>
+          <p:cNvPr id="7" name="Rectangle 6"/>
           <p:cNvSpPr/>
           <p:nvPr/>
         </p:nvSpPr>
         <p:spPr>
           <a:xfrm>
             <a:off x="731520" y="1554480"/>
-            <a:ext cx="1645920" cy="640080"/>
+            <a:ext cx="1645920" cy="594360"/>
           </a:xfrm>
           <a:prstGeom prst="rect">
             <a:avLst/>
@@ -4005,7 +4253,7 @@
           </a:solidFill>
           <a:ln>
             <a:solidFill>
-              <a:srgbClr val="E2E8F0"/>
+              <a:srgbClr val="D8D8D8"/>
             </a:solidFill>
           </a:ln>
         </p:spPr>
@@ -4024,14 +4272,15 @@
           </a:fontRef>
         </p:style>
         <p:txBody>
-          <a:bodyPr rtlCol="0" anchor="ctr" wrap="square"/>
+          <a:bodyPr rtlCol="0" anchor="ctr"/>
           <a:lstStyle/>
           <a:p>
             <a:pPr algn="ctr">
               <a:defRPr b="1" sz="1100">
                 <a:solidFill>
-                  <a:srgbClr val="0F172A"/>
-                </a:solidFill>
+                  <a:srgbClr val="1A1A1A"/>
+                </a:solidFill>
+                <a:latin typeface="Raleway"/>
               </a:defRPr>
             </a:pPr>
             <a:r>
@@ -4042,20 +4291,20 @@
       </p:sp>
       <p:sp>
         <p:nvSpPr>
-          <p:cNvPr id="5" name="Chevron 4"/>
+          <p:cNvPr id="8" name="Chevron 7"/>
           <p:cNvSpPr/>
           <p:nvPr/>
         </p:nvSpPr>
         <p:spPr>
           <a:xfrm>
             <a:off x="2560320" y="1554480"/>
-            <a:ext cx="1645920" cy="640080"/>
+            <a:ext cx="1645920" cy="594360"/>
           </a:xfrm>
           <a:prstGeom prst="chevron">
             <a:avLst/>
           </a:prstGeom>
           <a:solidFill>
-            <a:srgbClr val="EA580C"/>
+            <a:srgbClr val="38761D"/>
           </a:solidFill>
           <a:ln>
             <a:noFill/>
@@ -4076,14 +4325,15 @@
           </a:fontRef>
         </p:style>
         <p:txBody>
-          <a:bodyPr rtlCol="0" anchor="ctr" wrap="square"/>
+          <a:bodyPr rtlCol="0" anchor="ctr"/>
           <a:lstStyle/>
           <a:p>
             <a:pPr algn="ctr">
-              <a:defRPr b="1" sz="1100">
+              <a:defRPr b="1" sz="1050">
                 <a:solidFill>
                   <a:srgbClr val="FFFFFF"/>
                 </a:solidFill>
+                <a:latin typeface="Raleway"/>
               </a:defRPr>
             </a:pPr>
             <a:r>
@@ -4094,20 +4344,20 @@
       </p:sp>
       <p:sp>
         <p:nvSpPr>
-          <p:cNvPr id="6" name="Chevron 5"/>
+          <p:cNvPr id="9" name="Chevron 8"/>
           <p:cNvSpPr/>
           <p:nvPr/>
         </p:nvSpPr>
         <p:spPr>
           <a:xfrm>
             <a:off x="4937760" y="1554480"/>
-            <a:ext cx="2240280" cy="640080"/>
+            <a:ext cx="2240280" cy="594360"/>
           </a:xfrm>
           <a:prstGeom prst="chevron">
             <a:avLst/>
           </a:prstGeom>
           <a:solidFill>
-            <a:srgbClr val="2563EB"/>
+            <a:srgbClr val="509546"/>
           </a:solidFill>
           <a:ln>
             <a:noFill/>
@@ -4128,14 +4378,15 @@
           </a:fontRef>
         </p:style>
         <p:txBody>
-          <a:bodyPr rtlCol="0" anchor="ctr" wrap="square"/>
+          <a:bodyPr rtlCol="0" anchor="ctr"/>
           <a:lstStyle/>
           <a:p>
             <a:pPr algn="ctr">
-              <a:defRPr b="1" sz="1100">
+              <a:defRPr b="1" sz="1050">
                 <a:solidFill>
                   <a:srgbClr val="FFFFFF"/>
                 </a:solidFill>
+                <a:latin typeface="Raleway"/>
               </a:defRPr>
             </a:pPr>
             <a:r>
@@ -4146,20 +4397,20 @@
       </p:sp>
       <p:sp>
         <p:nvSpPr>
-          <p:cNvPr id="7" name="Chevron 6"/>
+          <p:cNvPr id="10" name="Chevron 9"/>
           <p:cNvSpPr/>
           <p:nvPr/>
         </p:nvSpPr>
         <p:spPr>
           <a:xfrm>
             <a:off x="7315200" y="1554480"/>
-            <a:ext cx="2240280" cy="640080"/>
+            <a:ext cx="2240280" cy="594360"/>
           </a:xfrm>
           <a:prstGeom prst="chevron">
             <a:avLst/>
           </a:prstGeom>
           <a:solidFill>
-            <a:srgbClr val="9333EA"/>
+            <a:srgbClr val="156082"/>
           </a:solidFill>
           <a:ln>
             <a:noFill/>
@@ -4180,14 +4431,15 @@
           </a:fontRef>
         </p:style>
         <p:txBody>
-          <a:bodyPr rtlCol="0" anchor="ctr" wrap="square"/>
+          <a:bodyPr rtlCol="0" anchor="ctr"/>
           <a:lstStyle/>
           <a:p>
             <a:pPr algn="ctr">
-              <a:defRPr b="1" sz="1100">
+              <a:defRPr b="1" sz="1050">
                 <a:solidFill>
                   <a:srgbClr val="FFFFFF"/>
                 </a:solidFill>
+                <a:latin typeface="Raleway"/>
               </a:defRPr>
             </a:pPr>
             <a:r>
@@ -4198,20 +4450,20 @@
       </p:sp>
       <p:sp>
         <p:nvSpPr>
-          <p:cNvPr id="8" name="Chevron 7"/>
+          <p:cNvPr id="11" name="Chevron 10"/>
           <p:cNvSpPr/>
           <p:nvPr/>
         </p:nvSpPr>
         <p:spPr>
           <a:xfrm>
             <a:off x="9692640" y="1554480"/>
-            <a:ext cx="2240280" cy="640080"/>
+            <a:ext cx="2240280" cy="594360"/>
           </a:xfrm>
           <a:prstGeom prst="chevron">
             <a:avLst/>
           </a:prstGeom>
           <a:solidFill>
-            <a:srgbClr val="16A34A"/>
+            <a:srgbClr val="FF5722"/>
           </a:solidFill>
           <a:ln>
             <a:noFill/>
@@ -4232,14 +4484,15 @@
           </a:fontRef>
         </p:style>
         <p:txBody>
-          <a:bodyPr rtlCol="0" anchor="ctr" wrap="square"/>
+          <a:bodyPr rtlCol="0" anchor="ctr"/>
           <a:lstStyle/>
           <a:p>
             <a:pPr algn="ctr">
-              <a:defRPr b="1" sz="1100">
+              <a:defRPr b="1" sz="1050">
                 <a:solidFill>
                   <a:srgbClr val="FFFFFF"/>
                 </a:solidFill>
+                <a:latin typeface="Raleway"/>
               </a:defRPr>
             </a:pPr>
             <a:r>
@@ -4250,14 +4503,14 @@
       </p:sp>
       <p:sp>
         <p:nvSpPr>
-          <p:cNvPr id="9" name="Rectangle 8"/>
+          <p:cNvPr id="12" name="Rectangle 11"/>
           <p:cNvSpPr/>
           <p:nvPr/>
         </p:nvSpPr>
         <p:spPr>
           <a:xfrm>
-            <a:off x="731520" y="2286000"/>
-            <a:ext cx="1645920" cy="1371600"/>
+            <a:off x="731520" y="2240280"/>
+            <a:ext cx="1645920" cy="1325880"/>
           </a:xfrm>
           <a:prstGeom prst="rect">
             <a:avLst/>
@@ -4267,7 +4520,7 @@
           </a:solidFill>
           <a:ln>
             <a:solidFill>
-              <a:srgbClr val="E2E8F0"/>
+              <a:srgbClr val="D8D8D8"/>
             </a:solidFill>
           </a:ln>
         </p:spPr>
@@ -4286,14 +4539,15 @@
           </a:fontRef>
         </p:style>
         <p:txBody>
-          <a:bodyPr rtlCol="0" anchor="ctr" wrap="square"/>
+          <a:bodyPr rtlCol="0" anchor="ctr"/>
           <a:lstStyle/>
           <a:p>
             <a:pPr algn="ctr">
-              <a:defRPr b="1" sz="1100">
-                <a:solidFill>
-                  <a:srgbClr val="1E293B"/>
-                </a:solidFill>
+              <a:defRPr b="1" sz="1050">
+                <a:solidFill>
+                  <a:srgbClr val="1A1A1A"/>
+                </a:solidFill>
+                <a:latin typeface="Raleway"/>
               </a:defRPr>
             </a:pPr>
             <a:r>
@@ -4308,24 +4562,24 @@
       </p:sp>
       <p:sp>
         <p:nvSpPr>
-          <p:cNvPr id="10" name="Rectangle 9"/>
+          <p:cNvPr id="13" name="Rectangle 12"/>
           <p:cNvSpPr/>
           <p:nvPr/>
         </p:nvSpPr>
         <p:spPr>
           <a:xfrm>
-            <a:off x="2560320" y="2286000"/>
-            <a:ext cx="1645920" cy="1371600"/>
+            <a:off x="2560320" y="2240280"/>
+            <a:ext cx="1645920" cy="1325880"/>
           </a:xfrm>
           <a:prstGeom prst="rect">
             <a:avLst/>
           </a:prstGeom>
           <a:solidFill>
-            <a:srgbClr val="FEF3C7"/>
+            <a:srgbClr val="EDF7ED"/>
           </a:solidFill>
           <a:ln w="19050">
             <a:solidFill>
-              <a:srgbClr val="EA580C"/>
+              <a:srgbClr val="38761D"/>
             </a:solidFill>
           </a:ln>
         </p:spPr>
@@ -4349,12 +4603,13 @@
           <a:p>
             <a:pPr algn="ctr">
               <a:spcAft>
-                <a:spcPts val="300"/>
-              </a:spcAft>
-              <a:defRPr sz="950" b="1">
-                <a:solidFill>
-                  <a:srgbClr val="0F172A"/>
-                </a:solidFill>
+                <a:spcPts val="200"/>
+              </a:spcAft>
+              <a:defRPr sz="900" b="1">
+                <a:solidFill>
+                  <a:srgbClr val="274E13"/>
+                </a:solidFill>
+                <a:latin typeface="Raleway"/>
               </a:defRPr>
             </a:pPr>
             <a:r>
@@ -4364,12 +4619,13 @@
           <a:p>
             <a:pPr>
               <a:spcAft>
-                <a:spcPts val="300"/>
-              </a:spcAft>
-              <a:defRPr sz="950" b="1">
-                <a:solidFill>
-                  <a:srgbClr val="0F172A"/>
-                </a:solidFill>
+                <a:spcPts val="200"/>
+              </a:spcAft>
+              <a:defRPr sz="900" b="1">
+                <a:solidFill>
+                  <a:srgbClr val="274E13"/>
+                </a:solidFill>
+                <a:latin typeface="Raleway"/>
               </a:defRPr>
             </a:pPr>
             <a:r>
@@ -4379,12 +4635,13 @@
           <a:p>
             <a:pPr>
               <a:spcAft>
-                <a:spcPts val="300"/>
-              </a:spcAft>
-              <a:defRPr sz="950" b="1">
-                <a:solidFill>
-                  <a:srgbClr val="0F172A"/>
-                </a:solidFill>
+                <a:spcPts val="200"/>
+              </a:spcAft>
+              <a:defRPr sz="900" b="1">
+                <a:solidFill>
+                  <a:srgbClr val="274E13"/>
+                </a:solidFill>
+                <a:latin typeface="Raleway"/>
               </a:defRPr>
             </a:pPr>
             <a:r>
@@ -4395,14 +4652,14 @@
       </p:sp>
       <p:sp>
         <p:nvSpPr>
-          <p:cNvPr id="11" name="Rectangle 10"/>
+          <p:cNvPr id="14" name="Rectangle 13"/>
           <p:cNvSpPr/>
           <p:nvPr/>
         </p:nvSpPr>
         <p:spPr>
           <a:xfrm>
-            <a:off x="4937760" y="2286000"/>
-            <a:ext cx="2240280" cy="1371600"/>
+            <a:off x="4937760" y="2240280"/>
+            <a:ext cx="2240280" cy="1325880"/>
           </a:xfrm>
           <a:prstGeom prst="rect">
             <a:avLst/>
@@ -4412,7 +4669,7 @@
           </a:solidFill>
           <a:ln w="12700">
             <a:solidFill>
-              <a:srgbClr val="E2E8F0"/>
+              <a:srgbClr val="D8D8D8"/>
             </a:solidFill>
           </a:ln>
         </p:spPr>
@@ -4436,12 +4693,13 @@
           <a:p>
             <a:pPr algn="ctr">
               <a:spcAft>
-                <a:spcPts val="300"/>
-              </a:spcAft>
-              <a:defRPr sz="950">
-                <a:solidFill>
-                  <a:srgbClr val="1E293B"/>
-                </a:solidFill>
+                <a:spcPts val="200"/>
+              </a:spcAft>
+              <a:defRPr sz="900">
+                <a:solidFill>
+                  <a:srgbClr val="1A1A1A"/>
+                </a:solidFill>
+                <a:latin typeface="Raleway"/>
               </a:defRPr>
             </a:pPr>
             <a:r>
@@ -4451,12 +4709,13 @@
           <a:p>
             <a:pPr>
               <a:spcAft>
-                <a:spcPts val="300"/>
-              </a:spcAft>
-              <a:defRPr sz="950">
-                <a:solidFill>
-                  <a:srgbClr val="1E293B"/>
-                </a:solidFill>
+                <a:spcPts val="200"/>
+              </a:spcAft>
+              <a:defRPr sz="900">
+                <a:solidFill>
+                  <a:srgbClr val="1A1A1A"/>
+                </a:solidFill>
+                <a:latin typeface="Raleway"/>
               </a:defRPr>
             </a:pPr>
             <a:r>
@@ -4466,12 +4725,13 @@
           <a:p>
             <a:pPr>
               <a:spcAft>
-                <a:spcPts val="300"/>
-              </a:spcAft>
-              <a:defRPr sz="950">
-                <a:solidFill>
-                  <a:srgbClr val="1E293B"/>
-                </a:solidFill>
+                <a:spcPts val="200"/>
+              </a:spcAft>
+              <a:defRPr sz="900">
+                <a:solidFill>
+                  <a:srgbClr val="1A1A1A"/>
+                </a:solidFill>
+                <a:latin typeface="Raleway"/>
               </a:defRPr>
             </a:pPr>
             <a:r>
@@ -4482,14 +4742,14 @@
       </p:sp>
       <p:sp>
         <p:nvSpPr>
-          <p:cNvPr id="12" name="Rectangle 11"/>
+          <p:cNvPr id="15" name="Rectangle 14"/>
           <p:cNvSpPr/>
           <p:nvPr/>
         </p:nvSpPr>
         <p:spPr>
           <a:xfrm>
-            <a:off x="7315200" y="2286000"/>
-            <a:ext cx="2240280" cy="1371600"/>
+            <a:off x="7315200" y="2240280"/>
+            <a:ext cx="2240280" cy="1325880"/>
           </a:xfrm>
           <a:prstGeom prst="rect">
             <a:avLst/>
@@ -4499,7 +4759,7 @@
           </a:solidFill>
           <a:ln w="12700">
             <a:solidFill>
-              <a:srgbClr val="E2E8F0"/>
+              <a:srgbClr val="D8D8D8"/>
             </a:solidFill>
           </a:ln>
         </p:spPr>
@@ -4523,12 +4783,13 @@
           <a:p>
             <a:pPr algn="ctr">
               <a:spcAft>
-                <a:spcPts val="300"/>
-              </a:spcAft>
-              <a:defRPr sz="950">
-                <a:solidFill>
-                  <a:srgbClr val="1E293B"/>
-                </a:solidFill>
+                <a:spcPts val="200"/>
+              </a:spcAft>
+              <a:defRPr sz="900">
+                <a:solidFill>
+                  <a:srgbClr val="1A1A1A"/>
+                </a:solidFill>
+                <a:latin typeface="Raleway"/>
               </a:defRPr>
             </a:pPr>
             <a:r>
@@ -4538,12 +4799,13 @@
           <a:p>
             <a:pPr>
               <a:spcAft>
-                <a:spcPts val="300"/>
-              </a:spcAft>
-              <a:defRPr sz="950">
-                <a:solidFill>
-                  <a:srgbClr val="1E293B"/>
-                </a:solidFill>
+                <a:spcPts val="200"/>
+              </a:spcAft>
+              <a:defRPr sz="900">
+                <a:solidFill>
+                  <a:srgbClr val="1A1A1A"/>
+                </a:solidFill>
+                <a:latin typeface="Raleway"/>
               </a:defRPr>
             </a:pPr>
             <a:r>
@@ -4553,12 +4815,13 @@
           <a:p>
             <a:pPr>
               <a:spcAft>
-                <a:spcPts val="300"/>
-              </a:spcAft>
-              <a:defRPr sz="950">
-                <a:solidFill>
-                  <a:srgbClr val="1E293B"/>
-                </a:solidFill>
+                <a:spcPts val="200"/>
+              </a:spcAft>
+              <a:defRPr sz="900">
+                <a:solidFill>
+                  <a:srgbClr val="1A1A1A"/>
+                </a:solidFill>
+                <a:latin typeface="Raleway"/>
               </a:defRPr>
             </a:pPr>
             <a:r>
@@ -4569,14 +4832,14 @@
       </p:sp>
       <p:sp>
         <p:nvSpPr>
-          <p:cNvPr id="13" name="Rectangle 12"/>
+          <p:cNvPr id="16" name="Rectangle 15"/>
           <p:cNvSpPr/>
           <p:nvPr/>
         </p:nvSpPr>
         <p:spPr>
           <a:xfrm>
-            <a:off x="9692640" y="2286000"/>
-            <a:ext cx="2240280" cy="1371600"/>
+            <a:off x="9692640" y="2240280"/>
+            <a:ext cx="2240280" cy="1325880"/>
           </a:xfrm>
           <a:prstGeom prst="rect">
             <a:avLst/>
@@ -4586,7 +4849,7 @@
           </a:solidFill>
           <a:ln w="12700">
             <a:solidFill>
-              <a:srgbClr val="E2E8F0"/>
+              <a:srgbClr val="D8D8D8"/>
             </a:solidFill>
           </a:ln>
         </p:spPr>
@@ -4610,12 +4873,13 @@
           <a:p>
             <a:pPr algn="ctr">
               <a:spcAft>
-                <a:spcPts val="300"/>
-              </a:spcAft>
-              <a:defRPr sz="950">
-                <a:solidFill>
-                  <a:srgbClr val="1E293B"/>
-                </a:solidFill>
+                <a:spcPts val="200"/>
+              </a:spcAft>
+              <a:defRPr sz="900">
+                <a:solidFill>
+                  <a:srgbClr val="1A1A1A"/>
+                </a:solidFill>
+                <a:latin typeface="Raleway"/>
               </a:defRPr>
             </a:pPr>
             <a:r>
@@ -4625,12 +4889,13 @@
           <a:p>
             <a:pPr>
               <a:spcAft>
-                <a:spcPts val="300"/>
-              </a:spcAft>
-              <a:defRPr sz="950">
-                <a:solidFill>
-                  <a:srgbClr val="1E293B"/>
-                </a:solidFill>
+                <a:spcPts val="200"/>
+              </a:spcAft>
+              <a:defRPr sz="900">
+                <a:solidFill>
+                  <a:srgbClr val="1A1A1A"/>
+                </a:solidFill>
+                <a:latin typeface="Raleway"/>
               </a:defRPr>
             </a:pPr>
             <a:r>
@@ -4640,12 +4905,13 @@
           <a:p>
             <a:pPr>
               <a:spcAft>
-                <a:spcPts val="300"/>
-              </a:spcAft>
-              <a:defRPr sz="950">
-                <a:solidFill>
-                  <a:srgbClr val="1E293B"/>
-                </a:solidFill>
+                <a:spcPts val="200"/>
+              </a:spcAft>
+              <a:defRPr sz="900">
+                <a:solidFill>
+                  <a:srgbClr val="1A1A1A"/>
+                </a:solidFill>
+                <a:latin typeface="Raleway"/>
               </a:defRPr>
             </a:pPr>
             <a:r>
@@ -4656,13 +4922,13 @@
       </p:sp>
       <p:sp>
         <p:nvSpPr>
-          <p:cNvPr id="14" name="Rectangle 13"/>
+          <p:cNvPr id="17" name="Rectangle 16"/>
           <p:cNvSpPr/>
           <p:nvPr/>
         </p:nvSpPr>
         <p:spPr>
           <a:xfrm>
-            <a:off x="731520" y="3749039"/>
+            <a:off x="731520" y="3657600"/>
             <a:ext cx="1645920" cy="1325880"/>
           </a:xfrm>
           <a:prstGeom prst="rect">
@@ -4673,7 +4939,7 @@
           </a:solidFill>
           <a:ln>
             <a:solidFill>
-              <a:srgbClr val="E2E8F0"/>
+              <a:srgbClr val="D8D8D8"/>
             </a:solidFill>
           </a:ln>
         </p:spPr>
@@ -4692,14 +4958,15 @@
           </a:fontRef>
         </p:style>
         <p:txBody>
-          <a:bodyPr rtlCol="0" anchor="ctr" wrap="square"/>
+          <a:bodyPr rtlCol="0" anchor="ctr"/>
           <a:lstStyle/>
           <a:p>
             <a:pPr algn="ctr">
-              <a:defRPr b="1" sz="1100">
-                <a:solidFill>
-                  <a:srgbClr val="1E293B"/>
-                </a:solidFill>
+              <a:defRPr b="1" sz="1050">
+                <a:solidFill>
+                  <a:srgbClr val="1A1A1A"/>
+                </a:solidFill>
+                <a:latin typeface="Raleway"/>
               </a:defRPr>
             </a:pPr>
             <a:r>
@@ -4714,24 +4981,24 @@
       </p:sp>
       <p:sp>
         <p:nvSpPr>
-          <p:cNvPr id="15" name="Rectangle 14"/>
+          <p:cNvPr id="18" name="Rectangle 17"/>
           <p:cNvSpPr/>
           <p:nvPr/>
         </p:nvSpPr>
         <p:spPr>
           <a:xfrm>
-            <a:off x="2560320" y="3749039"/>
+            <a:off x="2560320" y="3657600"/>
             <a:ext cx="1645920" cy="1325880"/>
           </a:xfrm>
           <a:prstGeom prst="rect">
             <a:avLst/>
           </a:prstGeom>
           <a:solidFill>
-            <a:srgbClr val="FEF3C7"/>
+            <a:srgbClr val="EDF7ED"/>
           </a:solidFill>
           <a:ln w="19050">
             <a:solidFill>
-              <a:srgbClr val="EA580C"/>
+              <a:srgbClr val="38761D"/>
             </a:solidFill>
           </a:ln>
         </p:spPr>
@@ -4755,12 +5022,13 @@
           <a:p>
             <a:pPr algn="ctr">
               <a:spcAft>
-                <a:spcPts val="300"/>
-              </a:spcAft>
-              <a:defRPr sz="950" b="1">
-                <a:solidFill>
-                  <a:srgbClr val="0F172A"/>
-                </a:solidFill>
+                <a:spcPts val="200"/>
+              </a:spcAft>
+              <a:defRPr sz="900" b="1">
+                <a:solidFill>
+                  <a:srgbClr val="274E13"/>
+                </a:solidFill>
+                <a:latin typeface="Raleway"/>
               </a:defRPr>
             </a:pPr>
             <a:r>
@@ -4770,12 +5038,13 @@
           <a:p>
             <a:pPr>
               <a:spcAft>
-                <a:spcPts val="300"/>
-              </a:spcAft>
-              <a:defRPr sz="950" b="1">
-                <a:solidFill>
-                  <a:srgbClr val="0F172A"/>
-                </a:solidFill>
+                <a:spcPts val="200"/>
+              </a:spcAft>
+              <a:defRPr sz="900" b="1">
+                <a:solidFill>
+                  <a:srgbClr val="274E13"/>
+                </a:solidFill>
+                <a:latin typeface="Raleway"/>
               </a:defRPr>
             </a:pPr>
             <a:r>
@@ -4785,12 +5054,13 @@
           <a:p>
             <a:pPr>
               <a:spcAft>
-                <a:spcPts val="300"/>
-              </a:spcAft>
-              <a:defRPr sz="950" b="1">
-                <a:solidFill>
-                  <a:srgbClr val="0F172A"/>
-                </a:solidFill>
+                <a:spcPts val="200"/>
+              </a:spcAft>
+              <a:defRPr sz="900" b="1">
+                <a:solidFill>
+                  <a:srgbClr val="274E13"/>
+                </a:solidFill>
+                <a:latin typeface="Raleway"/>
               </a:defRPr>
             </a:pPr>
             <a:r>
@@ -4801,13 +5071,13 @@
       </p:sp>
       <p:sp>
         <p:nvSpPr>
-          <p:cNvPr id="16" name="Rectangle 15"/>
+          <p:cNvPr id="19" name="Rectangle 18"/>
           <p:cNvSpPr/>
           <p:nvPr/>
         </p:nvSpPr>
         <p:spPr>
           <a:xfrm>
-            <a:off x="4937760" y="3749039"/>
+            <a:off x="4937760" y="3657600"/>
             <a:ext cx="2240280" cy="1325880"/>
           </a:xfrm>
           <a:prstGeom prst="rect">
@@ -4818,7 +5088,7 @@
           </a:solidFill>
           <a:ln w="12700">
             <a:solidFill>
-              <a:srgbClr val="E2E8F0"/>
+              <a:srgbClr val="D8D8D8"/>
             </a:solidFill>
           </a:ln>
         </p:spPr>
@@ -4842,12 +5112,13 @@
           <a:p>
             <a:pPr algn="ctr">
               <a:spcAft>
-                <a:spcPts val="300"/>
-              </a:spcAft>
-              <a:defRPr sz="950">
-                <a:solidFill>
-                  <a:srgbClr val="1E293B"/>
-                </a:solidFill>
+                <a:spcPts val="200"/>
+              </a:spcAft>
+              <a:defRPr sz="900">
+                <a:solidFill>
+                  <a:srgbClr val="1A1A1A"/>
+                </a:solidFill>
+                <a:latin typeface="Raleway"/>
               </a:defRPr>
             </a:pPr>
             <a:r>
@@ -4857,12 +5128,13 @@
           <a:p>
             <a:pPr>
               <a:spcAft>
-                <a:spcPts val="300"/>
-              </a:spcAft>
-              <a:defRPr sz="950">
-                <a:solidFill>
-                  <a:srgbClr val="1E293B"/>
-                </a:solidFill>
+                <a:spcPts val="200"/>
+              </a:spcAft>
+              <a:defRPr sz="900">
+                <a:solidFill>
+                  <a:srgbClr val="1A1A1A"/>
+                </a:solidFill>
+                <a:latin typeface="Raleway"/>
               </a:defRPr>
             </a:pPr>
             <a:r>
@@ -4872,12 +5144,13 @@
           <a:p>
             <a:pPr>
               <a:spcAft>
-                <a:spcPts val="300"/>
-              </a:spcAft>
-              <a:defRPr sz="950">
-                <a:solidFill>
-                  <a:srgbClr val="1E293B"/>
-                </a:solidFill>
+                <a:spcPts val="200"/>
+              </a:spcAft>
+              <a:defRPr sz="900">
+                <a:solidFill>
+                  <a:srgbClr val="1A1A1A"/>
+                </a:solidFill>
+                <a:latin typeface="Raleway"/>
               </a:defRPr>
             </a:pPr>
             <a:r>
@@ -4888,13 +5161,13 @@
       </p:sp>
       <p:sp>
         <p:nvSpPr>
-          <p:cNvPr id="17" name="Rectangle 16"/>
+          <p:cNvPr id="20" name="Rectangle 19"/>
           <p:cNvSpPr/>
           <p:nvPr/>
         </p:nvSpPr>
         <p:spPr>
           <a:xfrm>
-            <a:off x="7315200" y="3749039"/>
+            <a:off x="7315200" y="3657600"/>
             <a:ext cx="2240280" cy="1325880"/>
           </a:xfrm>
           <a:prstGeom prst="rect">
@@ -4905,7 +5178,7 @@
           </a:solidFill>
           <a:ln w="12700">
             <a:solidFill>
-              <a:srgbClr val="E2E8F0"/>
+              <a:srgbClr val="D8D8D8"/>
             </a:solidFill>
           </a:ln>
         </p:spPr>
@@ -4929,12 +5202,13 @@
           <a:p>
             <a:pPr algn="ctr">
               <a:spcAft>
-                <a:spcPts val="300"/>
-              </a:spcAft>
-              <a:defRPr sz="950">
-                <a:solidFill>
-                  <a:srgbClr val="1E293B"/>
-                </a:solidFill>
+                <a:spcPts val="200"/>
+              </a:spcAft>
+              <a:defRPr sz="900">
+                <a:solidFill>
+                  <a:srgbClr val="1A1A1A"/>
+                </a:solidFill>
+                <a:latin typeface="Raleway"/>
               </a:defRPr>
             </a:pPr>
             <a:r>
@@ -4944,12 +5218,13 @@
           <a:p>
             <a:pPr>
               <a:spcAft>
-                <a:spcPts val="300"/>
-              </a:spcAft>
-              <a:defRPr sz="950">
-                <a:solidFill>
-                  <a:srgbClr val="1E293B"/>
-                </a:solidFill>
+                <a:spcPts val="200"/>
+              </a:spcAft>
+              <a:defRPr sz="900">
+                <a:solidFill>
+                  <a:srgbClr val="1A1A1A"/>
+                </a:solidFill>
+                <a:latin typeface="Raleway"/>
               </a:defRPr>
             </a:pPr>
             <a:r>
@@ -4959,12 +5234,13 @@
           <a:p>
             <a:pPr>
               <a:spcAft>
-                <a:spcPts val="300"/>
-              </a:spcAft>
-              <a:defRPr sz="950">
-                <a:solidFill>
-                  <a:srgbClr val="1E293B"/>
-                </a:solidFill>
+                <a:spcPts val="200"/>
+              </a:spcAft>
+              <a:defRPr sz="900">
+                <a:solidFill>
+                  <a:srgbClr val="1A1A1A"/>
+                </a:solidFill>
+                <a:latin typeface="Raleway"/>
               </a:defRPr>
             </a:pPr>
             <a:r>
@@ -4975,13 +5251,13 @@
       </p:sp>
       <p:sp>
         <p:nvSpPr>
-          <p:cNvPr id="18" name="Rectangle 17"/>
+          <p:cNvPr id="21" name="Rectangle 20"/>
           <p:cNvSpPr/>
           <p:nvPr/>
         </p:nvSpPr>
         <p:spPr>
           <a:xfrm>
-            <a:off x="9692640" y="3749039"/>
+            <a:off x="9692640" y="3657600"/>
             <a:ext cx="2240280" cy="1325880"/>
           </a:xfrm>
           <a:prstGeom prst="rect">
@@ -4992,7 +5268,7 @@
           </a:solidFill>
           <a:ln w="12700">
             <a:solidFill>
-              <a:srgbClr val="E2E8F0"/>
+              <a:srgbClr val="D8D8D8"/>
             </a:solidFill>
           </a:ln>
         </p:spPr>
@@ -5016,12 +5292,13 @@
           <a:p>
             <a:pPr algn="ctr">
               <a:spcAft>
-                <a:spcPts val="300"/>
-              </a:spcAft>
-              <a:defRPr sz="950">
-                <a:solidFill>
-                  <a:srgbClr val="1E293B"/>
-                </a:solidFill>
+                <a:spcPts val="200"/>
+              </a:spcAft>
+              <a:defRPr sz="900">
+                <a:solidFill>
+                  <a:srgbClr val="1A1A1A"/>
+                </a:solidFill>
+                <a:latin typeface="Raleway"/>
               </a:defRPr>
             </a:pPr>
             <a:r>
@@ -5031,12 +5308,13 @@
           <a:p>
             <a:pPr>
               <a:spcAft>
-                <a:spcPts val="300"/>
-              </a:spcAft>
-              <a:defRPr sz="950">
-                <a:solidFill>
-                  <a:srgbClr val="1E293B"/>
-                </a:solidFill>
+                <a:spcPts val="200"/>
+              </a:spcAft>
+              <a:defRPr sz="900">
+                <a:solidFill>
+                  <a:srgbClr val="1A1A1A"/>
+                </a:solidFill>
+                <a:latin typeface="Raleway"/>
               </a:defRPr>
             </a:pPr>
             <a:r>
@@ -5046,12 +5324,13 @@
           <a:p>
             <a:pPr>
               <a:spcAft>
-                <a:spcPts val="300"/>
-              </a:spcAft>
-              <a:defRPr sz="950">
-                <a:solidFill>
-                  <a:srgbClr val="1E293B"/>
-                </a:solidFill>
+                <a:spcPts val="200"/>
+              </a:spcAft>
+              <a:defRPr sz="900">
+                <a:solidFill>
+                  <a:srgbClr val="1A1A1A"/>
+                </a:solidFill>
+                <a:latin typeface="Raleway"/>
               </a:defRPr>
             </a:pPr>
             <a:r>
@@ -5062,14 +5341,14 @@
       </p:sp>
       <p:sp>
         <p:nvSpPr>
-          <p:cNvPr id="19" name="Rectangle 18"/>
+          <p:cNvPr id="22" name="Rectangle 21"/>
           <p:cNvSpPr/>
           <p:nvPr/>
         </p:nvSpPr>
         <p:spPr>
           <a:xfrm>
-            <a:off x="731520" y="5166360"/>
-            <a:ext cx="1645920" cy="1371600"/>
+            <a:off x="731520" y="5074920"/>
+            <a:ext cx="1645920" cy="1325880"/>
           </a:xfrm>
           <a:prstGeom prst="rect">
             <a:avLst/>
@@ -5079,7 +5358,7 @@
           </a:solidFill>
           <a:ln>
             <a:solidFill>
-              <a:srgbClr val="E2E8F0"/>
+              <a:srgbClr val="D8D8D8"/>
             </a:solidFill>
           </a:ln>
         </p:spPr>
@@ -5098,14 +5377,15 @@
           </a:fontRef>
         </p:style>
         <p:txBody>
-          <a:bodyPr rtlCol="0" anchor="ctr" wrap="square"/>
+          <a:bodyPr rtlCol="0" anchor="ctr"/>
           <a:lstStyle/>
           <a:p>
             <a:pPr algn="ctr">
-              <a:defRPr b="1" sz="1100">
-                <a:solidFill>
-                  <a:srgbClr val="1E293B"/>
-                </a:solidFill>
+              <a:defRPr b="1" sz="1050">
+                <a:solidFill>
+                  <a:srgbClr val="1A1A1A"/>
+                </a:solidFill>
+                <a:latin typeface="Raleway"/>
               </a:defRPr>
             </a:pPr>
             <a:r>
@@ -5116,24 +5396,24 @@
       </p:sp>
       <p:sp>
         <p:nvSpPr>
-          <p:cNvPr id="20" name="Rectangle 19"/>
+          <p:cNvPr id="23" name="Rectangle 22"/>
           <p:cNvSpPr/>
           <p:nvPr/>
         </p:nvSpPr>
         <p:spPr>
           <a:xfrm>
-            <a:off x="2560320" y="5166360"/>
-            <a:ext cx="1645920" cy="1371600"/>
+            <a:off x="2560320" y="5074920"/>
+            <a:ext cx="1645920" cy="1325880"/>
           </a:xfrm>
           <a:prstGeom prst="rect">
             <a:avLst/>
           </a:prstGeom>
           <a:solidFill>
-            <a:srgbClr val="FEF3C7"/>
+            <a:srgbClr val="EDF7ED"/>
           </a:solidFill>
           <a:ln w="19050">
             <a:solidFill>
-              <a:srgbClr val="EA580C"/>
+              <a:srgbClr val="38761D"/>
             </a:solidFill>
           </a:ln>
         </p:spPr>
@@ -5157,12 +5437,13 @@
           <a:p>
             <a:pPr algn="ctr">
               <a:spcAft>
-                <a:spcPts val="300"/>
-              </a:spcAft>
-              <a:defRPr sz="950" b="1">
-                <a:solidFill>
-                  <a:srgbClr val="0F172A"/>
-                </a:solidFill>
+                <a:spcPts val="200"/>
+              </a:spcAft>
+              <a:defRPr sz="900" b="1">
+                <a:solidFill>
+                  <a:srgbClr val="274E13"/>
+                </a:solidFill>
+                <a:latin typeface="Raleway"/>
               </a:defRPr>
             </a:pPr>
             <a:r>
@@ -5172,12 +5453,13 @@
           <a:p>
             <a:pPr>
               <a:spcAft>
-                <a:spcPts val="300"/>
-              </a:spcAft>
-              <a:defRPr sz="950" b="1">
-                <a:solidFill>
-                  <a:srgbClr val="0F172A"/>
-                </a:solidFill>
+                <a:spcPts val="200"/>
+              </a:spcAft>
+              <a:defRPr sz="900" b="1">
+                <a:solidFill>
+                  <a:srgbClr val="274E13"/>
+                </a:solidFill>
+                <a:latin typeface="Raleway"/>
               </a:defRPr>
             </a:pPr>
             <a:r>
@@ -5187,12 +5469,13 @@
           <a:p>
             <a:pPr>
               <a:spcAft>
-                <a:spcPts val="300"/>
-              </a:spcAft>
-              <a:defRPr sz="950" b="1">
-                <a:solidFill>
-                  <a:srgbClr val="0F172A"/>
-                </a:solidFill>
+                <a:spcPts val="200"/>
+              </a:spcAft>
+              <a:defRPr sz="900" b="1">
+                <a:solidFill>
+                  <a:srgbClr val="274E13"/>
+                </a:solidFill>
+                <a:latin typeface="Raleway"/>
               </a:defRPr>
             </a:pPr>
             <a:r>
@@ -5203,14 +5486,14 @@
       </p:sp>
       <p:sp>
         <p:nvSpPr>
-          <p:cNvPr id="21" name="Rectangle 20"/>
+          <p:cNvPr id="24" name="Rectangle 23"/>
           <p:cNvSpPr/>
           <p:nvPr/>
         </p:nvSpPr>
         <p:spPr>
           <a:xfrm>
-            <a:off x="4937760" y="5166360"/>
-            <a:ext cx="2240280" cy="1371600"/>
+            <a:off x="4937760" y="5074920"/>
+            <a:ext cx="2240280" cy="1325880"/>
           </a:xfrm>
           <a:prstGeom prst="rect">
             <a:avLst/>
@@ -5220,7 +5503,7 @@
           </a:solidFill>
           <a:ln w="12700">
             <a:solidFill>
-              <a:srgbClr val="E2E8F0"/>
+              <a:srgbClr val="D8D8D8"/>
             </a:solidFill>
           </a:ln>
         </p:spPr>
@@ -5244,12 +5527,13 @@
           <a:p>
             <a:pPr algn="ctr">
               <a:spcAft>
-                <a:spcPts val="300"/>
-              </a:spcAft>
-              <a:defRPr sz="950">
-                <a:solidFill>
-                  <a:srgbClr val="1E293B"/>
-                </a:solidFill>
+                <a:spcPts val="200"/>
+              </a:spcAft>
+              <a:defRPr sz="900">
+                <a:solidFill>
+                  <a:srgbClr val="1A1A1A"/>
+                </a:solidFill>
+                <a:latin typeface="Raleway"/>
               </a:defRPr>
             </a:pPr>
             <a:r>
@@ -5259,12 +5543,13 @@
           <a:p>
             <a:pPr>
               <a:spcAft>
-                <a:spcPts val="300"/>
-              </a:spcAft>
-              <a:defRPr sz="950">
-                <a:solidFill>
-                  <a:srgbClr val="1E293B"/>
-                </a:solidFill>
+                <a:spcPts val="200"/>
+              </a:spcAft>
+              <a:defRPr sz="900">
+                <a:solidFill>
+                  <a:srgbClr val="1A1A1A"/>
+                </a:solidFill>
+                <a:latin typeface="Raleway"/>
               </a:defRPr>
             </a:pPr>
             <a:r>
@@ -5274,12 +5559,13 @@
           <a:p>
             <a:pPr>
               <a:spcAft>
-                <a:spcPts val="300"/>
-              </a:spcAft>
-              <a:defRPr sz="950">
-                <a:solidFill>
-                  <a:srgbClr val="1E293B"/>
-                </a:solidFill>
+                <a:spcPts val="200"/>
+              </a:spcAft>
+              <a:defRPr sz="900">
+                <a:solidFill>
+                  <a:srgbClr val="1A1A1A"/>
+                </a:solidFill>
+                <a:latin typeface="Raleway"/>
               </a:defRPr>
             </a:pPr>
             <a:r>
@@ -5290,14 +5576,14 @@
       </p:sp>
       <p:sp>
         <p:nvSpPr>
-          <p:cNvPr id="22" name="Rectangle 21"/>
+          <p:cNvPr id="25" name="Rectangle 24"/>
           <p:cNvSpPr/>
           <p:nvPr/>
         </p:nvSpPr>
         <p:spPr>
           <a:xfrm>
-            <a:off x="7315200" y="5166360"/>
-            <a:ext cx="2240280" cy="1371600"/>
+            <a:off x="7315200" y="5074920"/>
+            <a:ext cx="2240280" cy="1325880"/>
           </a:xfrm>
           <a:prstGeom prst="rect">
             <a:avLst/>
@@ -5307,7 +5593,7 @@
           </a:solidFill>
           <a:ln w="12700">
             <a:solidFill>
-              <a:srgbClr val="E2E8F0"/>
+              <a:srgbClr val="D8D8D8"/>
             </a:solidFill>
           </a:ln>
         </p:spPr>
@@ -5331,12 +5617,13 @@
           <a:p>
             <a:pPr algn="ctr">
               <a:spcAft>
-                <a:spcPts val="300"/>
-              </a:spcAft>
-              <a:defRPr sz="950">
-                <a:solidFill>
-                  <a:srgbClr val="1E293B"/>
-                </a:solidFill>
+                <a:spcPts val="200"/>
+              </a:spcAft>
+              <a:defRPr sz="900">
+                <a:solidFill>
+                  <a:srgbClr val="1A1A1A"/>
+                </a:solidFill>
+                <a:latin typeface="Raleway"/>
               </a:defRPr>
             </a:pPr>
             <a:r>
@@ -5346,12 +5633,13 @@
           <a:p>
             <a:pPr>
               <a:spcAft>
-                <a:spcPts val="300"/>
-              </a:spcAft>
-              <a:defRPr sz="950">
-                <a:solidFill>
-                  <a:srgbClr val="1E293B"/>
-                </a:solidFill>
+                <a:spcPts val="200"/>
+              </a:spcAft>
+              <a:defRPr sz="900">
+                <a:solidFill>
+                  <a:srgbClr val="1A1A1A"/>
+                </a:solidFill>
+                <a:latin typeface="Raleway"/>
               </a:defRPr>
             </a:pPr>
             <a:r>
@@ -5361,12 +5649,13 @@
           <a:p>
             <a:pPr>
               <a:spcAft>
-                <a:spcPts val="300"/>
-              </a:spcAft>
-              <a:defRPr sz="950">
-                <a:solidFill>
-                  <a:srgbClr val="1E293B"/>
-                </a:solidFill>
+                <a:spcPts val="200"/>
+              </a:spcAft>
+              <a:defRPr sz="900">
+                <a:solidFill>
+                  <a:srgbClr val="1A1A1A"/>
+                </a:solidFill>
+                <a:latin typeface="Raleway"/>
               </a:defRPr>
             </a:pPr>
             <a:r>
@@ -5377,14 +5666,14 @@
       </p:sp>
       <p:sp>
         <p:nvSpPr>
-          <p:cNvPr id="23" name="Rectangle 22"/>
+          <p:cNvPr id="26" name="Rectangle 25"/>
           <p:cNvSpPr/>
           <p:nvPr/>
         </p:nvSpPr>
         <p:spPr>
           <a:xfrm>
-            <a:off x="9692640" y="5166360"/>
-            <a:ext cx="2240280" cy="1371600"/>
+            <a:off x="9692640" y="5074920"/>
+            <a:ext cx="2240280" cy="1325880"/>
           </a:xfrm>
           <a:prstGeom prst="rect">
             <a:avLst/>
@@ -5394,7 +5683,7 @@
           </a:solidFill>
           <a:ln w="12700">
             <a:solidFill>
-              <a:srgbClr val="E2E8F0"/>
+              <a:srgbClr val="D8D8D8"/>
             </a:solidFill>
           </a:ln>
         </p:spPr>
@@ -5418,12 +5707,13 @@
           <a:p>
             <a:pPr algn="ctr">
               <a:spcAft>
-                <a:spcPts val="300"/>
-              </a:spcAft>
-              <a:defRPr sz="950">
-                <a:solidFill>
-                  <a:srgbClr val="1E293B"/>
-                </a:solidFill>
+                <a:spcPts val="200"/>
+              </a:spcAft>
+              <a:defRPr sz="900">
+                <a:solidFill>
+                  <a:srgbClr val="1A1A1A"/>
+                </a:solidFill>
+                <a:latin typeface="Raleway"/>
               </a:defRPr>
             </a:pPr>
             <a:r>
@@ -5433,12 +5723,13 @@
           <a:p>
             <a:pPr>
               <a:spcAft>
-                <a:spcPts val="300"/>
-              </a:spcAft>
-              <a:defRPr sz="950">
-                <a:solidFill>
-                  <a:srgbClr val="1E293B"/>
-                </a:solidFill>
+                <a:spcPts val="200"/>
+              </a:spcAft>
+              <a:defRPr sz="900">
+                <a:solidFill>
+                  <a:srgbClr val="1A1A1A"/>
+                </a:solidFill>
+                <a:latin typeface="Raleway"/>
               </a:defRPr>
             </a:pPr>
             <a:r>
@@ -5448,12 +5739,13 @@
           <a:p>
             <a:pPr>
               <a:spcAft>
-                <a:spcPts val="300"/>
-              </a:spcAft>
-              <a:defRPr sz="950">
-                <a:solidFill>
-                  <a:srgbClr val="1E293B"/>
-                </a:solidFill>
+                <a:spcPts val="200"/>
+              </a:spcAft>
+              <a:defRPr sz="900">
+                <a:solidFill>
+                  <a:srgbClr val="1A1A1A"/>
+                </a:solidFill>
+                <a:latin typeface="Raleway"/>
               </a:defRPr>
             </a:pPr>
             <a:r>
@@ -5495,7 +5787,7 @@
             <a:avLst/>
           </a:prstGeom>
           <a:solidFill>
-            <a:srgbClr val="F8FAFC"/>
+            <a:srgbClr val="F8FAF8"/>
           </a:solidFill>
           <a:ln>
             <a:noFill/>
@@ -5525,67 +5817,20 @@
       </p:sp>
       <p:sp>
         <p:nvSpPr>
-          <p:cNvPr id="3" name="TextBox 2"/>
-          <p:cNvSpPr txBox="1"/>
-          <p:nvPr/>
-        </p:nvSpPr>
-        <p:spPr>
-          <a:xfrm>
-            <a:off x="731520" y="457200"/>
-            <a:ext cx="10698480" cy="1005840"/>
-          </a:xfrm>
-          <a:prstGeom prst="rect">
-            <a:avLst/>
-          </a:prstGeom>
-          <a:noFill/>
-        </p:spPr>
-        <p:txBody>
-          <a:bodyPr wrap="square">
-            <a:spAutoFit/>
-          </a:bodyPr>
-          <a:lstStyle/>
-          <a:p>
-            <a:pPr>
-              <a:defRPr sz="1100" b="1">
-                <a:solidFill>
-                  <a:srgbClr val="2563EB"/>
-                </a:solidFill>
-              </a:defRPr>
-            </a:pPr>
-            <a:r>
-              <a:t>PROJETO QAI • X-TESTING</a:t>
-            </a:r>
-          </a:p>
-          <a:p>
-            <a:pPr>
-              <a:defRPr sz="2400" b="1">
-                <a:solidFill>
-                  <a:srgbClr val="0F172A"/>
-                </a:solidFill>
-              </a:defRPr>
-            </a:pPr>
-            <a:r>
-              <a:t>Schedule Executivo &amp; Marcos de Progresso (Mês a Mês)</a:t>
-            </a:r>
-          </a:p>
-        </p:txBody>
-      </p:sp>
-      <p:sp>
-        <p:nvSpPr>
-          <p:cNvPr id="4" name="Rectangle 3"/>
+          <p:cNvPr id="3" name="Rectangle 2"/>
           <p:cNvSpPr/>
           <p:nvPr/>
         </p:nvSpPr>
         <p:spPr>
           <a:xfrm>
-            <a:off x="731520" y="1554480"/>
-            <a:ext cx="3200400" cy="457200"/>
+            <a:off x="0" y="0"/>
+            <a:ext cx="12191695" cy="73152"/>
           </a:xfrm>
           <a:prstGeom prst="rect">
             <a:avLst/>
           </a:prstGeom>
           <a:solidFill>
-            <a:srgbClr val="0F172A"/>
+            <a:srgbClr val="38761D"/>
           </a:solidFill>
           <a:ln>
             <a:noFill/>
@@ -5609,35 +5854,148 @@
           <a:bodyPr rtlCol="0" anchor="ctr"/>
           <a:lstStyle/>
           <a:p>
-            <a:pPr algn="ctr">
-              <a:defRPr b="1" sz="1050">
-                <a:solidFill>
-                  <a:srgbClr val="FFFFFF"/>
-                </a:solidFill>
-              </a:defRPr>
-            </a:pPr>
-            <a:r>
-              <a:t>Work Package / Trilha de Execução</a:t>
-            </a:r>
-          </a:p>
-        </p:txBody>
-      </p:sp>
-      <p:sp>
-        <p:nvSpPr>
-          <p:cNvPr id="5" name="Rectangle 4"/>
+            <a:pPr algn="ctr"/>
+          </a:p>
+        </p:txBody>
+      </p:sp>
+      <p:sp>
+        <p:nvSpPr>
+          <p:cNvPr id="4" name="TextBox 3"/>
+          <p:cNvSpPr txBox="1"/>
+          <p:nvPr/>
+        </p:nvSpPr>
+        <p:spPr>
+          <a:xfrm>
+            <a:off x="731520" y="365760"/>
+            <a:ext cx="8686800" cy="1051560"/>
+          </a:xfrm>
+          <a:prstGeom prst="rect">
+            <a:avLst/>
+          </a:prstGeom>
+          <a:noFill/>
+        </p:spPr>
+        <p:txBody>
+          <a:bodyPr wrap="square" lIns="0" tIns="0" rIns="0" bIns="0">
+            <a:spAutoFit/>
+          </a:bodyPr>
+          <a:lstStyle/>
+          <a:p>
+            <a:pPr>
+              <a:defRPr sz="1000" b="1">
+                <a:solidFill>
+                  <a:srgbClr val="FF5722"/>
+                </a:solidFill>
+                <a:latin typeface="Raleway"/>
+              </a:defRPr>
+            </a:pPr>
+            <a:r>
+              <a:t>03 / CRONOGRAMA EXECUTIVO</a:t>
+            </a:r>
+          </a:p>
+          <a:p>
+            <a:pPr>
+              <a:defRPr sz="2200" b="1">
+                <a:solidFill>
+                  <a:srgbClr val="1A1A1A"/>
+                </a:solidFill>
+                <a:latin typeface="Raleway"/>
+              </a:defRPr>
+            </a:pPr>
+            <a:r>
+              <a:t>Schedule Executivo &amp; Marcos de Progresso (Mês a Mês)</a:t>
+            </a:r>
+          </a:p>
+          <a:p>
+            <a:pPr>
+              <a:defRPr sz="1100">
+                <a:solidFill>
+                  <a:srgbClr val="7F7F7F"/>
+                </a:solidFill>
+                <a:latin typeface="Raleway"/>
+              </a:defRPr>
+            </a:pPr>
+            <a:r>
+              <a:t>Acompanhamento sistemático por Work Packages alinhados aos marcos contratuais e técnicos</a:t>
+            </a:r>
+          </a:p>
+        </p:txBody>
+      </p:sp>
+      <p:pic>
+        <p:nvPicPr>
+          <p:cNvPr id="5" name="Picture 4" descr="image2.png"/>
+          <p:cNvPicPr>
+            <a:picLocks noChangeAspect="1"/>
+          </p:cNvPicPr>
+          <p:nvPr/>
+        </p:nvPicPr>
+        <p:blipFill>
+          <a:blip r:embed="rId2"/>
+          <a:stretch>
+            <a:fillRect/>
+          </a:stretch>
+        </p:blipFill>
+        <p:spPr>
+          <a:xfrm>
+            <a:off x="9875520" y="365760"/>
+            <a:ext cx="1600200" cy="869674"/>
+          </a:xfrm>
+          <a:prstGeom prst="rect">
+            <a:avLst/>
+          </a:prstGeom>
+        </p:spPr>
+      </p:pic>
+      <p:sp>
+        <p:nvSpPr>
+          <p:cNvPr id="6" name="TextBox 5"/>
+          <p:cNvSpPr txBox="1"/>
+          <p:nvPr/>
+        </p:nvSpPr>
+        <p:spPr>
+          <a:xfrm>
+            <a:off x="731520" y="6446520"/>
+            <a:ext cx="10728655" cy="320040"/>
+          </a:xfrm>
+          <a:prstGeom prst="rect">
+            <a:avLst/>
+          </a:prstGeom>
+          <a:noFill/>
+        </p:spPr>
+        <p:txBody>
+          <a:bodyPr wrap="none" lIns="0" tIns="0" rIns="0" bIns="0">
+            <a:spAutoFit/>
+          </a:bodyPr>
+          <a:lstStyle/>
+          <a:p>
+            <a:pPr>
+              <a:defRPr sz="800" b="1">
+                <a:solidFill>
+                  <a:srgbClr val="A0A0A0"/>
+                </a:solidFill>
+                <a:latin typeface="Raleway"/>
+              </a:defRPr>
+            </a:pPr>
+            <a:r>
+              <a:t>PROJETO QAI • FÁBRICA DE TESTES X-TESTING  |  ESTEIRA DE QUALIDADE &amp; SANASA  |  WWW.XTESTING.COM.BR</a:t>
+            </a:r>
+          </a:p>
+        </p:txBody>
+      </p:sp>
+      <p:sp>
+        <p:nvSpPr>
+          <p:cNvPr id="7" name="Rectangle 6"/>
           <p:cNvSpPr/>
           <p:nvPr/>
         </p:nvSpPr>
         <p:spPr>
           <a:xfrm>
-            <a:off x="4114800" y="1554480"/>
-            <a:ext cx="1920240" cy="457200"/>
+            <a:off x="731520" y="1554480"/>
+            <a:ext cx="3200400" cy="457200"/>
           </a:xfrm>
           <a:prstGeom prst="rect">
             <a:avLst/>
           </a:prstGeom>
           <a:solidFill>
-            <a:srgbClr val="EA580C"/>
+            <a:srgbClr val="1A1A1A"/>
           </a:solidFill>
           <a:ln>
             <a:noFill/>
@@ -5662,34 +6020,35 @@
           <a:lstStyle/>
           <a:p>
             <a:pPr algn="ctr">
-              <a:defRPr b="1" sz="1050">
+              <a:defRPr b="1" sz="1000">
                 <a:solidFill>
                   <a:srgbClr val="FFFFFF"/>
                 </a:solidFill>
-              </a:defRPr>
-            </a:pPr>
-            <a:r>
-              <a:t>SET/2026 (Atual)</a:t>
-            </a:r>
-          </a:p>
-        </p:txBody>
-      </p:sp>
-      <p:sp>
-        <p:nvSpPr>
-          <p:cNvPr id="6" name="Rectangle 5"/>
+                <a:latin typeface="Raleway"/>
+              </a:defRPr>
+            </a:pPr>
+            <a:r>
+              <a:t>Work Package / Trilha de Execução</a:t>
+            </a:r>
+          </a:p>
+        </p:txBody>
+      </p:sp>
+      <p:sp>
+        <p:nvSpPr>
+          <p:cNvPr id="8" name="Rectangle 7"/>
           <p:cNvSpPr/>
           <p:nvPr/>
         </p:nvSpPr>
         <p:spPr>
           <a:xfrm>
-            <a:off x="6126480" y="1554480"/>
+            <a:off x="4114800" y="1554480"/>
             <a:ext cx="1920240" cy="457200"/>
           </a:xfrm>
           <a:prstGeom prst="rect">
             <a:avLst/>
           </a:prstGeom>
           <a:solidFill>
-            <a:srgbClr val="2563EB"/>
+            <a:srgbClr val="38761D"/>
           </a:solidFill>
           <a:ln>
             <a:noFill/>
@@ -5714,34 +6073,35 @@
           <a:lstStyle/>
           <a:p>
             <a:pPr algn="ctr">
-              <a:defRPr b="1" sz="1050">
+              <a:defRPr b="1" sz="1000">
                 <a:solidFill>
                   <a:srgbClr val="FFFFFF"/>
                 </a:solidFill>
-              </a:defRPr>
-            </a:pPr>
-            <a:r>
-              <a:t>OUT/2026</a:t>
-            </a:r>
-          </a:p>
-        </p:txBody>
-      </p:sp>
-      <p:sp>
-        <p:nvSpPr>
-          <p:cNvPr id="7" name="Rectangle 6"/>
+                <a:latin typeface="Raleway"/>
+              </a:defRPr>
+            </a:pPr>
+            <a:r>
+              <a:t>SET/2026 (Atual)</a:t>
+            </a:r>
+          </a:p>
+        </p:txBody>
+      </p:sp>
+      <p:sp>
+        <p:nvSpPr>
+          <p:cNvPr id="9" name="Rectangle 8"/>
           <p:cNvSpPr/>
           <p:nvPr/>
         </p:nvSpPr>
         <p:spPr>
           <a:xfrm>
-            <a:off x="8138160" y="1554480"/>
+            <a:off x="6126480" y="1554480"/>
             <a:ext cx="1920240" cy="457200"/>
           </a:xfrm>
           <a:prstGeom prst="rect">
             <a:avLst/>
           </a:prstGeom>
           <a:solidFill>
-            <a:srgbClr val="9333EA"/>
+            <a:srgbClr val="509546"/>
           </a:solidFill>
           <a:ln>
             <a:noFill/>
@@ -5766,34 +6126,35 @@
           <a:lstStyle/>
           <a:p>
             <a:pPr algn="ctr">
-              <a:defRPr b="1" sz="1050">
+              <a:defRPr b="1" sz="1000">
                 <a:solidFill>
                   <a:srgbClr val="FFFFFF"/>
                 </a:solidFill>
-              </a:defRPr>
-            </a:pPr>
-            <a:r>
-              <a:t>NOV/2026</a:t>
-            </a:r>
-          </a:p>
-        </p:txBody>
-      </p:sp>
-      <p:sp>
-        <p:nvSpPr>
-          <p:cNvPr id="8" name="Rectangle 7"/>
+                <a:latin typeface="Raleway"/>
+              </a:defRPr>
+            </a:pPr>
+            <a:r>
+              <a:t>OUT/2026</a:t>
+            </a:r>
+          </a:p>
+        </p:txBody>
+      </p:sp>
+      <p:sp>
+        <p:nvSpPr>
+          <p:cNvPr id="10" name="Rectangle 9"/>
           <p:cNvSpPr/>
           <p:nvPr/>
         </p:nvSpPr>
         <p:spPr>
           <a:xfrm>
-            <a:off x="10149840" y="1554480"/>
+            <a:off x="8138160" y="1554480"/>
             <a:ext cx="1920240" cy="457200"/>
           </a:xfrm>
           <a:prstGeom prst="rect">
             <a:avLst/>
           </a:prstGeom>
           <a:solidFill>
-            <a:srgbClr val="16A34A"/>
+            <a:srgbClr val="156082"/>
           </a:solidFill>
           <a:ln>
             <a:noFill/>
@@ -5818,28 +6179,82 @@
           <a:lstStyle/>
           <a:p>
             <a:pPr algn="ctr">
-              <a:defRPr b="1" sz="1050">
+              <a:defRPr b="1" sz="1000">
                 <a:solidFill>
                   <a:srgbClr val="FFFFFF"/>
                 </a:solidFill>
-              </a:defRPr>
-            </a:pPr>
-            <a:r>
-              <a:t>DEZ/2026</a:t>
-            </a:r>
-          </a:p>
-        </p:txBody>
-      </p:sp>
-      <p:sp>
-        <p:nvSpPr>
-          <p:cNvPr id="9" name="Rectangle 8"/>
+                <a:latin typeface="Raleway"/>
+              </a:defRPr>
+            </a:pPr>
+            <a:r>
+              <a:t>NOV/2026</a:t>
+            </a:r>
+          </a:p>
+        </p:txBody>
+      </p:sp>
+      <p:sp>
+        <p:nvSpPr>
+          <p:cNvPr id="11" name="Rectangle 10"/>
           <p:cNvSpPr/>
           <p:nvPr/>
         </p:nvSpPr>
         <p:spPr>
           <a:xfrm>
+            <a:off x="10149840" y="1554480"/>
+            <a:ext cx="1920240" cy="457200"/>
+          </a:xfrm>
+          <a:prstGeom prst="rect">
+            <a:avLst/>
+          </a:prstGeom>
+          <a:solidFill>
+            <a:srgbClr val="FF5722"/>
+          </a:solidFill>
+          <a:ln>
+            <a:noFill/>
+          </a:ln>
+        </p:spPr>
+        <p:style>
+          <a:lnRef idx="1">
+            <a:schemeClr val="accent1"/>
+          </a:lnRef>
+          <a:fillRef idx="3">
+            <a:schemeClr val="accent1"/>
+          </a:fillRef>
+          <a:effectRef idx="2">
+            <a:schemeClr val="accent1"/>
+          </a:effectRef>
+          <a:fontRef idx="minor">
+            <a:schemeClr val="lt1"/>
+          </a:fontRef>
+        </p:style>
+        <p:txBody>
+          <a:bodyPr rtlCol="0" anchor="ctr"/>
+          <a:lstStyle/>
+          <a:p>
+            <a:pPr algn="ctr">
+              <a:defRPr b="1" sz="1000">
+                <a:solidFill>
+                  <a:srgbClr val="FFFFFF"/>
+                </a:solidFill>
+                <a:latin typeface="Raleway"/>
+              </a:defRPr>
+            </a:pPr>
+            <a:r>
+              <a:t>DEZ/2026</a:t>
+            </a:r>
+          </a:p>
+        </p:txBody>
+      </p:sp>
+      <p:sp>
+        <p:nvSpPr>
+          <p:cNvPr id="12" name="Rectangle 11"/>
+          <p:cNvSpPr/>
+          <p:nvPr/>
+        </p:nvSpPr>
+        <p:spPr>
+          <a:xfrm>
             <a:off x="731520" y="2084832"/>
-            <a:ext cx="3200400" cy="868680"/>
+            <a:ext cx="3200400" cy="841248"/>
           </a:xfrm>
           <a:prstGeom prst="rect">
             <a:avLst/>
@@ -5849,7 +6264,7 @@
           </a:solidFill>
           <a:ln>
             <a:solidFill>
-              <a:srgbClr val="E2E8F0"/>
+              <a:srgbClr val="D8D8D8"/>
             </a:solidFill>
           </a:ln>
         </p:spPr>
@@ -5872,42 +6287,43 @@
           <a:lstStyle/>
           <a:p>
             <a:pPr algn="ctr">
-              <a:defRPr b="1" sz="1000">
-                <a:solidFill>
-                  <a:srgbClr val="0F172A"/>
-                </a:solidFill>
-              </a:defRPr>
-            </a:pPr>
-            <a:r>
-              <a:t>WP1 • Infraestrutura &amp; Paperclip</a:t>
+              <a:defRPr b="1" sz="950">
+                <a:solidFill>
+                  <a:srgbClr val="1A1A1A"/>
+                </a:solidFill>
+                <a:latin typeface="Raleway"/>
+              </a:defRPr>
+            </a:pPr>
+            <a:r>
+              <a:t>WP1 • Setup Agêntico &amp; Paperclip</a:t>
             </a:r>
             <a:br/>
             <a:r>
-              <a:t>Ambiente agêntico e governança</a:t>
-            </a:r>
-          </a:p>
-        </p:txBody>
-      </p:sp>
-      <p:sp>
-        <p:nvSpPr>
-          <p:cNvPr id="10" name="Rectangle 9"/>
+              <a:t>Ambiente, organograma e governança QAI</a:t>
+            </a:r>
+          </a:p>
+        </p:txBody>
+      </p:sp>
+      <p:sp>
+        <p:nvSpPr>
+          <p:cNvPr id="13" name="Rectangle 12"/>
           <p:cNvSpPr/>
           <p:nvPr/>
         </p:nvSpPr>
         <p:spPr>
           <a:xfrm>
             <a:off x="4114800" y="2084832"/>
-            <a:ext cx="1920240" cy="868680"/>
+            <a:ext cx="1920240" cy="841248"/>
           </a:xfrm>
           <a:prstGeom prst="rect">
             <a:avLst/>
           </a:prstGeom>
           <a:solidFill>
-            <a:srgbClr val="DCFCE7"/>
+            <a:srgbClr val="EDF7ED"/>
           </a:solidFill>
-          <a:ln>
+          <a:ln w="15240">
             <a:solidFill>
-              <a:srgbClr val="16A34A"/>
+              <a:srgbClr val="38761D"/>
             </a:solidFill>
           </a:ln>
         </p:spPr>
@@ -5933,10 +6349,11 @@
               <a:spcAft>
                 <a:spcPts val="200"/>
               </a:spcAft>
-              <a:defRPr sz="900" b="1">
-                <a:solidFill>
-                  <a:srgbClr val="1E293B"/>
-                </a:solidFill>
+              <a:defRPr sz="850" b="1">
+                <a:solidFill>
+                  <a:srgbClr val="1A1A1A"/>
+                </a:solidFill>
+                <a:latin typeface="Raleway"/>
               </a:defRPr>
             </a:pPr>
             <a:r>
@@ -5948,10 +6365,11 @@
               <a:spcAft>
                 <a:spcPts val="200"/>
               </a:spcAft>
-              <a:defRPr sz="900">
-                <a:solidFill>
-                  <a:srgbClr val="1E293B"/>
-                </a:solidFill>
+              <a:defRPr sz="850">
+                <a:solidFill>
+                  <a:srgbClr val="1A1A1A"/>
+                </a:solidFill>
+                <a:latin typeface="Raleway"/>
               </a:defRPr>
             </a:pPr>
             <a:r>
@@ -5963,28 +6381,29 @@
               <a:spcAft>
                 <a:spcPts val="200"/>
               </a:spcAft>
-              <a:defRPr sz="900">
-                <a:solidFill>
-                  <a:srgbClr val="1E293B"/>
-                </a:solidFill>
-              </a:defRPr>
-            </a:pPr>
-            <a:r>
-              <a:t>• QAI configurado</a:t>
-            </a:r>
-          </a:p>
-        </p:txBody>
-      </p:sp>
-      <p:sp>
-        <p:nvSpPr>
-          <p:cNvPr id="11" name="Rectangle 10"/>
+              <a:defRPr sz="850">
+                <a:solidFill>
+                  <a:srgbClr val="1A1A1A"/>
+                </a:solidFill>
+                <a:latin typeface="Raleway"/>
+              </a:defRPr>
+            </a:pPr>
+            <a:r>
+              <a:t>• Empresa XTE configurada</a:t>
+            </a:r>
+          </a:p>
+        </p:txBody>
+      </p:sp>
+      <p:sp>
+        <p:nvSpPr>
+          <p:cNvPr id="14" name="Rectangle 13"/>
           <p:cNvSpPr/>
           <p:nvPr/>
         </p:nvSpPr>
         <p:spPr>
           <a:xfrm>
             <a:off x="6126480" y="2084832"/>
-            <a:ext cx="1920240" cy="868680"/>
+            <a:ext cx="1920240" cy="841248"/>
           </a:xfrm>
           <a:prstGeom prst="rect">
             <a:avLst/>
@@ -5994,7 +6413,7 @@
           </a:solidFill>
           <a:ln>
             <a:solidFill>
-              <a:srgbClr val="E2E8F0"/>
+              <a:srgbClr val="D8D8D8"/>
             </a:solidFill>
           </a:ln>
         </p:spPr>
@@ -6020,10 +6439,11 @@
               <a:spcAft>
                 <a:spcPts val="200"/>
               </a:spcAft>
-              <a:defRPr sz="900" b="1">
-                <a:solidFill>
-                  <a:srgbClr val="1E293B"/>
-                </a:solidFill>
+              <a:defRPr sz="850" b="1">
+                <a:solidFill>
+                  <a:srgbClr val="1A1A1A"/>
+                </a:solidFill>
+                <a:latin typeface="Raleway"/>
               </a:defRPr>
             </a:pPr>
             <a:r>
@@ -6035,10 +6455,11 @@
               <a:spcAft>
                 <a:spcPts val="200"/>
               </a:spcAft>
-              <a:defRPr sz="900">
-                <a:solidFill>
-                  <a:srgbClr val="1E293B"/>
-                </a:solidFill>
+              <a:defRPr sz="850">
+                <a:solidFill>
+                  <a:srgbClr val="1A1A1A"/>
+                </a:solidFill>
+                <a:latin typeface="Raleway"/>
               </a:defRPr>
             </a:pPr>
             <a:r>
@@ -6049,14 +6470,14 @@
       </p:sp>
       <p:sp>
         <p:nvSpPr>
-          <p:cNvPr id="12" name="Rectangle 11"/>
+          <p:cNvPr id="15" name="Rectangle 14"/>
           <p:cNvSpPr/>
           <p:nvPr/>
         </p:nvSpPr>
         <p:spPr>
           <a:xfrm>
             <a:off x="8138160" y="2084832"/>
-            <a:ext cx="1920240" cy="868680"/>
+            <a:ext cx="1920240" cy="841248"/>
           </a:xfrm>
           <a:prstGeom prst="rect">
             <a:avLst/>
@@ -6066,7 +6487,7 @@
           </a:solidFill>
           <a:ln>
             <a:solidFill>
-              <a:srgbClr val="E2E8F0"/>
+              <a:srgbClr val="D8D8D8"/>
             </a:solidFill>
           </a:ln>
         </p:spPr>
@@ -6092,10 +6513,11 @@
               <a:spcAft>
                 <a:spcPts val="200"/>
               </a:spcAft>
-              <a:defRPr sz="900" b="1">
-                <a:solidFill>
-                  <a:srgbClr val="1E293B"/>
-                </a:solidFill>
+              <a:defRPr sz="850" b="1">
+                <a:solidFill>
+                  <a:srgbClr val="1A1A1A"/>
+                </a:solidFill>
+                <a:latin typeface="Raleway"/>
               </a:defRPr>
             </a:pPr>
             <a:r>
@@ -6107,10 +6529,11 @@
               <a:spcAft>
                 <a:spcPts val="200"/>
               </a:spcAft>
-              <a:defRPr sz="900">
-                <a:solidFill>
-                  <a:srgbClr val="1E293B"/>
-                </a:solidFill>
+              <a:defRPr sz="850">
+                <a:solidFill>
+                  <a:srgbClr val="1A1A1A"/>
+                </a:solidFill>
+                <a:latin typeface="Raleway"/>
               </a:defRPr>
             </a:pPr>
             <a:r>
@@ -6121,14 +6544,14 @@
       </p:sp>
       <p:sp>
         <p:nvSpPr>
-          <p:cNvPr id="13" name="Rectangle 12"/>
+          <p:cNvPr id="16" name="Rectangle 15"/>
           <p:cNvSpPr/>
           <p:nvPr/>
         </p:nvSpPr>
         <p:spPr>
           <a:xfrm>
             <a:off x="10149840" y="2084832"/>
-            <a:ext cx="1920240" cy="868680"/>
+            <a:ext cx="1920240" cy="841248"/>
           </a:xfrm>
           <a:prstGeom prst="rect">
             <a:avLst/>
@@ -6138,7 +6561,7 @@
           </a:solidFill>
           <a:ln>
             <a:solidFill>
-              <a:srgbClr val="E2E8F0"/>
+              <a:srgbClr val="D8D8D8"/>
             </a:solidFill>
           </a:ln>
         </p:spPr>
@@ -6164,10 +6587,11 @@
               <a:spcAft>
                 <a:spcPts val="200"/>
               </a:spcAft>
-              <a:defRPr sz="900" b="1">
-                <a:solidFill>
-                  <a:srgbClr val="1E293B"/>
-                </a:solidFill>
+              <a:defRPr sz="850" b="1">
+                <a:solidFill>
+                  <a:srgbClr val="1A1A1A"/>
+                </a:solidFill>
+                <a:latin typeface="Raleway"/>
               </a:defRPr>
             </a:pPr>
             <a:r>
@@ -6179,10 +6603,11 @@
               <a:spcAft>
                 <a:spcPts val="200"/>
               </a:spcAft>
-              <a:defRPr sz="900">
-                <a:solidFill>
-                  <a:srgbClr val="1E293B"/>
-                </a:solidFill>
+              <a:defRPr sz="850">
+                <a:solidFill>
+                  <a:srgbClr val="1A1A1A"/>
+                </a:solidFill>
+                <a:latin typeface="Raleway"/>
               </a:defRPr>
             </a:pPr>
             <a:r>
@@ -6193,14 +6618,14 @@
       </p:sp>
       <p:sp>
         <p:nvSpPr>
-          <p:cNvPr id="14" name="Rectangle 13"/>
+          <p:cNvPr id="17" name="Rectangle 16"/>
           <p:cNvSpPr/>
           <p:nvPr/>
         </p:nvSpPr>
         <p:spPr>
           <a:xfrm>
-            <a:off x="731520" y="3008376"/>
-            <a:ext cx="3200400" cy="868680"/>
+            <a:off x="731520" y="2980944"/>
+            <a:ext cx="3200400" cy="841248"/>
           </a:xfrm>
           <a:prstGeom prst="rect">
             <a:avLst/>
@@ -6210,7 +6635,7 @@
           </a:solidFill>
           <a:ln>
             <a:solidFill>
-              <a:srgbClr val="E2E8F0"/>
+              <a:srgbClr val="D8D8D8"/>
             </a:solidFill>
           </a:ln>
         </p:spPr>
@@ -6233,10 +6658,11 @@
           <a:lstStyle/>
           <a:p>
             <a:pPr algn="ctr">
-              <a:defRPr b="1" sz="1000">
-                <a:solidFill>
-                  <a:srgbClr val="0F172A"/>
-                </a:solidFill>
+              <a:defRPr b="1" sz="950">
+                <a:solidFill>
+                  <a:srgbClr val="1A1A1A"/>
+                </a:solidFill>
+                <a:latin typeface="Raleway"/>
               </a:defRPr>
             </a:pPr>
             <a:r>
@@ -6244,31 +6670,31 @@
             </a:r>
             <a:br/>
             <a:r>
-              <a:t>Tree-RAG sem chunking e modelagem</a:t>
-            </a:r>
-          </a:p>
-        </p:txBody>
-      </p:sp>
-      <p:sp>
-        <p:nvSpPr>
-          <p:cNvPr id="15" name="Rectangle 14"/>
+              <a:t>Tree-RAG sem chunking e fluxos de negócio</a:t>
+            </a:r>
+          </a:p>
+        </p:txBody>
+      </p:sp>
+      <p:sp>
+        <p:nvSpPr>
+          <p:cNvPr id="18" name="Rectangle 17"/>
           <p:cNvSpPr/>
           <p:nvPr/>
         </p:nvSpPr>
         <p:spPr>
           <a:xfrm>
-            <a:off x="4114800" y="3008376"/>
-            <a:ext cx="1920240" cy="868680"/>
+            <a:off x="4114800" y="2980944"/>
+            <a:ext cx="1920240" cy="841248"/>
           </a:xfrm>
           <a:prstGeom prst="rect">
             <a:avLst/>
           </a:prstGeom>
           <a:solidFill>
-            <a:srgbClr val="DCFCE7"/>
+            <a:srgbClr val="EDF7ED"/>
           </a:solidFill>
-          <a:ln>
+          <a:ln w="15240">
             <a:solidFill>
-              <a:srgbClr val="16A34A"/>
+              <a:srgbClr val="38761D"/>
             </a:solidFill>
           </a:ln>
         </p:spPr>
@@ -6294,10 +6720,11 @@
               <a:spcAft>
                 <a:spcPts val="200"/>
               </a:spcAft>
-              <a:defRPr sz="900" b="1">
-                <a:solidFill>
-                  <a:srgbClr val="1E293B"/>
-                </a:solidFill>
+              <a:defRPr sz="850" b="1">
+                <a:solidFill>
+                  <a:srgbClr val="1A1A1A"/>
+                </a:solidFill>
+                <a:latin typeface="Raleway"/>
               </a:defRPr>
             </a:pPr>
             <a:r>
@@ -6309,14 +6736,15 @@
               <a:spcAft>
                 <a:spcPts val="200"/>
               </a:spcAft>
-              <a:defRPr sz="900">
-                <a:solidFill>
-                  <a:srgbClr val="1E293B"/>
-                </a:solidFill>
-              </a:defRPr>
-            </a:pPr>
-            <a:r>
-              <a:t>• Árvore SANASA</a:t>
+              <a:defRPr sz="850">
+                <a:solidFill>
+                  <a:srgbClr val="1A1A1A"/>
+                </a:solidFill>
+                <a:latin typeface="Raleway"/>
+              </a:defRPr>
+            </a:pPr>
+            <a:r>
+              <a:t>• Árvore de requisitos</a:t>
             </a:r>
           </a:p>
           <a:p>
@@ -6324,28 +6752,29 @@
               <a:spcAft>
                 <a:spcPts val="200"/>
               </a:spcAft>
-              <a:defRPr sz="900">
-                <a:solidFill>
-                  <a:srgbClr val="1E293B"/>
-                </a:solidFill>
-              </a:defRPr>
-            </a:pPr>
-            <a:r>
-              <a:t>• Skill BPMN</a:t>
-            </a:r>
-          </a:p>
-        </p:txBody>
-      </p:sp>
-      <p:sp>
-        <p:nvSpPr>
-          <p:cNvPr id="16" name="Rectangle 15"/>
+              <a:defRPr sz="850">
+                <a:solidFill>
+                  <a:srgbClr val="1A1A1A"/>
+                </a:solidFill>
+                <a:latin typeface="Raleway"/>
+              </a:defRPr>
+            </a:pPr>
+            <a:r>
+              <a:t>• Skill BPMN validada</a:t>
+            </a:r>
+          </a:p>
+        </p:txBody>
+      </p:sp>
+      <p:sp>
+        <p:nvSpPr>
+          <p:cNvPr id="19" name="Rectangle 18"/>
           <p:cNvSpPr/>
           <p:nvPr/>
         </p:nvSpPr>
         <p:spPr>
           <a:xfrm>
-            <a:off x="6126480" y="3008376"/>
-            <a:ext cx="1920240" cy="868680"/>
+            <a:off x="6126480" y="2980944"/>
+            <a:ext cx="1920240" cy="841248"/>
           </a:xfrm>
           <a:prstGeom prst="rect">
             <a:avLst/>
@@ -6355,7 +6784,7 @@
           </a:solidFill>
           <a:ln>
             <a:solidFill>
-              <a:srgbClr val="E2E8F0"/>
+              <a:srgbClr val="D8D8D8"/>
             </a:solidFill>
           </a:ln>
         </p:spPr>
@@ -6381,10 +6810,11 @@
               <a:spcAft>
                 <a:spcPts val="200"/>
               </a:spcAft>
-              <a:defRPr sz="900" b="1">
-                <a:solidFill>
-                  <a:srgbClr val="1E293B"/>
-                </a:solidFill>
+              <a:defRPr sz="850" b="1">
+                <a:solidFill>
+                  <a:srgbClr val="1A1A1A"/>
+                </a:solidFill>
+                <a:latin typeface="Raleway"/>
               </a:defRPr>
             </a:pPr>
             <a:r>
@@ -6396,10 +6826,11 @@
               <a:spcAft>
                 <a:spcPts val="200"/>
               </a:spcAft>
-              <a:defRPr sz="900">
-                <a:solidFill>
-                  <a:srgbClr val="1E293B"/>
-                </a:solidFill>
+              <a:defRPr sz="850">
+                <a:solidFill>
+                  <a:srgbClr val="1A1A1A"/>
+                </a:solidFill>
+                <a:latin typeface="Raleway"/>
               </a:defRPr>
             </a:pPr>
             <a:r>
@@ -6410,14 +6841,14 @@
       </p:sp>
       <p:sp>
         <p:nvSpPr>
-          <p:cNvPr id="17" name="Rectangle 16"/>
+          <p:cNvPr id="20" name="Rectangle 19"/>
           <p:cNvSpPr/>
           <p:nvPr/>
         </p:nvSpPr>
         <p:spPr>
           <a:xfrm>
-            <a:off x="8138160" y="3008376"/>
-            <a:ext cx="1920240" cy="868680"/>
+            <a:off x="8138160" y="2980944"/>
+            <a:ext cx="1920240" cy="841248"/>
           </a:xfrm>
           <a:prstGeom prst="rect">
             <a:avLst/>
@@ -6427,7 +6858,7 @@
           </a:solidFill>
           <a:ln>
             <a:solidFill>
-              <a:srgbClr val="E2E8F0"/>
+              <a:srgbClr val="D8D8D8"/>
             </a:solidFill>
           </a:ln>
         </p:spPr>
@@ -6453,10 +6884,11 @@
               <a:spcAft>
                 <a:spcPts val="200"/>
               </a:spcAft>
-              <a:defRPr sz="900" b="1">
-                <a:solidFill>
-                  <a:srgbClr val="1E293B"/>
-                </a:solidFill>
+              <a:defRPr sz="850" b="1">
+                <a:solidFill>
+                  <a:srgbClr val="1A1A1A"/>
+                </a:solidFill>
+                <a:latin typeface="Raleway"/>
               </a:defRPr>
             </a:pPr>
             <a:r>
@@ -6468,28 +6900,29 @@
               <a:spcAft>
                 <a:spcPts val="200"/>
               </a:spcAft>
-              <a:defRPr sz="900">
-                <a:solidFill>
-                  <a:srgbClr val="1E293B"/>
-                </a:solidFill>
-              </a:defRPr>
-            </a:pPr>
-            <a:r>
-              <a:t>• Validação</a:t>
-            </a:r>
-          </a:p>
-        </p:txBody>
-      </p:sp>
-      <p:sp>
-        <p:nvSpPr>
-          <p:cNvPr id="18" name="Rectangle 17"/>
+              <a:defRPr sz="850">
+                <a:solidFill>
+                  <a:srgbClr val="1A1A1A"/>
+                </a:solidFill>
+                <a:latin typeface="Raleway"/>
+              </a:defRPr>
+            </a:pPr>
+            <a:r>
+              <a:t>• Validação cruzada</a:t>
+            </a:r>
+          </a:p>
+        </p:txBody>
+      </p:sp>
+      <p:sp>
+        <p:nvSpPr>
+          <p:cNvPr id="21" name="Rectangle 20"/>
           <p:cNvSpPr/>
           <p:nvPr/>
         </p:nvSpPr>
         <p:spPr>
           <a:xfrm>
-            <a:off x="10149840" y="3008376"/>
-            <a:ext cx="1920240" cy="868680"/>
+            <a:off x="10149840" y="2980944"/>
+            <a:ext cx="1920240" cy="841248"/>
           </a:xfrm>
           <a:prstGeom prst="rect">
             <a:avLst/>
@@ -6499,7 +6932,7 @@
           </a:solidFill>
           <a:ln>
             <a:solidFill>
-              <a:srgbClr val="E2E8F0"/>
+              <a:srgbClr val="D8D8D8"/>
             </a:solidFill>
           </a:ln>
         </p:spPr>
@@ -6525,10 +6958,11 @@
               <a:spcAft>
                 <a:spcPts val="200"/>
               </a:spcAft>
-              <a:defRPr sz="900" b="1">
-                <a:solidFill>
-                  <a:srgbClr val="1E293B"/>
-                </a:solidFill>
+              <a:defRPr sz="850" b="1">
+                <a:solidFill>
+                  <a:srgbClr val="1A1A1A"/>
+                </a:solidFill>
+                <a:latin typeface="Raleway"/>
               </a:defRPr>
             </a:pPr>
             <a:r>
@@ -6540,28 +6974,29 @@
               <a:spcAft>
                 <a:spcPts val="200"/>
               </a:spcAft>
-              <a:defRPr sz="900">
-                <a:solidFill>
-                  <a:srgbClr val="1E293B"/>
-                </a:solidFill>
-              </a:defRPr>
-            </a:pPr>
-            <a:r>
-              <a:t>• Especificações</a:t>
-            </a:r>
-          </a:p>
-        </p:txBody>
-      </p:sp>
-      <p:sp>
-        <p:nvSpPr>
-          <p:cNvPr id="19" name="Rectangle 18"/>
+              <a:defRPr sz="850">
+                <a:solidFill>
+                  <a:srgbClr val="1A1A1A"/>
+                </a:solidFill>
+                <a:latin typeface="Raleway"/>
+              </a:defRPr>
+            </a:pPr>
+            <a:r>
+              <a:t>• Mapeamento</a:t>
+            </a:r>
+          </a:p>
+        </p:txBody>
+      </p:sp>
+      <p:sp>
+        <p:nvSpPr>
+          <p:cNvPr id="22" name="Rectangle 21"/>
           <p:cNvSpPr/>
           <p:nvPr/>
         </p:nvSpPr>
         <p:spPr>
           <a:xfrm>
-            <a:off x="731520" y="3931920"/>
-            <a:ext cx="3200400" cy="868680"/>
+            <a:off x="731520" y="3877056"/>
+            <a:ext cx="3200400" cy="841248"/>
           </a:xfrm>
           <a:prstGeom prst="rect">
             <a:avLst/>
@@ -6571,7 +7006,7 @@
           </a:solidFill>
           <a:ln>
             <a:solidFill>
-              <a:srgbClr val="E2E8F0"/>
+              <a:srgbClr val="D8D8D8"/>
             </a:solidFill>
           </a:ln>
         </p:spPr>
@@ -6594,10 +7029,11 @@
           <a:lstStyle/>
           <a:p>
             <a:pPr algn="ctr">
-              <a:defRPr b="1" sz="1000">
-                <a:solidFill>
-                  <a:srgbClr val="0F172A"/>
-                </a:solidFill>
+              <a:defRPr b="1" sz="950">
+                <a:solidFill>
+                  <a:srgbClr val="1A1A1A"/>
+                </a:solidFill>
+                <a:latin typeface="Raleway"/>
               </a:defRPr>
             </a:pPr>
             <a:r>
@@ -6612,24 +7048,24 @@
       </p:sp>
       <p:sp>
         <p:nvSpPr>
-          <p:cNvPr id="20" name="Rectangle 19"/>
+          <p:cNvPr id="23" name="Rectangle 22"/>
           <p:cNvSpPr/>
           <p:nvPr/>
         </p:nvSpPr>
         <p:spPr>
           <a:xfrm>
-            <a:off x="4114800" y="3931920"/>
-            <a:ext cx="1920240" cy="868680"/>
+            <a:off x="4114800" y="3877056"/>
+            <a:ext cx="1920240" cy="841248"/>
           </a:xfrm>
           <a:prstGeom prst="rect">
             <a:avLst/>
           </a:prstGeom>
           <a:solidFill>
-            <a:srgbClr val="FEF3C7"/>
+            <a:srgbClr val="FFF3EE"/>
           </a:solidFill>
           <a:ln w="19050">
             <a:solidFill>
-              <a:srgbClr val="EA580C"/>
+              <a:srgbClr val="FF5722"/>
             </a:solidFill>
           </a:ln>
         </p:spPr>
@@ -6655,10 +7091,11 @@
               <a:spcAft>
                 <a:spcPts val="200"/>
               </a:spcAft>
-              <a:defRPr sz="900" b="1">
-                <a:solidFill>
-                  <a:srgbClr val="1E293B"/>
-                </a:solidFill>
+              <a:defRPr sz="850" b="1">
+                <a:solidFill>
+                  <a:srgbClr val="1A1A1A"/>
+                </a:solidFill>
+                <a:latin typeface="Raleway"/>
               </a:defRPr>
             </a:pPr>
             <a:r>
@@ -6670,14 +7107,15 @@
               <a:spcAft>
                 <a:spcPts val="200"/>
               </a:spcAft>
-              <a:defRPr sz="900">
-                <a:solidFill>
-                  <a:srgbClr val="1E293B"/>
-                </a:solidFill>
-              </a:defRPr>
-            </a:pPr>
-            <a:r>
-              <a:t>• Prioridades</a:t>
+              <a:defRPr sz="850">
+                <a:solidFill>
+                  <a:srgbClr val="1A1A1A"/>
+                </a:solidFill>
+                <a:latin typeface="Raleway"/>
+              </a:defRPr>
+            </a:pPr>
+            <a:r>
+              <a:t>• Matriz prioridades</a:t>
             </a:r>
           </a:p>
           <a:p>
@@ -6685,38 +7123,39 @@
               <a:spcAft>
                 <a:spcPts val="200"/>
               </a:spcAft>
-              <a:defRPr sz="900">
-                <a:solidFill>
-                  <a:srgbClr val="1E293B"/>
-                </a:solidFill>
-              </a:defRPr>
-            </a:pPr>
-            <a:r>
-              <a:t>• Matriz de Riscos</a:t>
-            </a:r>
-          </a:p>
-        </p:txBody>
-      </p:sp>
-      <p:sp>
-        <p:nvSpPr>
-          <p:cNvPr id="21" name="Rectangle 20"/>
+              <a:defRPr sz="850">
+                <a:solidFill>
+                  <a:srgbClr val="1A1A1A"/>
+                </a:solidFill>
+                <a:latin typeface="Raleway"/>
+              </a:defRPr>
+            </a:pPr>
+            <a:r>
+              <a:t>• Riscos SANASA</a:t>
+            </a:r>
+          </a:p>
+        </p:txBody>
+      </p:sp>
+      <p:sp>
+        <p:nvSpPr>
+          <p:cNvPr id="24" name="Rectangle 23"/>
           <p:cNvSpPr/>
           <p:nvPr/>
         </p:nvSpPr>
         <p:spPr>
           <a:xfrm>
-            <a:off x="6126480" y="3931920"/>
-            <a:ext cx="1920240" cy="868680"/>
+            <a:off x="6126480" y="3877056"/>
+            <a:ext cx="1920240" cy="841248"/>
           </a:xfrm>
           <a:prstGeom prst="rect">
             <a:avLst/>
           </a:prstGeom>
           <a:solidFill>
-            <a:srgbClr val="EFF6FF"/>
+            <a:srgbClr val="F0F9F0"/>
           </a:solidFill>
           <a:ln>
             <a:solidFill>
-              <a:srgbClr val="2563EB"/>
+              <a:srgbClr val="509546"/>
             </a:solidFill>
           </a:ln>
         </p:spPr>
@@ -6742,10 +7181,11 @@
               <a:spcAft>
                 <a:spcPts val="200"/>
               </a:spcAft>
-              <a:defRPr sz="900" b="1">
-                <a:solidFill>
-                  <a:srgbClr val="1E293B"/>
-                </a:solidFill>
+              <a:defRPr sz="850" b="1">
+                <a:solidFill>
+                  <a:srgbClr val="1A1A1A"/>
+                </a:solidFill>
+                <a:latin typeface="Raleway"/>
               </a:defRPr>
             </a:pPr>
             <a:r>
@@ -6757,10 +7197,11 @@
               <a:spcAft>
                 <a:spcPts val="200"/>
               </a:spcAft>
-              <a:defRPr sz="900">
-                <a:solidFill>
-                  <a:srgbClr val="1E293B"/>
-                </a:solidFill>
+              <a:defRPr sz="850">
+                <a:solidFill>
+                  <a:srgbClr val="1A1A1A"/>
+                </a:solidFill>
+                <a:latin typeface="Raleway"/>
               </a:defRPr>
             </a:pPr>
             <a:r>
@@ -6772,10 +7213,11 @@
               <a:spcAft>
                 <a:spcPts val="200"/>
               </a:spcAft>
-              <a:defRPr sz="900">
-                <a:solidFill>
-                  <a:srgbClr val="1E293B"/>
-                </a:solidFill>
+              <a:defRPr sz="850">
+                <a:solidFill>
+                  <a:srgbClr val="1A1A1A"/>
+                </a:solidFill>
+                <a:latin typeface="Raleway"/>
               </a:defRPr>
             </a:pPr>
             <a:r>
@@ -6786,14 +7228,14 @@
       </p:sp>
       <p:sp>
         <p:nvSpPr>
-          <p:cNvPr id="22" name="Rectangle 21"/>
+          <p:cNvPr id="25" name="Rectangle 24"/>
           <p:cNvSpPr/>
           <p:nvPr/>
         </p:nvSpPr>
         <p:spPr>
           <a:xfrm>
-            <a:off x="8138160" y="3931920"/>
-            <a:ext cx="1920240" cy="868680"/>
+            <a:off x="8138160" y="3877056"/>
+            <a:ext cx="1920240" cy="841248"/>
           </a:xfrm>
           <a:prstGeom prst="rect">
             <a:avLst/>
@@ -6803,7 +7245,7 @@
           </a:solidFill>
           <a:ln>
             <a:solidFill>
-              <a:srgbClr val="E2E8F0"/>
+              <a:srgbClr val="D8D8D8"/>
             </a:solidFill>
           </a:ln>
         </p:spPr>
@@ -6829,10 +7271,11 @@
               <a:spcAft>
                 <a:spcPts val="200"/>
               </a:spcAft>
-              <a:defRPr sz="900" b="1">
-                <a:solidFill>
-                  <a:srgbClr val="1E293B"/>
-                </a:solidFill>
+              <a:defRPr sz="850" b="1">
+                <a:solidFill>
+                  <a:srgbClr val="1A1A1A"/>
+                </a:solidFill>
+                <a:latin typeface="Raleway"/>
               </a:defRPr>
             </a:pPr>
             <a:r>
@@ -6844,10 +7287,11 @@
               <a:spcAft>
                 <a:spcPts val="200"/>
               </a:spcAft>
-              <a:defRPr sz="900">
-                <a:solidFill>
-                  <a:srgbClr val="1E293B"/>
-                </a:solidFill>
+              <a:defRPr sz="850">
+                <a:solidFill>
+                  <a:srgbClr val="1A1A1A"/>
+                </a:solidFill>
+                <a:latin typeface="Raleway"/>
               </a:defRPr>
             </a:pPr>
             <a:r>
@@ -6858,14 +7302,14 @@
       </p:sp>
       <p:sp>
         <p:nvSpPr>
-          <p:cNvPr id="23" name="Rectangle 22"/>
+          <p:cNvPr id="26" name="Rectangle 25"/>
           <p:cNvSpPr/>
           <p:nvPr/>
         </p:nvSpPr>
         <p:spPr>
           <a:xfrm>
-            <a:off x="10149840" y="3931920"/>
-            <a:ext cx="1920240" cy="868680"/>
+            <a:off x="10149840" y="3877056"/>
+            <a:ext cx="1920240" cy="841248"/>
           </a:xfrm>
           <a:prstGeom prst="rect">
             <a:avLst/>
@@ -6875,7 +7319,7 @@
           </a:solidFill>
           <a:ln>
             <a:solidFill>
-              <a:srgbClr val="E2E8F0"/>
+              <a:srgbClr val="D8D8D8"/>
             </a:solidFill>
           </a:ln>
         </p:spPr>
@@ -6901,10 +7345,11 @@
               <a:spcAft>
                 <a:spcPts val="200"/>
               </a:spcAft>
-              <a:defRPr sz="900" b="1">
-                <a:solidFill>
-                  <a:srgbClr val="1E293B"/>
-                </a:solidFill>
+              <a:defRPr sz="850" b="1">
+                <a:solidFill>
+                  <a:srgbClr val="1A1A1A"/>
+                </a:solidFill>
+                <a:latin typeface="Raleway"/>
               </a:defRPr>
             </a:pPr>
             <a:r>
@@ -6916,10 +7361,11 @@
               <a:spcAft>
                 <a:spcPts val="200"/>
               </a:spcAft>
-              <a:defRPr sz="900">
-                <a:solidFill>
-                  <a:srgbClr val="1E293B"/>
-                </a:solidFill>
+              <a:defRPr sz="850">
+                <a:solidFill>
+                  <a:srgbClr val="1A1A1A"/>
+                </a:solidFill>
+                <a:latin typeface="Raleway"/>
               </a:defRPr>
             </a:pPr>
             <a:r>
@@ -6930,14 +7376,14 @@
       </p:sp>
       <p:sp>
         <p:nvSpPr>
-          <p:cNvPr id="24" name="Rectangle 23"/>
+          <p:cNvPr id="27" name="Rectangle 26"/>
           <p:cNvSpPr/>
           <p:nvPr/>
         </p:nvSpPr>
         <p:spPr>
           <a:xfrm>
-            <a:off x="731520" y="4855464"/>
-            <a:ext cx="3200400" cy="868680"/>
+            <a:off x="731520" y="4773168"/>
+            <a:ext cx="3200400" cy="841248"/>
           </a:xfrm>
           <a:prstGeom prst="rect">
             <a:avLst/>
@@ -6947,7 +7393,7 @@
           </a:solidFill>
           <a:ln>
             <a:solidFill>
-              <a:srgbClr val="E2E8F0"/>
+              <a:srgbClr val="D8D8D8"/>
             </a:solidFill>
           </a:ln>
         </p:spPr>
@@ -6970,10 +7416,11 @@
           <a:lstStyle/>
           <a:p>
             <a:pPr algn="ctr">
-              <a:defRPr b="1" sz="1000">
-                <a:solidFill>
-                  <a:srgbClr val="0F172A"/>
-                </a:solidFill>
+              <a:defRPr b="1" sz="950">
+                <a:solidFill>
+                  <a:srgbClr val="1A1A1A"/>
+                </a:solidFill>
+                <a:latin typeface="Raleway"/>
               </a:defRPr>
             </a:pPr>
             <a:r>
@@ -6981,21 +7428,21 @@
             </a:r>
             <a:br/>
             <a:r>
-              <a:t>Automação autônoma Playwright</a:t>
-            </a:r>
-          </a:p>
-        </p:txBody>
-      </p:sp>
-      <p:sp>
-        <p:nvSpPr>
-          <p:cNvPr id="25" name="Rectangle 24"/>
+              <a:t>Automação autônoma Playwright / Camoufox</a:t>
+            </a:r>
+          </a:p>
+        </p:txBody>
+      </p:sp>
+      <p:sp>
+        <p:nvSpPr>
+          <p:cNvPr id="28" name="Rectangle 27"/>
           <p:cNvSpPr/>
           <p:nvPr/>
         </p:nvSpPr>
         <p:spPr>
           <a:xfrm>
-            <a:off x="4114800" y="4855464"/>
-            <a:ext cx="1920240" cy="868680"/>
+            <a:off x="4114800" y="4773168"/>
+            <a:ext cx="1920240" cy="841248"/>
           </a:xfrm>
           <a:prstGeom prst="rect">
             <a:avLst/>
@@ -7005,7 +7452,7 @@
           </a:solidFill>
           <a:ln>
             <a:solidFill>
-              <a:srgbClr val="E2E8F0"/>
+              <a:srgbClr val="D8D8D8"/>
             </a:solidFill>
           </a:ln>
         </p:spPr>
@@ -7031,10 +7478,11 @@
               <a:spcAft>
                 <a:spcPts val="200"/>
               </a:spcAft>
-              <a:defRPr sz="900" b="1">
-                <a:solidFill>
-                  <a:srgbClr val="1E293B"/>
-                </a:solidFill>
+              <a:defRPr sz="850" b="1">
+                <a:solidFill>
+                  <a:srgbClr val="1A1A1A"/>
+                </a:solidFill>
+                <a:latin typeface="Raleway"/>
               </a:defRPr>
             </a:pPr>
             <a:r>
@@ -7046,10 +7494,11 @@
               <a:spcAft>
                 <a:spcPts val="200"/>
               </a:spcAft>
-              <a:defRPr sz="900">
-                <a:solidFill>
-                  <a:srgbClr val="1E293B"/>
-                </a:solidFill>
+              <a:defRPr sz="850">
+                <a:solidFill>
+                  <a:srgbClr val="1A1A1A"/>
+                </a:solidFill>
+                <a:latin typeface="Raleway"/>
               </a:defRPr>
             </a:pPr>
             <a:r>
@@ -7060,14 +7509,14 @@
       </p:sp>
       <p:sp>
         <p:nvSpPr>
-          <p:cNvPr id="26" name="Rectangle 25"/>
+          <p:cNvPr id="29" name="Rectangle 28"/>
           <p:cNvSpPr/>
           <p:nvPr/>
         </p:nvSpPr>
         <p:spPr>
           <a:xfrm>
-            <a:off x="6126480" y="4855464"/>
-            <a:ext cx="1920240" cy="868680"/>
+            <a:off x="6126480" y="4773168"/>
+            <a:ext cx="1920240" cy="841248"/>
           </a:xfrm>
           <a:prstGeom prst="rect">
             <a:avLst/>
@@ -7077,7 +7526,7 @@
           </a:solidFill>
           <a:ln>
             <a:solidFill>
-              <a:srgbClr val="E2E8F0"/>
+              <a:srgbClr val="D8D8D8"/>
             </a:solidFill>
           </a:ln>
         </p:spPr>
@@ -7103,10 +7552,11 @@
               <a:spcAft>
                 <a:spcPts val="200"/>
               </a:spcAft>
-              <a:defRPr sz="900" b="1">
-                <a:solidFill>
-                  <a:srgbClr val="1E293B"/>
-                </a:solidFill>
+              <a:defRPr sz="850" b="1">
+                <a:solidFill>
+                  <a:srgbClr val="1A1A1A"/>
+                </a:solidFill>
+                <a:latin typeface="Raleway"/>
               </a:defRPr>
             </a:pPr>
             <a:r>
@@ -7118,10 +7568,11 @@
               <a:spcAft>
                 <a:spcPts val="200"/>
               </a:spcAft>
-              <a:defRPr sz="900">
-                <a:solidFill>
-                  <a:srgbClr val="1E293B"/>
-                </a:solidFill>
+              <a:defRPr sz="850">
+                <a:solidFill>
+                  <a:srgbClr val="1A1A1A"/>
+                </a:solidFill>
+                <a:latin typeface="Raleway"/>
               </a:defRPr>
             </a:pPr>
             <a:r>
@@ -7132,24 +7583,24 @@
       </p:sp>
       <p:sp>
         <p:nvSpPr>
-          <p:cNvPr id="27" name="Rectangle 26"/>
+          <p:cNvPr id="30" name="Rectangle 29"/>
           <p:cNvSpPr/>
           <p:nvPr/>
         </p:nvSpPr>
         <p:spPr>
           <a:xfrm>
-            <a:off x="8138160" y="4855464"/>
-            <a:ext cx="1920240" cy="868680"/>
+            <a:off x="8138160" y="4773168"/>
+            <a:ext cx="1920240" cy="841248"/>
           </a:xfrm>
           <a:prstGeom prst="rect">
             <a:avLst/>
           </a:prstGeom>
           <a:solidFill>
-            <a:srgbClr val="EFF6FF"/>
+            <a:srgbClr val="F0F9F0"/>
           </a:solidFill>
           <a:ln>
             <a:solidFill>
-              <a:srgbClr val="2563EB"/>
+              <a:srgbClr val="509546"/>
             </a:solidFill>
           </a:ln>
         </p:spPr>
@@ -7175,10 +7626,11 @@
               <a:spcAft>
                 <a:spcPts val="200"/>
               </a:spcAft>
-              <a:defRPr sz="900" b="1">
-                <a:solidFill>
-                  <a:srgbClr val="1E293B"/>
-                </a:solidFill>
+              <a:defRPr sz="850" b="1">
+                <a:solidFill>
+                  <a:srgbClr val="1A1A1A"/>
+                </a:solidFill>
+                <a:latin typeface="Raleway"/>
               </a:defRPr>
             </a:pPr>
             <a:r>
@@ -7190,10 +7642,11 @@
               <a:spcAft>
                 <a:spcPts val="200"/>
               </a:spcAft>
-              <a:defRPr sz="900">
-                <a:solidFill>
-                  <a:srgbClr val="1E293B"/>
-                </a:solidFill>
+              <a:defRPr sz="850">
+                <a:solidFill>
+                  <a:srgbClr val="1A1A1A"/>
+                </a:solidFill>
+                <a:latin typeface="Raleway"/>
               </a:defRPr>
             </a:pPr>
             <a:r>
@@ -7205,10 +7658,11 @@
               <a:spcAft>
                 <a:spcPts val="200"/>
               </a:spcAft>
-              <a:defRPr sz="900">
-                <a:solidFill>
-                  <a:srgbClr val="1E293B"/>
-                </a:solidFill>
+              <a:defRPr sz="850">
+                <a:solidFill>
+                  <a:srgbClr val="1A1A1A"/>
+                </a:solidFill>
+                <a:latin typeface="Raleway"/>
               </a:defRPr>
             </a:pPr>
             <a:r>
@@ -7219,14 +7673,14 @@
       </p:sp>
       <p:sp>
         <p:nvSpPr>
-          <p:cNvPr id="28" name="Rectangle 27"/>
+          <p:cNvPr id="31" name="Rectangle 30"/>
           <p:cNvSpPr/>
           <p:nvPr/>
         </p:nvSpPr>
         <p:spPr>
           <a:xfrm>
-            <a:off x="10149840" y="4855464"/>
-            <a:ext cx="1920240" cy="868680"/>
+            <a:off x="10149840" y="4773168"/>
+            <a:ext cx="1920240" cy="841248"/>
           </a:xfrm>
           <a:prstGeom prst="rect">
             <a:avLst/>
@@ -7236,7 +7690,7 @@
           </a:solidFill>
           <a:ln>
             <a:solidFill>
-              <a:srgbClr val="E2E8F0"/>
+              <a:srgbClr val="D8D8D8"/>
             </a:solidFill>
           </a:ln>
         </p:spPr>
@@ -7262,10 +7716,11 @@
               <a:spcAft>
                 <a:spcPts val="200"/>
               </a:spcAft>
-              <a:defRPr sz="900" b="1">
-                <a:solidFill>
-                  <a:srgbClr val="1E293B"/>
-                </a:solidFill>
+              <a:defRPr sz="850" b="1">
+                <a:solidFill>
+                  <a:srgbClr val="1A1A1A"/>
+                </a:solidFill>
+                <a:latin typeface="Raleway"/>
               </a:defRPr>
             </a:pPr>
             <a:r>
@@ -7277,10 +7732,11 @@
               <a:spcAft>
                 <a:spcPts val="200"/>
               </a:spcAft>
-              <a:defRPr sz="900">
-                <a:solidFill>
-                  <a:srgbClr val="1E293B"/>
-                </a:solidFill>
+              <a:defRPr sz="850">
+                <a:solidFill>
+                  <a:srgbClr val="1A1A1A"/>
+                </a:solidFill>
+                <a:latin typeface="Raleway"/>
               </a:defRPr>
             </a:pPr>
             <a:r>
@@ -7291,14 +7747,14 @@
       </p:sp>
       <p:sp>
         <p:nvSpPr>
-          <p:cNvPr id="29" name="Rectangle 28"/>
+          <p:cNvPr id="32" name="Rectangle 31"/>
           <p:cNvSpPr/>
           <p:nvPr/>
         </p:nvSpPr>
         <p:spPr>
           <a:xfrm>
-            <a:off x="731520" y="5779008"/>
-            <a:ext cx="3200400" cy="868680"/>
+            <a:off x="731520" y="5669280"/>
+            <a:ext cx="3200400" cy="841248"/>
           </a:xfrm>
           <a:prstGeom prst="rect">
             <a:avLst/>
@@ -7308,7 +7764,7 @@
           </a:solidFill>
           <a:ln>
             <a:solidFill>
-              <a:srgbClr val="E2E8F0"/>
+              <a:srgbClr val="D8D8D8"/>
             </a:solidFill>
           </a:ln>
         </p:spPr>
@@ -7331,10 +7787,11 @@
           <a:lstStyle/>
           <a:p>
             <a:pPr algn="ctr">
-              <a:defRPr b="1" sz="1000">
-                <a:solidFill>
-                  <a:srgbClr val="0F172A"/>
-                </a:solidFill>
+              <a:defRPr b="1" sz="950">
+                <a:solidFill>
+                  <a:srgbClr val="1A1A1A"/>
+                </a:solidFill>
+                <a:latin typeface="Raleway"/>
               </a:defRPr>
             </a:pPr>
             <a:r>
@@ -7342,31 +7799,31 @@
             </a:r>
             <a:br/>
             <a:r>
-              <a:t>Nativo pós-conclusão de WEB</a:t>
-            </a:r>
-          </a:p>
-        </p:txBody>
-      </p:sp>
-      <p:sp>
-        <p:nvSpPr>
-          <p:cNvPr id="30" name="Rectangle 29"/>
+              <a:t>Testes manuais e automação em apps nativos</a:t>
+            </a:r>
+          </a:p>
+        </p:txBody>
+      </p:sp>
+      <p:sp>
+        <p:nvSpPr>
+          <p:cNvPr id="33" name="Rectangle 32"/>
           <p:cNvSpPr/>
           <p:nvPr/>
         </p:nvSpPr>
         <p:spPr>
           <a:xfrm>
-            <a:off x="4114800" y="5779008"/>
-            <a:ext cx="1920240" cy="868680"/>
+            <a:off x="4114800" y="5669280"/>
+            <a:ext cx="1920240" cy="841248"/>
           </a:xfrm>
           <a:prstGeom prst="rect">
             <a:avLst/>
           </a:prstGeom>
           <a:solidFill>
-            <a:srgbClr val="F1F5F9"/>
+            <a:srgbClr val="F5F5F5"/>
           </a:solidFill>
           <a:ln>
             <a:solidFill>
-              <a:srgbClr val="E2E8F0"/>
+              <a:srgbClr val="D8D8D8"/>
             </a:solidFill>
           </a:ln>
         </p:spPr>
@@ -7392,10 +7849,11 @@
               <a:spcAft>
                 <a:spcPts val="200"/>
               </a:spcAft>
-              <a:defRPr sz="900" b="1">
-                <a:solidFill>
-                  <a:srgbClr val="1E293B"/>
-                </a:solidFill>
+              <a:defRPr sz="850" b="1">
+                <a:solidFill>
+                  <a:srgbClr val="1A1A1A"/>
+                </a:solidFill>
+                <a:latin typeface="Raleway"/>
               </a:defRPr>
             </a:pPr>
             <a:r>
@@ -7407,10 +7865,11 @@
               <a:spcAft>
                 <a:spcPts val="200"/>
               </a:spcAft>
-              <a:defRPr sz="900">
-                <a:solidFill>
-                  <a:srgbClr val="1E293B"/>
-                </a:solidFill>
+              <a:defRPr sz="850">
+                <a:solidFill>
+                  <a:srgbClr val="1A1A1A"/>
+                </a:solidFill>
+                <a:latin typeface="Raleway"/>
               </a:defRPr>
             </a:pPr>
             <a:r>
@@ -7421,24 +7880,24 @@
       </p:sp>
       <p:sp>
         <p:nvSpPr>
-          <p:cNvPr id="31" name="Rectangle 30"/>
+          <p:cNvPr id="34" name="Rectangle 33"/>
           <p:cNvSpPr/>
           <p:nvPr/>
         </p:nvSpPr>
         <p:spPr>
           <a:xfrm>
-            <a:off x="6126480" y="5779008"/>
-            <a:ext cx="1920240" cy="868680"/>
+            <a:off x="6126480" y="5669280"/>
+            <a:ext cx="1920240" cy="841248"/>
           </a:xfrm>
           <a:prstGeom prst="rect">
             <a:avLst/>
           </a:prstGeom>
           <a:solidFill>
-            <a:srgbClr val="F1F5F9"/>
+            <a:srgbClr val="F5F5F5"/>
           </a:solidFill>
           <a:ln>
             <a:solidFill>
-              <a:srgbClr val="E2E8F0"/>
+              <a:srgbClr val="D8D8D8"/>
             </a:solidFill>
           </a:ln>
         </p:spPr>
@@ -7464,10 +7923,11 @@
               <a:spcAft>
                 <a:spcPts val="200"/>
               </a:spcAft>
-              <a:defRPr sz="900" b="1">
-                <a:solidFill>
-                  <a:srgbClr val="1E293B"/>
-                </a:solidFill>
+              <a:defRPr sz="850" b="1">
+                <a:solidFill>
+                  <a:srgbClr val="1A1A1A"/>
+                </a:solidFill>
+                <a:latin typeface="Raleway"/>
               </a:defRPr>
             </a:pPr>
             <a:r>
@@ -7479,10 +7939,11 @@
               <a:spcAft>
                 <a:spcPts val="200"/>
               </a:spcAft>
-              <a:defRPr sz="900">
-                <a:solidFill>
-                  <a:srgbClr val="1E293B"/>
-                </a:solidFill>
+              <a:defRPr sz="850">
+                <a:solidFill>
+                  <a:srgbClr val="1A1A1A"/>
+                </a:solidFill>
+                <a:latin typeface="Raleway"/>
               </a:defRPr>
             </a:pPr>
             <a:r>
@@ -7493,14 +7954,14 @@
       </p:sp>
       <p:sp>
         <p:nvSpPr>
-          <p:cNvPr id="32" name="Rectangle 31"/>
+          <p:cNvPr id="35" name="Rectangle 34"/>
           <p:cNvSpPr/>
           <p:nvPr/>
         </p:nvSpPr>
         <p:spPr>
           <a:xfrm>
-            <a:off x="8138160" y="5779008"/>
-            <a:ext cx="1920240" cy="868680"/>
+            <a:off x="8138160" y="5669280"/>
+            <a:ext cx="1920240" cy="841248"/>
           </a:xfrm>
           <a:prstGeom prst="rect">
             <a:avLst/>
@@ -7510,7 +7971,7 @@
           </a:solidFill>
           <a:ln>
             <a:solidFill>
-              <a:srgbClr val="E2E8F0"/>
+              <a:srgbClr val="D8D8D8"/>
             </a:solidFill>
           </a:ln>
         </p:spPr>
@@ -7536,10 +7997,11 @@
               <a:spcAft>
                 <a:spcPts val="200"/>
               </a:spcAft>
-              <a:defRPr sz="900" b="1">
-                <a:solidFill>
-                  <a:srgbClr val="1E293B"/>
-                </a:solidFill>
+              <a:defRPr sz="850" b="1">
+                <a:solidFill>
+                  <a:srgbClr val="1A1A1A"/>
+                </a:solidFill>
+                <a:latin typeface="Raleway"/>
               </a:defRPr>
             </a:pPr>
             <a:r>
@@ -7551,10 +8013,11 @@
               <a:spcAft>
                 <a:spcPts val="200"/>
               </a:spcAft>
-              <a:defRPr sz="900">
-                <a:solidFill>
-                  <a:srgbClr val="1E293B"/>
-                </a:solidFill>
+              <a:defRPr sz="850">
+                <a:solidFill>
+                  <a:srgbClr val="1A1A1A"/>
+                </a:solidFill>
+                <a:latin typeface="Raleway"/>
               </a:defRPr>
             </a:pPr>
             <a:r>
@@ -7565,24 +8028,24 @@
       </p:sp>
       <p:sp>
         <p:nvSpPr>
-          <p:cNvPr id="33" name="Rectangle 32"/>
+          <p:cNvPr id="36" name="Rectangle 35"/>
           <p:cNvSpPr/>
           <p:nvPr/>
         </p:nvSpPr>
         <p:spPr>
           <a:xfrm>
-            <a:off x="10149840" y="5779008"/>
-            <a:ext cx="1920240" cy="868680"/>
+            <a:off x="10149840" y="5669280"/>
+            <a:ext cx="1920240" cy="841248"/>
           </a:xfrm>
           <a:prstGeom prst="rect">
             <a:avLst/>
           </a:prstGeom>
           <a:solidFill>
-            <a:srgbClr val="EFF6FF"/>
+            <a:srgbClr val="F0F9F0"/>
           </a:solidFill>
           <a:ln>
             <a:solidFill>
-              <a:srgbClr val="2563EB"/>
+              <a:srgbClr val="509546"/>
             </a:solidFill>
           </a:ln>
         </p:spPr>
@@ -7608,10 +8071,11 @@
               <a:spcAft>
                 <a:spcPts val="200"/>
               </a:spcAft>
-              <a:defRPr sz="900" b="1">
-                <a:solidFill>
-                  <a:srgbClr val="1E293B"/>
-                </a:solidFill>
+              <a:defRPr sz="850" b="1">
+                <a:solidFill>
+                  <a:srgbClr val="1A1A1A"/>
+                </a:solidFill>
+                <a:latin typeface="Raleway"/>
               </a:defRPr>
             </a:pPr>
             <a:r>
@@ -7623,10 +8087,11 @@
               <a:spcAft>
                 <a:spcPts val="200"/>
               </a:spcAft>
-              <a:defRPr sz="900">
-                <a:solidFill>
-                  <a:srgbClr val="1E293B"/>
-                </a:solidFill>
+              <a:defRPr sz="850">
+                <a:solidFill>
+                  <a:srgbClr val="1A1A1A"/>
+                </a:solidFill>
+                <a:latin typeface="Raleway"/>
               </a:defRPr>
             </a:pPr>
             <a:r>
@@ -7638,14 +8103,15 @@
               <a:spcAft>
                 <a:spcPts val="200"/>
               </a:spcAft>
-              <a:defRPr sz="900">
-                <a:solidFill>
-                  <a:srgbClr val="1E293B"/>
-                </a:solidFill>
-              </a:defRPr>
-            </a:pPr>
-            <a:r>
-              <a:t>• Integração Mobile</a:t>
+              <a:defRPr sz="850">
+                <a:solidFill>
+                  <a:srgbClr val="1A1A1A"/>
+                </a:solidFill>
+                <a:latin typeface="Raleway"/>
+              </a:defRPr>
+            </a:pPr>
+            <a:r>
+              <a:t>• E2E Mobile</a:t>
             </a:r>
           </a:p>
         </p:txBody>
@@ -7683,7 +8149,7 @@
             <a:avLst/>
           </a:prstGeom>
           <a:solidFill>
-            <a:srgbClr val="F8FAFC"/>
+            <a:srgbClr val="F8FAF8"/>
           </a:solidFill>
           <a:ln>
             <a:noFill/>
@@ -7713,14 +8179,57 @@
       </p:sp>
       <p:sp>
         <p:nvSpPr>
-          <p:cNvPr id="3" name="TextBox 2"/>
+          <p:cNvPr id="3" name="Rectangle 2"/>
+          <p:cNvSpPr/>
+          <p:nvPr/>
+        </p:nvSpPr>
+        <p:spPr>
+          <a:xfrm>
+            <a:off x="0" y="0"/>
+            <a:ext cx="12191695" cy="73152"/>
+          </a:xfrm>
+          <a:prstGeom prst="rect">
+            <a:avLst/>
+          </a:prstGeom>
+          <a:solidFill>
+            <a:srgbClr val="38761D"/>
+          </a:solidFill>
+          <a:ln>
+            <a:noFill/>
+          </a:ln>
+        </p:spPr>
+        <p:style>
+          <a:lnRef idx="1">
+            <a:schemeClr val="accent1"/>
+          </a:lnRef>
+          <a:fillRef idx="3">
+            <a:schemeClr val="accent1"/>
+          </a:fillRef>
+          <a:effectRef idx="2">
+            <a:schemeClr val="accent1"/>
+          </a:effectRef>
+          <a:fontRef idx="minor">
+            <a:schemeClr val="lt1"/>
+          </a:fontRef>
+        </p:style>
+        <p:txBody>
+          <a:bodyPr rtlCol="0" anchor="ctr"/>
+          <a:lstStyle/>
+          <a:p>
+            <a:pPr algn="ctr"/>
+          </a:p>
+        </p:txBody>
+      </p:sp>
+      <p:sp>
+        <p:nvSpPr>
+          <p:cNvPr id="4" name="TextBox 3"/>
           <p:cNvSpPr txBox="1"/>
           <p:nvPr/>
         </p:nvSpPr>
         <p:spPr>
           <a:xfrm>
-            <a:off x="731520" y="411480"/>
-            <a:ext cx="10698480" cy="1005840"/>
+            <a:off x="731520" y="365760"/>
+            <a:ext cx="8686800" cy="1051560"/>
           </a:xfrm>
           <a:prstGeom prst="rect">
             <a:avLst/>
@@ -7728,28 +8237,30 @@
           <a:noFill/>
         </p:spPr>
         <p:txBody>
-          <a:bodyPr wrap="square">
+          <a:bodyPr wrap="square" lIns="0" tIns="0" rIns="0" bIns="0">
             <a:spAutoFit/>
           </a:bodyPr>
           <a:lstStyle/>
           <a:p>
             <a:pPr>
-              <a:defRPr sz="1100" b="1">
-                <a:solidFill>
-                  <a:srgbClr val="2563EB"/>
-                </a:solidFill>
-              </a:defRPr>
-            </a:pPr>
-            <a:r>
-              <a:t>PROJETO QAI • FÁBRICA DE TESTES X-TESTING</a:t>
-            </a:r>
-          </a:p>
-          <a:p>
-            <a:pPr>
-              <a:defRPr sz="2400" b="1">
-                <a:solidFill>
-                  <a:srgbClr val="0F172A"/>
-                </a:solidFill>
+              <a:defRPr sz="1000" b="1">
+                <a:solidFill>
+                  <a:srgbClr val="FF5722"/>
+                </a:solidFill>
+                <a:latin typeface="Raleway"/>
+              </a:defRPr>
+            </a:pPr>
+            <a:r>
+              <a:t>04 / STATUS DA OPERAÇÃO</a:t>
+            </a:r>
+          </a:p>
+          <a:p>
+            <a:pPr>
+              <a:defRPr sz="2200" b="1">
+                <a:solidFill>
+                  <a:srgbClr val="1A1A1A"/>
+                </a:solidFill>
+                <a:latin typeface="Raleway"/>
               </a:defRPr>
             </a:pPr>
             <a:r>
@@ -7760,8 +8271,9 @@
             <a:pPr>
               <a:defRPr sz="1100">
                 <a:solidFill>
-                  <a:srgbClr val="64748B"/>
-                </a:solidFill>
+                  <a:srgbClr val="7F7F7F"/>
+                </a:solidFill>
+                <a:latin typeface="Raleway"/>
               </a:defRPr>
             </a:pPr>
             <a:r>
@@ -7770,16 +8282,76 @@
           </a:p>
         </p:txBody>
       </p:sp>
-      <p:sp>
-        <p:nvSpPr>
-          <p:cNvPr id="4" name="Rounded Rectangle 3"/>
+      <p:pic>
+        <p:nvPicPr>
+          <p:cNvPr id="5" name="Picture 4" descr="image2.png"/>
+          <p:cNvPicPr>
+            <a:picLocks noChangeAspect="1"/>
+          </p:cNvPicPr>
+          <p:nvPr/>
+        </p:nvPicPr>
+        <p:blipFill>
+          <a:blip r:embed="rId2"/>
+          <a:stretch>
+            <a:fillRect/>
+          </a:stretch>
+        </p:blipFill>
+        <p:spPr>
+          <a:xfrm>
+            <a:off x="9875520" y="365760"/>
+            <a:ext cx="1600200" cy="869674"/>
+          </a:xfrm>
+          <a:prstGeom prst="rect">
+            <a:avLst/>
+          </a:prstGeom>
+        </p:spPr>
+      </p:pic>
+      <p:sp>
+        <p:nvSpPr>
+          <p:cNvPr id="6" name="TextBox 5"/>
+          <p:cNvSpPr txBox="1"/>
+          <p:nvPr/>
+        </p:nvSpPr>
+        <p:spPr>
+          <a:xfrm>
+            <a:off x="731520" y="6446520"/>
+            <a:ext cx="10728655" cy="320040"/>
+          </a:xfrm>
+          <a:prstGeom prst="rect">
+            <a:avLst/>
+          </a:prstGeom>
+          <a:noFill/>
+        </p:spPr>
+        <p:txBody>
+          <a:bodyPr wrap="none" lIns="0" tIns="0" rIns="0" bIns="0">
+            <a:spAutoFit/>
+          </a:bodyPr>
+          <a:lstStyle/>
+          <a:p>
+            <a:pPr>
+              <a:defRPr sz="800" b="1">
+                <a:solidFill>
+                  <a:srgbClr val="A0A0A0"/>
+                </a:solidFill>
+                <a:latin typeface="Raleway"/>
+              </a:defRPr>
+            </a:pPr>
+            <a:r>
+              <a:t>PROJETO QAI • FÁBRICA DE TESTES X-TESTING  |  ESTEIRA DE QUALIDADE &amp; SANASA  |  WWW.XTESTING.COM.BR</a:t>
+            </a:r>
+          </a:p>
+        </p:txBody>
+      </p:sp>
+      <p:sp>
+        <p:nvSpPr>
+          <p:cNvPr id="7" name="Rounded Rectangle 6"/>
           <p:cNvSpPr/>
           <p:nvPr/>
         </p:nvSpPr>
         <p:spPr>
           <a:xfrm>
-            <a:off x="731520" y="1508760"/>
-            <a:ext cx="5202936" cy="2377440"/>
+            <a:off x="731520" y="1536192"/>
+            <a:ext cx="5202936" cy="2331720"/>
           </a:xfrm>
           <a:prstGeom prst="roundRect">
             <a:avLst/>
@@ -7789,7 +8361,7 @@
           </a:solidFill>
           <a:ln w="15240">
             <a:solidFill>
-              <a:srgbClr val="E2E8F0"/>
+              <a:srgbClr val="D8D8D8"/>
             </a:solidFill>
           </a:ln>
         </p:spPr>
@@ -7817,20 +8389,20 @@
       </p:sp>
       <p:sp>
         <p:nvSpPr>
-          <p:cNvPr id="5" name="Rectangle 4"/>
+          <p:cNvPr id="8" name="Rectangle 7"/>
           <p:cNvSpPr/>
           <p:nvPr/>
         </p:nvSpPr>
         <p:spPr>
           <a:xfrm>
-            <a:off x="896112" y="1636776"/>
+            <a:off x="896112" y="1664208"/>
             <a:ext cx="1097280" cy="45720"/>
           </a:xfrm>
           <a:prstGeom prst="rect">
             <a:avLst/>
           </a:prstGeom>
           <a:solidFill>
-            <a:srgbClr val="2563EB"/>
+            <a:srgbClr val="38761D"/>
           </a:solidFill>
           <a:ln>
             <a:noFill/>
@@ -7860,14 +8432,14 @@
       </p:sp>
       <p:sp>
         <p:nvSpPr>
-          <p:cNvPr id="6" name="TextBox 5"/>
+          <p:cNvPr id="9" name="TextBox 8"/>
           <p:cNvSpPr txBox="1"/>
           <p:nvPr/>
         </p:nvSpPr>
         <p:spPr>
           <a:xfrm>
-            <a:off x="896112" y="1728216"/>
-            <a:ext cx="4873752" cy="2103120"/>
+            <a:off x="896112" y="1755648"/>
+            <a:ext cx="4873752" cy="2057400"/>
           </a:xfrm>
           <a:prstGeom prst="rect">
             <a:avLst/>
@@ -7883,8 +8455,9 @@
             <a:pPr>
               <a:defRPr sz="850" b="1">
                 <a:solidFill>
-                  <a:srgbClr val="2563EB"/>
-                </a:solidFill>
+                  <a:srgbClr val="38761D"/>
+                </a:solidFill>
+                <a:latin typeface="Raleway"/>
               </a:defRPr>
             </a:pPr>
             <a:r>
@@ -7898,8 +8471,9 @@
               </a:spcAft>
               <a:defRPr sz="1300" b="1">
                 <a:solidFill>
-                  <a:srgbClr val="0F172A"/>
-                </a:solidFill>
+                  <a:srgbClr val="1A1A1A"/>
+                </a:solidFill>
+                <a:latin typeface="Raleway"/>
               </a:defRPr>
             </a:pPr>
             <a:r>
@@ -7913,8 +8487,9 @@
               </a:spcAft>
               <a:defRPr sz="900">
                 <a:solidFill>
-                  <a:srgbClr val="1E293B"/>
-                </a:solidFill>
+                  <a:srgbClr val="1A1A1A"/>
+                </a:solidFill>
+                <a:latin typeface="Raleway"/>
               </a:defRPr>
             </a:pPr>
             <a:r>
@@ -7928,8 +8503,9 @@
               </a:spcAft>
               <a:defRPr sz="900">
                 <a:solidFill>
-                  <a:srgbClr val="1E293B"/>
-                </a:solidFill>
+                  <a:srgbClr val="1A1A1A"/>
+                </a:solidFill>
+                <a:latin typeface="Raleway"/>
               </a:defRPr>
             </a:pPr>
             <a:r>
@@ -7943,8 +8519,9 @@
               </a:spcAft>
               <a:defRPr sz="900">
                 <a:solidFill>
-                  <a:srgbClr val="1E293B"/>
-                </a:solidFill>
+                  <a:srgbClr val="1A1A1A"/>
+                </a:solidFill>
+                <a:latin typeface="Raleway"/>
               </a:defRPr>
             </a:pPr>
             <a:r>
@@ -7958,8 +8535,9 @@
               </a:spcAft>
               <a:defRPr sz="900">
                 <a:solidFill>
-                  <a:srgbClr val="1E293B"/>
-                </a:solidFill>
+                  <a:srgbClr val="1A1A1A"/>
+                </a:solidFill>
+                <a:latin typeface="Raleway"/>
               </a:defRPr>
             </a:pPr>
             <a:r>
@@ -7973,8 +8551,9 @@
               </a:spcAft>
               <a:defRPr sz="900">
                 <a:solidFill>
-                  <a:srgbClr val="1E293B"/>
-                </a:solidFill>
+                  <a:srgbClr val="1A1A1A"/>
+                </a:solidFill>
+                <a:latin typeface="Raleway"/>
               </a:defRPr>
             </a:pPr>
             <a:r>
@@ -7985,14 +8564,14 @@
       </p:sp>
       <p:sp>
         <p:nvSpPr>
-          <p:cNvPr id="7" name="Rounded Rectangle 6"/>
+          <p:cNvPr id="10" name="Rounded Rectangle 9"/>
           <p:cNvSpPr/>
           <p:nvPr/>
         </p:nvSpPr>
         <p:spPr>
           <a:xfrm>
-            <a:off x="731520" y="4069080"/>
-            <a:ext cx="5202936" cy="2377440"/>
+            <a:off x="6254496" y="1536192"/>
+            <a:ext cx="5202936" cy="2331720"/>
           </a:xfrm>
           <a:prstGeom prst="roundRect">
             <a:avLst/>
@@ -8002,7 +8581,7 @@
           </a:solidFill>
           <a:ln w="15240">
             <a:solidFill>
-              <a:srgbClr val="E2E8F0"/>
+              <a:srgbClr val="D8D8D8"/>
             </a:solidFill>
           </a:ln>
         </p:spPr>
@@ -8030,20 +8609,20 @@
       </p:sp>
       <p:sp>
         <p:nvSpPr>
-          <p:cNvPr id="8" name="Rectangle 7"/>
+          <p:cNvPr id="11" name="Rectangle 10"/>
           <p:cNvSpPr/>
           <p:nvPr/>
         </p:nvSpPr>
         <p:spPr>
           <a:xfrm>
-            <a:off x="896112" y="4197096"/>
+            <a:off x="6419088" y="1664208"/>
             <a:ext cx="1097280" cy="45720"/>
           </a:xfrm>
           <a:prstGeom prst="rect">
             <a:avLst/>
           </a:prstGeom>
           <a:solidFill>
-            <a:srgbClr val="16A34A"/>
+            <a:srgbClr val="509546"/>
           </a:solidFill>
           <a:ln>
             <a:noFill/>
@@ -8073,14 +8652,14 @@
       </p:sp>
       <p:sp>
         <p:nvSpPr>
-          <p:cNvPr id="9" name="TextBox 8"/>
+          <p:cNvPr id="12" name="TextBox 11"/>
           <p:cNvSpPr txBox="1"/>
           <p:nvPr/>
         </p:nvSpPr>
         <p:spPr>
           <a:xfrm>
-            <a:off x="896112" y="4288536"/>
-            <a:ext cx="4873752" cy="2103120"/>
+            <a:off x="6419088" y="1755648"/>
+            <a:ext cx="4873752" cy="2057400"/>
           </a:xfrm>
           <a:prstGeom prst="rect">
             <a:avLst/>
@@ -8096,12 +8675,13 @@
             <a:pPr>
               <a:defRPr sz="850" b="1">
                 <a:solidFill>
-                  <a:srgbClr val="16A34A"/>
-                </a:solidFill>
-              </a:defRPr>
-            </a:pPr>
-            <a:r>
-              <a:t>PAINEL DE DEMANDAS NO PAPERCLIP</a:t>
+                  <a:srgbClr val="509546"/>
+                </a:solidFill>
+                <a:latin typeface="Raleway"/>
+              </a:defRPr>
+            </a:pPr>
+            <a:r>
+              <a:t>DEMANDA SANASA • OS 2026/2652</a:t>
             </a:r>
           </a:p>
           <a:p>
@@ -8111,107 +8691,104 @@
               </a:spcAft>
               <a:defRPr sz="1300" b="1">
                 <a:solidFill>
-                  <a:srgbClr val="0F172A"/>
-                </a:solidFill>
-              </a:defRPr>
-            </a:pPr>
-            <a:r>
-              <a:t>33 Tarefas Registradas</a:t>
-            </a:r>
-          </a:p>
-          <a:p>
-            <a:pPr>
-              <a:defRPr sz="950" b="1">
-                <a:solidFill>
-                  <a:srgbClr val="16A34A"/>
-                </a:solidFill>
-              </a:defRPr>
-            </a:pPr>
-            <a:r>
-              <a:t>✔ 15 Concluídas (45.5%):</a:t>
-            </a:r>
-          </a:p>
-          <a:p>
-            <a:pPr>
-              <a:spcAft>
-                <a:spcPts val="300"/>
+                  <a:srgbClr val="1A1A1A"/>
+                </a:solidFill>
+                <a:latin typeface="Raleway"/>
+              </a:defRPr>
+            </a:pPr>
+            <a:r>
+              <a:t>Entregáveis da Demanda RF046/RF047</a:t>
+            </a:r>
+          </a:p>
+          <a:p>
+            <a:pPr>
+              <a:spcAft>
+                <a:spcPts val="200"/>
               </a:spcAft>
               <a:defRPr sz="900">
                 <a:solidFill>
-                  <a:srgbClr val="1E293B"/>
-                </a:solidFill>
-              </a:defRPr>
-            </a:pPr>
-            <a:r>
-              <a:t>Especificações TestLink, BPMNs e planilhas de divergência de 5 OSs (RF002, RF027, RF043, RF050 e RF058/RF061).</a:t>
-            </a:r>
-          </a:p>
-          <a:p>
-            <a:pPr>
-              <a:defRPr sz="950" b="1">
-                <a:solidFill>
-                  <a:srgbClr val="EA580C"/>
-                </a:solidFill>
-              </a:defRPr>
-            </a:pPr>
-            <a:r>
-              <a:t>⛔ 6 Bloqueadas (18.2%):</a:t>
-            </a:r>
-          </a:p>
-          <a:p>
-            <a:pPr>
-              <a:spcAft>
-                <a:spcPts val="300"/>
+                  <a:srgbClr val="1A1A1A"/>
+                </a:solidFill>
+                <a:latin typeface="Raleway"/>
+              </a:defRPr>
+            </a:pPr>
+            <a:r>
+              <a:t>📄 RF046-RF047-Julgamento-Desclassificacao.bpmn: Modelagem BPMN 2.0 formal de regras e saneamento.</a:t>
+            </a:r>
+          </a:p>
+          <a:p>
+            <a:pPr>
+              <a:spcAft>
+                <a:spcPts val="200"/>
               </a:spcAft>
               <a:defRPr sz="900">
                 <a:solidFill>
-                  <a:srgbClr val="1E293B"/>
-                </a:solidFill>
-              </a:defRPr>
-            </a:pPr>
-            <a:r>
-              <a:t>Impedimento por falta de credenciais externas/homologação SANASA (ex.: XTE-18 execução CS-01..10, XTE-16, XTE-23).</a:t>
-            </a:r>
-          </a:p>
-          <a:p>
-            <a:pPr>
-              <a:defRPr sz="950" b="1">
-                <a:solidFill>
-                  <a:srgbClr val="2563EB"/>
-                </a:solidFill>
-              </a:defRPr>
-            </a:pPr>
-            <a:r>
-              <a:t>⏳ 12 Em Revisão / Backlog (36.3%):</a:t>
-            </a:r>
-          </a:p>
-          <a:p>
-            <a:pPr>
-              <a:spcAft>
-                <a:spcPts val="300"/>
+                  <a:srgbClr val="1A1A1A"/>
+                </a:solidFill>
+                <a:latin typeface="Raleway"/>
+              </a:defRPr>
+            </a:pPr>
+            <a:r>
+              <a:t>📄 RF046-RF047-Documentacao-BPMN.md: Documentação técnica completa e conformidade com Lei 14.133.</a:t>
+            </a:r>
+          </a:p>
+          <a:p>
+            <a:pPr>
+              <a:spcAft>
+                <a:spcPts val="200"/>
               </a:spcAft>
               <a:defRPr sz="900">
                 <a:solidFill>
-                  <a:srgbClr val="1E293B"/>
-                </a:solidFill>
-              </a:defRPr>
-            </a:pPr>
-            <a:r>
-              <a:t>Validações técnicas de artefatos, automação de conectores e saneamento de regras da Fase 1.</a:t>
-            </a:r>
-          </a:p>
-        </p:txBody>
-      </p:sp>
-      <p:sp>
-        <p:nvSpPr>
-          <p:cNvPr id="10" name="Rounded Rectangle 9"/>
+                  <a:srgbClr val="1A1A1A"/>
+                </a:solidFill>
+                <a:latin typeface="Raleway"/>
+              </a:defRPr>
+            </a:pPr>
+            <a:r>
+              <a:t>📄 RF046-RF047-Suite-Testes-TestLink.xml: Suíte padronizada com 15 casos estruturados (SANASAPV2-71..85).</a:t>
+            </a:r>
+          </a:p>
+          <a:p>
+            <a:pPr>
+              <a:spcAft>
+                <a:spcPts val="200"/>
+              </a:spcAft>
+              <a:defRPr sz="900">
+                <a:solidFill>
+                  <a:srgbClr val="1A1A1A"/>
+                </a:solidFill>
+                <a:latin typeface="Raleway"/>
+              </a:defRPr>
+            </a:pPr>
+            <a:r>
+              <a:t>📄 RF046-RF047-Planilha-Divergencia-SANASA.csv: Matriz de conferência com 27 requisitos avaliados.</a:t>
+            </a:r>
+          </a:p>
+          <a:p>
+            <a:pPr>
+              <a:defRPr sz="850" u="sng">
+                <a:solidFill>
+                  <a:srgbClr val="38761D"/>
+                </a:solidFill>
+                <a:latin typeface="Raleway"/>
+              </a:defRPr>
+            </a:pPr>
+            <a:r>
+              <a:t>🔗 Artefatos versionados no repositório GitHub (openclaw-x-integration)</a:t>
+            </a:r>
+          </a:p>
+        </p:txBody>
+      </p:sp>
+      <p:sp>
+        <p:nvSpPr>
+          <p:cNvPr id="13" name="Rounded Rectangle 12"/>
           <p:cNvSpPr/>
           <p:nvPr/>
         </p:nvSpPr>
         <p:spPr>
           <a:xfrm>
-            <a:off x="6254496" y="1508760"/>
-            <a:ext cx="5202936" cy="2377440"/>
+            <a:off x="731520" y="4005072"/>
+            <a:ext cx="5202936" cy="2331720"/>
           </a:xfrm>
           <a:prstGeom prst="roundRect">
             <a:avLst/>
@@ -8221,7 +8798,7 @@
           </a:solidFill>
           <a:ln w="15240">
             <a:solidFill>
-              <a:srgbClr val="E2E8F0"/>
+              <a:srgbClr val="D8D8D8"/>
             </a:solidFill>
           </a:ln>
         </p:spPr>
@@ -8249,20 +8826,20 @@
       </p:sp>
       <p:sp>
         <p:nvSpPr>
-          <p:cNvPr id="11" name="Rectangle 10"/>
+          <p:cNvPr id="14" name="Rectangle 13"/>
           <p:cNvSpPr/>
           <p:nvPr/>
         </p:nvSpPr>
         <p:spPr>
           <a:xfrm>
-            <a:off x="6419088" y="1636776"/>
+            <a:off x="896112" y="4133088"/>
             <a:ext cx="1097280" cy="45720"/>
           </a:xfrm>
           <a:prstGeom prst="rect">
             <a:avLst/>
           </a:prstGeom>
           <a:solidFill>
-            <a:srgbClr val="0D9488"/>
+            <a:srgbClr val="274E13"/>
           </a:solidFill>
           <a:ln>
             <a:noFill/>
@@ -8292,14 +8869,14 @@
       </p:sp>
       <p:sp>
         <p:nvSpPr>
-          <p:cNvPr id="12" name="TextBox 11"/>
+          <p:cNvPr id="15" name="TextBox 14"/>
           <p:cNvSpPr txBox="1"/>
           <p:nvPr/>
         </p:nvSpPr>
         <p:spPr>
           <a:xfrm>
-            <a:off x="6419088" y="1728216"/>
-            <a:ext cx="4873752" cy="2103120"/>
+            <a:off x="896112" y="4224528"/>
+            <a:ext cx="4873752" cy="2057400"/>
           </a:xfrm>
           <a:prstGeom prst="rect">
             <a:avLst/>
@@ -8315,12 +8892,13 @@
             <a:pPr>
               <a:defRPr sz="850" b="1">
                 <a:solidFill>
-                  <a:srgbClr val="0D9488"/>
-                </a:solidFill>
-              </a:defRPr>
-            </a:pPr>
-            <a:r>
-              <a:t>DEMANDA SANASA • OS 2026/2652</a:t>
+                  <a:srgbClr val="274E13"/>
+                </a:solidFill>
+                <a:latin typeface="Raleway"/>
+              </a:defRPr>
+            </a:pPr>
+            <a:r>
+              <a:t>PAINEL DE DEMANDAS NO PAPERCLIP</a:t>
             </a:r>
           </a:p>
           <a:p>
@@ -8330,98 +8908,114 @@
               </a:spcAft>
               <a:defRPr sz="1300" b="1">
                 <a:solidFill>
-                  <a:srgbClr val="0F172A"/>
-                </a:solidFill>
-              </a:defRPr>
-            </a:pPr>
-            <a:r>
-              <a:t>Entregáveis da Demanda RF046/RF047</a:t>
-            </a:r>
-          </a:p>
-          <a:p>
-            <a:pPr>
-              <a:spcAft>
-                <a:spcPts val="200"/>
+                  <a:srgbClr val="1A1A1A"/>
+                </a:solidFill>
+                <a:latin typeface="Raleway"/>
+              </a:defRPr>
+            </a:pPr>
+            <a:r>
+              <a:t>33 Tarefas Registradas</a:t>
+            </a:r>
+          </a:p>
+          <a:p>
+            <a:pPr>
+              <a:defRPr sz="950" b="1">
+                <a:solidFill>
+                  <a:srgbClr val="38761D"/>
+                </a:solidFill>
+                <a:latin typeface="Raleway"/>
+              </a:defRPr>
+            </a:pPr>
+            <a:r>
+              <a:t>✔ 15 Concluídas (45.5%):</a:t>
+            </a:r>
+          </a:p>
+          <a:p>
+            <a:pPr>
+              <a:spcAft>
+                <a:spcPts val="300"/>
               </a:spcAft>
               <a:defRPr sz="900">
                 <a:solidFill>
-                  <a:srgbClr val="1E293B"/>
-                </a:solidFill>
-              </a:defRPr>
-            </a:pPr>
-            <a:r>
-              <a:t>📄 RF046-RF047-Julgamento-Desclassificacao.bpmn: Modelagem BPMN 2.0 formal de regras e saneamento.</a:t>
-            </a:r>
-          </a:p>
-          <a:p>
-            <a:pPr>
-              <a:spcAft>
-                <a:spcPts val="200"/>
+                  <a:srgbClr val="1A1A1A"/>
+                </a:solidFill>
+                <a:latin typeface="Raleway"/>
+              </a:defRPr>
+            </a:pPr>
+            <a:r>
+              <a:t>Especificações TestLink, BPMNs e planilhas de divergência de 5 OSs (RF002, RF027, RF043, RF050 e RF058/RF061).</a:t>
+            </a:r>
+          </a:p>
+          <a:p>
+            <a:pPr>
+              <a:defRPr sz="950" b="1">
+                <a:solidFill>
+                  <a:srgbClr val="FF5722"/>
+                </a:solidFill>
+                <a:latin typeface="Raleway"/>
+              </a:defRPr>
+            </a:pPr>
+            <a:r>
+              <a:t>⛔ 6 Bloqueadas (18.2%):</a:t>
+            </a:r>
+          </a:p>
+          <a:p>
+            <a:pPr>
+              <a:spcAft>
+                <a:spcPts val="300"/>
               </a:spcAft>
               <a:defRPr sz="900">
                 <a:solidFill>
-                  <a:srgbClr val="1E293B"/>
-                </a:solidFill>
-              </a:defRPr>
-            </a:pPr>
-            <a:r>
-              <a:t>📄 RF046-RF047-Documentacao-BPMN.md: Documentação técnica completa e conformidade com Lei 14.133.</a:t>
-            </a:r>
-          </a:p>
-          <a:p>
-            <a:pPr>
-              <a:spcAft>
-                <a:spcPts val="200"/>
+                  <a:srgbClr val="1A1A1A"/>
+                </a:solidFill>
+                <a:latin typeface="Raleway"/>
+              </a:defRPr>
+            </a:pPr>
+            <a:r>
+              <a:t>Impedimento por falta de credenciais externas/homologação SANASA (ex.: XTE-18 execução CS-01..10, XTE-16, XTE-23).</a:t>
+            </a:r>
+          </a:p>
+          <a:p>
+            <a:pPr>
+              <a:defRPr sz="950" b="1">
+                <a:solidFill>
+                  <a:srgbClr val="156082"/>
+                </a:solidFill>
+                <a:latin typeface="Raleway"/>
+              </a:defRPr>
+            </a:pPr>
+            <a:r>
+              <a:t>⏳ 12 Em Revisão / Backlog (36.3%):</a:t>
+            </a:r>
+          </a:p>
+          <a:p>
+            <a:pPr>
+              <a:spcAft>
+                <a:spcPts val="300"/>
               </a:spcAft>
               <a:defRPr sz="900">
                 <a:solidFill>
-                  <a:srgbClr val="1E293B"/>
-                </a:solidFill>
-              </a:defRPr>
-            </a:pPr>
-            <a:r>
-              <a:t>📄 RF046-RF047-Suite-Testes-TestLink.xml: Suíte padronizada com 15 casos estruturados (SANASAPV2-71..85).</a:t>
-            </a:r>
-          </a:p>
-          <a:p>
-            <a:pPr>
-              <a:spcAft>
-                <a:spcPts val="200"/>
-              </a:spcAft>
-              <a:defRPr sz="900">
-                <a:solidFill>
-                  <a:srgbClr val="1E293B"/>
-                </a:solidFill>
-              </a:defRPr>
-            </a:pPr>
-            <a:r>
-              <a:t>📄 RF046-RF047-Planilha-Divergencia-SANASA.csv: Matriz de conferência com 27 requisitos avaliados.</a:t>
-            </a:r>
-          </a:p>
-          <a:p>
-            <a:pPr>
-              <a:defRPr sz="850" u="sng">
-                <a:solidFill>
-                  <a:srgbClr val="2563EB"/>
-                </a:solidFill>
-              </a:defRPr>
-            </a:pPr>
-            <a:r>
-              <a:t>🔗 Artefatos versionados no repositório GitHub (openclaw-x-integration)</a:t>
-            </a:r>
-          </a:p>
-        </p:txBody>
-      </p:sp>
-      <p:sp>
-        <p:nvSpPr>
-          <p:cNvPr id="13" name="Rounded Rectangle 12"/>
+                  <a:srgbClr val="1A1A1A"/>
+                </a:solidFill>
+                <a:latin typeface="Raleway"/>
+              </a:defRPr>
+            </a:pPr>
+            <a:r>
+              <a:t>Validações técnicas de artefatos, automação de conectores e saneamento de regras da Fase 1.</a:t>
+            </a:r>
+          </a:p>
+        </p:txBody>
+      </p:sp>
+      <p:sp>
+        <p:nvSpPr>
+          <p:cNvPr id="16" name="Rounded Rectangle 15"/>
           <p:cNvSpPr/>
           <p:nvPr/>
         </p:nvSpPr>
         <p:spPr>
           <a:xfrm>
-            <a:off x="6254496" y="4069080"/>
-            <a:ext cx="5202936" cy="2377440"/>
+            <a:off x="6254496" y="4005072"/>
+            <a:ext cx="5202936" cy="2331720"/>
           </a:xfrm>
           <a:prstGeom prst="roundRect">
             <a:avLst/>
@@ -8431,7 +9025,7 @@
           </a:solidFill>
           <a:ln w="15240">
             <a:solidFill>
-              <a:srgbClr val="E2E8F0"/>
+              <a:srgbClr val="D8D8D8"/>
             </a:solidFill>
           </a:ln>
         </p:spPr>
@@ -8459,20 +9053,20 @@
       </p:sp>
       <p:sp>
         <p:nvSpPr>
-          <p:cNvPr id="14" name="Rectangle 13"/>
+          <p:cNvPr id="17" name="Rectangle 16"/>
           <p:cNvSpPr/>
           <p:nvPr/>
         </p:nvSpPr>
         <p:spPr>
           <a:xfrm>
-            <a:off x="6419088" y="4197096"/>
+            <a:off x="6419088" y="4133088"/>
             <a:ext cx="1097280" cy="45720"/>
           </a:xfrm>
           <a:prstGeom prst="rect">
             <a:avLst/>
           </a:prstGeom>
           <a:solidFill>
-            <a:srgbClr val="EA580C"/>
+            <a:srgbClr val="FF5722"/>
           </a:solidFill>
           <a:ln>
             <a:noFill/>
@@ -8502,14 +9096,14 @@
       </p:sp>
       <p:sp>
         <p:nvSpPr>
-          <p:cNvPr id="15" name="TextBox 14"/>
+          <p:cNvPr id="18" name="TextBox 17"/>
           <p:cNvSpPr txBox="1"/>
           <p:nvPr/>
         </p:nvSpPr>
         <p:spPr>
           <a:xfrm>
-            <a:off x="6419088" y="4288536"/>
-            <a:ext cx="4873752" cy="2103120"/>
+            <a:off x="6419088" y="4224528"/>
+            <a:ext cx="4873752" cy="2057400"/>
           </a:xfrm>
           <a:prstGeom prst="rect">
             <a:avLst/>
@@ -8525,8 +9119,9 @@
             <a:pPr>
               <a:defRPr sz="850" b="1">
                 <a:solidFill>
-                  <a:srgbClr val="EA580C"/>
-                </a:solidFill>
+                  <a:srgbClr val="FF5722"/>
+                </a:solidFill>
+                <a:latin typeface="Raleway"/>
               </a:defRPr>
             </a:pPr>
             <a:r>
@@ -8540,8 +9135,9 @@
               </a:spcAft>
               <a:defRPr sz="1300" b="1">
                 <a:solidFill>
-                  <a:srgbClr val="0F172A"/>
-                </a:solidFill>
+                  <a:srgbClr val="1A1A1A"/>
+                </a:solidFill>
+                <a:latin typeface="Raleway"/>
               </a:defRPr>
             </a:pPr>
             <a:r>
@@ -8552,8 +9148,9 @@
             <a:pPr>
               <a:defRPr sz="950" b="1">
                 <a:solidFill>
-                  <a:srgbClr val="0F172A"/>
-                </a:solidFill>
+                  <a:srgbClr val="1A1A1A"/>
+                </a:solidFill>
+                <a:latin typeface="Raleway"/>
               </a:defRPr>
             </a:pPr>
             <a:r>
@@ -8567,8 +9164,9 @@
               </a:spcAft>
               <a:defRPr sz="900">
                 <a:solidFill>
-                  <a:srgbClr val="1E293B"/>
-                </a:solidFill>
+                  <a:srgbClr val="1A1A1A"/>
+                </a:solidFill>
+                <a:latin typeface="Raleway"/>
               </a:defRPr>
             </a:pPr>
             <a:r>
@@ -8579,8 +9177,9 @@
             <a:pPr>
               <a:defRPr sz="950" b="1">
                 <a:solidFill>
-                  <a:srgbClr val="0F172A"/>
-                </a:solidFill>
+                  <a:srgbClr val="1A1A1A"/>
+                </a:solidFill>
+                <a:latin typeface="Raleway"/>
               </a:defRPr>
             </a:pPr>
             <a:r>
@@ -8594,8 +9193,9 @@
               </a:spcAft>
               <a:defRPr sz="900">
                 <a:solidFill>
-                  <a:srgbClr val="1E293B"/>
-                </a:solidFill>
+                  <a:srgbClr val="1A1A1A"/>
+                </a:solidFill>
+                <a:latin typeface="Raleway"/>
               </a:defRPr>
             </a:pPr>
             <a:r>
@@ -8637,7 +9237,7 @@
             <a:avLst/>
           </a:prstGeom>
           <a:solidFill>
-            <a:srgbClr val="F8FAFC"/>
+            <a:srgbClr val="F8FAF8"/>
           </a:solidFill>
           <a:ln>
             <a:noFill/>
@@ -8667,84 +9267,23 @@
       </p:sp>
       <p:sp>
         <p:nvSpPr>
-          <p:cNvPr id="3" name="TextBox 2"/>
-          <p:cNvSpPr txBox="1"/>
-          <p:nvPr/>
-        </p:nvSpPr>
-        <p:spPr>
-          <a:xfrm>
-            <a:off x="731520" y="411480"/>
-            <a:ext cx="10698480" cy="1005840"/>
-          </a:xfrm>
-          <a:prstGeom prst="rect">
-            <a:avLst/>
-          </a:prstGeom>
-          <a:noFill/>
-        </p:spPr>
-        <p:txBody>
-          <a:bodyPr wrap="square">
-            <a:spAutoFit/>
-          </a:bodyPr>
-          <a:lstStyle/>
-          <a:p>
-            <a:pPr>
-              <a:defRPr sz="1100" b="1">
-                <a:solidFill>
-                  <a:srgbClr val="2563EB"/>
-                </a:solidFill>
-              </a:defRPr>
-            </a:pPr>
-            <a:r>
-              <a:t>PROJETO QAI • PLANEJAMENTO &amp; GOVERNANÇA AGÊNTICA</a:t>
-            </a:r>
-          </a:p>
-          <a:p>
-            <a:pPr>
-              <a:defRPr sz="2400" b="1">
-                <a:solidFill>
-                  <a:srgbClr val="0F172A"/>
-                </a:solidFill>
-              </a:defRPr>
-            </a:pPr>
-            <a:r>
-              <a:t>Próximas Tarefas</a:t>
-            </a:r>
-          </a:p>
-          <a:p>
-            <a:pPr>
-              <a:defRPr sz="1100">
-                <a:solidFill>
-                  <a:srgbClr val="64748B"/>
-                </a:solidFill>
-              </a:defRPr>
-            </a:pPr>
-            <a:r>
-              <a:t>Mapeamento Operacional, Skills de Compliance Regulatório e Prontidão para Auditoria de IA</a:t>
-            </a:r>
-          </a:p>
-        </p:txBody>
-      </p:sp>
-      <p:sp>
-        <p:nvSpPr>
-          <p:cNvPr id="4" name="Rounded Rectangle 3"/>
+          <p:cNvPr id="3" name="Rectangle 2"/>
           <p:cNvSpPr/>
           <p:nvPr/>
         </p:nvSpPr>
         <p:spPr>
           <a:xfrm>
-            <a:off x="731520" y="1554480"/>
-            <a:ext cx="3328416" cy="4754880"/>
-          </a:xfrm>
-          <a:prstGeom prst="roundRect">
+            <a:off x="0" y="0"/>
+            <a:ext cx="12191695" cy="73152"/>
+          </a:xfrm>
+          <a:prstGeom prst="rect">
             <a:avLst/>
           </a:prstGeom>
           <a:solidFill>
-            <a:srgbClr val="FFFFFF"/>
+            <a:srgbClr val="38761D"/>
           </a:solidFill>
-          <a:ln w="19050">
-            <a:solidFill>
-              <a:srgbClr val="E2E8F0"/>
-            </a:solidFill>
+          <a:ln>
+            <a:noFill/>
           </a:ln>
         </p:spPr>
         <p:style>
@@ -8771,23 +9310,147 @@
       </p:sp>
       <p:sp>
         <p:nvSpPr>
-          <p:cNvPr id="5" name="Rectangle 4"/>
+          <p:cNvPr id="4" name="TextBox 3"/>
+          <p:cNvSpPr txBox="1"/>
+          <p:nvPr/>
+        </p:nvSpPr>
+        <p:spPr>
+          <a:xfrm>
+            <a:off x="731520" y="365760"/>
+            <a:ext cx="8686800" cy="1051560"/>
+          </a:xfrm>
+          <a:prstGeom prst="rect">
+            <a:avLst/>
+          </a:prstGeom>
+          <a:noFill/>
+        </p:spPr>
+        <p:txBody>
+          <a:bodyPr wrap="square" lIns="0" tIns="0" rIns="0" bIns="0">
+            <a:spAutoFit/>
+          </a:bodyPr>
+          <a:lstStyle/>
+          <a:p>
+            <a:pPr>
+              <a:defRPr sz="1000" b="1">
+                <a:solidFill>
+                  <a:srgbClr val="FF5722"/>
+                </a:solidFill>
+                <a:latin typeface="Raleway"/>
+              </a:defRPr>
+            </a:pPr>
+            <a:r>
+              <a:t>05 / PLANEJAMENTO &amp; GOVERNANÇA</a:t>
+            </a:r>
+          </a:p>
+          <a:p>
+            <a:pPr>
+              <a:defRPr sz="2200" b="1">
+                <a:solidFill>
+                  <a:srgbClr val="1A1A1A"/>
+                </a:solidFill>
+                <a:latin typeface="Raleway"/>
+              </a:defRPr>
+            </a:pPr>
+            <a:r>
+              <a:t>Próximas Tarefas</a:t>
+            </a:r>
+          </a:p>
+          <a:p>
+            <a:pPr>
+              <a:defRPr sz="1100">
+                <a:solidFill>
+                  <a:srgbClr val="7F7F7F"/>
+                </a:solidFill>
+                <a:latin typeface="Raleway"/>
+              </a:defRPr>
+            </a:pPr>
+            <a:r>
+              <a:t>Mapeamento Operacional, Skills de Compliance Regulatório e Prontidão para Auditoria de IA</a:t>
+            </a:r>
+          </a:p>
+        </p:txBody>
+      </p:sp>
+      <p:pic>
+        <p:nvPicPr>
+          <p:cNvPr id="5" name="Picture 4" descr="image2.png"/>
+          <p:cNvPicPr>
+            <a:picLocks noChangeAspect="1"/>
+          </p:cNvPicPr>
+          <p:nvPr/>
+        </p:nvPicPr>
+        <p:blipFill>
+          <a:blip r:embed="rId2"/>
+          <a:stretch>
+            <a:fillRect/>
+          </a:stretch>
+        </p:blipFill>
+        <p:spPr>
+          <a:xfrm>
+            <a:off x="9875520" y="365760"/>
+            <a:ext cx="1600200" cy="869674"/>
+          </a:xfrm>
+          <a:prstGeom prst="rect">
+            <a:avLst/>
+          </a:prstGeom>
+        </p:spPr>
+      </p:pic>
+      <p:sp>
+        <p:nvSpPr>
+          <p:cNvPr id="6" name="TextBox 5"/>
+          <p:cNvSpPr txBox="1"/>
+          <p:nvPr/>
+        </p:nvSpPr>
+        <p:spPr>
+          <a:xfrm>
+            <a:off x="731520" y="6446520"/>
+            <a:ext cx="10728655" cy="320040"/>
+          </a:xfrm>
+          <a:prstGeom prst="rect">
+            <a:avLst/>
+          </a:prstGeom>
+          <a:noFill/>
+        </p:spPr>
+        <p:txBody>
+          <a:bodyPr wrap="none" lIns="0" tIns="0" rIns="0" bIns="0">
+            <a:spAutoFit/>
+          </a:bodyPr>
+          <a:lstStyle/>
+          <a:p>
+            <a:pPr>
+              <a:defRPr sz="800" b="1">
+                <a:solidFill>
+                  <a:srgbClr val="A0A0A0"/>
+                </a:solidFill>
+                <a:latin typeface="Raleway"/>
+              </a:defRPr>
+            </a:pPr>
+            <a:r>
+              <a:t>PROJETO QAI • FÁBRICA DE TESTES X-TESTING  |  ESTEIRA DE QUALIDADE &amp; SANASA  |  WWW.XTESTING.COM.BR</a:t>
+            </a:r>
+          </a:p>
+        </p:txBody>
+      </p:sp>
+      <p:sp>
+        <p:nvSpPr>
+          <p:cNvPr id="7" name="Rounded Rectangle 6"/>
           <p:cNvSpPr/>
           <p:nvPr/>
         </p:nvSpPr>
         <p:spPr>
           <a:xfrm>
-            <a:off x="914400" y="1719072"/>
-            <a:ext cx="1097280" cy="54864"/>
-          </a:xfrm>
-          <a:prstGeom prst="rect">
+            <a:off x="731520" y="1600200"/>
+            <a:ext cx="3328416" cy="4663440"/>
+          </a:xfrm>
+          <a:prstGeom prst="roundRect">
             <a:avLst/>
           </a:prstGeom>
           <a:solidFill>
-            <a:srgbClr val="EA580C"/>
+            <a:srgbClr val="FFFFFF"/>
           </a:solidFill>
-          <a:ln>
-            <a:noFill/>
+          <a:ln w="15240">
+            <a:solidFill>
+              <a:srgbClr val="D8D8D8"/>
+            </a:solidFill>
           </a:ln>
         </p:spPr>
         <p:style>
@@ -8814,180 +9477,23 @@
       </p:sp>
       <p:sp>
         <p:nvSpPr>
-          <p:cNvPr id="6" name="TextBox 5"/>
-          <p:cNvSpPr txBox="1"/>
-          <p:nvPr/>
-        </p:nvSpPr>
-        <p:spPr>
-          <a:xfrm>
-            <a:off x="914400" y="1847088"/>
-            <a:ext cx="2962656" cy="4343400"/>
-          </a:xfrm>
-          <a:prstGeom prst="rect">
-            <a:avLst/>
-          </a:prstGeom>
-          <a:noFill/>
-        </p:spPr>
-        <p:txBody>
-          <a:bodyPr wrap="square">
-            <a:spAutoFit/>
-          </a:bodyPr>
-          <a:lstStyle/>
-          <a:p>
-            <a:pPr>
-              <a:defRPr sz="850" b="1">
-                <a:solidFill>
-                  <a:srgbClr val="EA580C"/>
-                </a:solidFill>
-              </a:defRPr>
-            </a:pPr>
-            <a:r>
-              <a:t>ALINHAMENTO OPERACIONAL</a:t>
-            </a:r>
-          </a:p>
-          <a:p>
-            <a:pPr>
-              <a:spcAft>
-                <a:spcPts val="200"/>
-              </a:spcAft>
-              <a:defRPr sz="1400" b="1">
-                <a:solidFill>
-                  <a:srgbClr val="0F172A"/>
-                </a:solidFill>
-              </a:defRPr>
-            </a:pPr>
-            <a:r>
-              <a:t>Detalhamento do Fluxo X-Testing</a:t>
-            </a:r>
-          </a:p>
-          <a:p>
-            <a:pPr>
-              <a:spcAft>
-                <a:spcPts val="1000"/>
-              </a:spcAft>
-              <a:defRPr sz="850" b="1">
-                <a:solidFill>
-                  <a:srgbClr val="64748B"/>
-                </a:solidFill>
-              </a:defRPr>
-            </a:pPr>
-            <a:r>
-              <a:t>Imersão e Diagnóstico da Esteira Atual</a:t>
-            </a:r>
-          </a:p>
-          <a:p>
-            <a:pPr>
-              <a:spcAft>
-                <a:spcPts val="600"/>
-              </a:spcAft>
-              <a:defRPr sz="900">
-                <a:solidFill>
-                  <a:srgbClr val="1E293B"/>
-                </a:solidFill>
-              </a:defRPr>
-            </a:pPr>
-            <a:r>
-              <a:t>•  Reunião técnica com a liderança e equipe da X-Testing.</a:t>
-            </a:r>
-          </a:p>
-          <a:p>
-            <a:pPr>
-              <a:spcAft>
-                <a:spcPts val="600"/>
-              </a:spcAft>
-              <a:defRPr sz="900">
-                <a:solidFill>
-                  <a:srgbClr val="1E293B"/>
-                </a:solidFill>
-              </a:defRPr>
-            </a:pPr>
-            <a:r>
-              <a:t>•  Mapeamento detalhado da esteira atual de testes manuais e rituais operacionais.</a:t>
-            </a:r>
-          </a:p>
-          <a:p>
-            <a:pPr>
-              <a:spcAft>
-                <a:spcPts val="600"/>
-              </a:spcAft>
-              <a:defRPr sz="900">
-                <a:solidFill>
-                  <a:srgbClr val="1E293B"/>
-                </a:solidFill>
-              </a:defRPr>
-            </a:pPr>
-            <a:r>
-              <a:t>•  Levantamento de critérios de aceite, triagem de defeitos e transição para esteira autônoma.</a:t>
-            </a:r>
-          </a:p>
-          <a:p>
-            <a:pPr>
-              <a:spcAft>
-                <a:spcPts val="600"/>
-              </a:spcAft>
-              <a:defRPr sz="900">
-                <a:solidFill>
-                  <a:srgbClr val="1E293B"/>
-                </a:solidFill>
-              </a:defRPr>
-            </a:pPr>
-            <a:r>
-              <a:t>•  Mapeamento de critérios de passagem, geração de massa de teste e homologação.</a:t>
-            </a:r>
-          </a:p>
-          <a:p>
-            <a:pPr>
-              <a:spcAft>
-                <a:spcPts val="600"/>
-              </a:spcAft>
-              <a:defRPr sz="900">
-                <a:solidFill>
-                  <a:srgbClr val="1E293B"/>
-                </a:solidFill>
-              </a:defRPr>
-            </a:pPr>
-            <a:r>
-              <a:t>•  Identificação de gargalos operacionais e pontos de atrito para automação imediata.</a:t>
-            </a:r>
-          </a:p>
-          <a:p>
-            <a:pPr>
-              <a:spcAft>
-                <a:spcPts val="600"/>
-              </a:spcAft>
-              <a:defRPr sz="900">
-                <a:solidFill>
-                  <a:srgbClr val="1E293B"/>
-                </a:solidFill>
-              </a:defRPr>
-            </a:pPr>
-            <a:r>
-              <a:t>•  Definição de interfaces de colaboração entre analistas humanos e agentes de IA.</a:t>
-            </a:r>
-          </a:p>
-        </p:txBody>
-      </p:sp>
-      <p:sp>
-        <p:nvSpPr>
-          <p:cNvPr id="7" name="Rounded Rectangle 6"/>
+          <p:cNvPr id="8" name="Rectangle 7"/>
           <p:cNvSpPr/>
           <p:nvPr/>
         </p:nvSpPr>
         <p:spPr>
           <a:xfrm>
-            <a:off x="4407408" y="1554480"/>
-            <a:ext cx="3328416" cy="4754880"/>
-          </a:xfrm>
-          <a:prstGeom prst="roundRect">
+            <a:off x="914400" y="1764792"/>
+            <a:ext cx="1097280" cy="54864"/>
+          </a:xfrm>
+          <a:prstGeom prst="rect">
             <a:avLst/>
           </a:prstGeom>
           <a:solidFill>
-            <a:srgbClr val="FFFFFF"/>
+            <a:srgbClr val="38761D"/>
           </a:solidFill>
-          <a:ln w="19050">
-            <a:solidFill>
-              <a:srgbClr val="E2E8F0"/>
-            </a:solidFill>
+          <a:ln>
+            <a:noFill/>
           </a:ln>
         </p:spPr>
         <p:style>
@@ -9014,23 +9520,189 @@
       </p:sp>
       <p:sp>
         <p:nvSpPr>
-          <p:cNvPr id="8" name="Rectangle 7"/>
+          <p:cNvPr id="9" name="TextBox 8"/>
+          <p:cNvSpPr txBox="1"/>
+          <p:nvPr/>
+        </p:nvSpPr>
+        <p:spPr>
+          <a:xfrm>
+            <a:off x="914400" y="1892808"/>
+            <a:ext cx="2962656" cy="4251960"/>
+          </a:xfrm>
+          <a:prstGeom prst="rect">
+            <a:avLst/>
+          </a:prstGeom>
+          <a:noFill/>
+        </p:spPr>
+        <p:txBody>
+          <a:bodyPr wrap="square">
+            <a:spAutoFit/>
+          </a:bodyPr>
+          <a:lstStyle/>
+          <a:p>
+            <a:pPr>
+              <a:defRPr sz="850" b="1">
+                <a:solidFill>
+                  <a:srgbClr val="38761D"/>
+                </a:solidFill>
+                <a:latin typeface="Raleway"/>
+              </a:defRPr>
+            </a:pPr>
+            <a:r>
+              <a:t>ALINHAMENTO OPERACIONAL</a:t>
+            </a:r>
+          </a:p>
+          <a:p>
+            <a:pPr>
+              <a:spcAft>
+                <a:spcPts val="200"/>
+              </a:spcAft>
+              <a:defRPr sz="1400" b="1">
+                <a:solidFill>
+                  <a:srgbClr val="1A1A1A"/>
+                </a:solidFill>
+                <a:latin typeface="Raleway"/>
+              </a:defRPr>
+            </a:pPr>
+            <a:r>
+              <a:t>Detalhamento do Fluxo X-Testing</a:t>
+            </a:r>
+          </a:p>
+          <a:p>
+            <a:pPr>
+              <a:spcAft>
+                <a:spcPts val="1000"/>
+              </a:spcAft>
+              <a:defRPr sz="850" b="1">
+                <a:solidFill>
+                  <a:srgbClr val="7F7F7F"/>
+                </a:solidFill>
+                <a:latin typeface="Raleway"/>
+              </a:defRPr>
+            </a:pPr>
+            <a:r>
+              <a:t>Imersão e Diagnóstico da Esteira Atual</a:t>
+            </a:r>
+          </a:p>
+          <a:p>
+            <a:pPr>
+              <a:spcAft>
+                <a:spcPts val="600"/>
+              </a:spcAft>
+              <a:defRPr sz="900">
+                <a:solidFill>
+                  <a:srgbClr val="1A1A1A"/>
+                </a:solidFill>
+                <a:latin typeface="Raleway"/>
+              </a:defRPr>
+            </a:pPr>
+            <a:r>
+              <a:t>•  Reunião técnica com a liderança e equipe da X-Testing.</a:t>
+            </a:r>
+          </a:p>
+          <a:p>
+            <a:pPr>
+              <a:spcAft>
+                <a:spcPts val="600"/>
+              </a:spcAft>
+              <a:defRPr sz="900">
+                <a:solidFill>
+                  <a:srgbClr val="1A1A1A"/>
+                </a:solidFill>
+                <a:latin typeface="Raleway"/>
+              </a:defRPr>
+            </a:pPr>
+            <a:r>
+              <a:t>•  Mapeamento detalhado da esteira atual de testes manuais e rituais operacionais.</a:t>
+            </a:r>
+          </a:p>
+          <a:p>
+            <a:pPr>
+              <a:spcAft>
+                <a:spcPts val="600"/>
+              </a:spcAft>
+              <a:defRPr sz="900">
+                <a:solidFill>
+                  <a:srgbClr val="1A1A1A"/>
+                </a:solidFill>
+                <a:latin typeface="Raleway"/>
+              </a:defRPr>
+            </a:pPr>
+            <a:r>
+              <a:t>•  Levantamento de critérios de aceite, triagem de defeitos e transição para esteira autônoma.</a:t>
+            </a:r>
+          </a:p>
+          <a:p>
+            <a:pPr>
+              <a:spcAft>
+                <a:spcPts val="600"/>
+              </a:spcAft>
+              <a:defRPr sz="900">
+                <a:solidFill>
+                  <a:srgbClr val="1A1A1A"/>
+                </a:solidFill>
+                <a:latin typeface="Raleway"/>
+              </a:defRPr>
+            </a:pPr>
+            <a:r>
+              <a:t>•  Mapeamento de critérios de passagem, geração de massa de teste e homologação.</a:t>
+            </a:r>
+          </a:p>
+          <a:p>
+            <a:pPr>
+              <a:spcAft>
+                <a:spcPts val="600"/>
+              </a:spcAft>
+              <a:defRPr sz="900">
+                <a:solidFill>
+                  <a:srgbClr val="1A1A1A"/>
+                </a:solidFill>
+                <a:latin typeface="Raleway"/>
+              </a:defRPr>
+            </a:pPr>
+            <a:r>
+              <a:t>•  Identificação de gargalos operacionais e pontos de atrito para automação imediata.</a:t>
+            </a:r>
+          </a:p>
+          <a:p>
+            <a:pPr>
+              <a:spcAft>
+                <a:spcPts val="600"/>
+              </a:spcAft>
+              <a:defRPr sz="900">
+                <a:solidFill>
+                  <a:srgbClr val="1A1A1A"/>
+                </a:solidFill>
+                <a:latin typeface="Raleway"/>
+              </a:defRPr>
+            </a:pPr>
+            <a:r>
+              <a:t>•  Definição de interfaces de colaboração entre analistas humanos e agentes de IA.</a:t>
+            </a:r>
+          </a:p>
+        </p:txBody>
+      </p:sp>
+      <p:sp>
+        <p:nvSpPr>
+          <p:cNvPr id="10" name="Rounded Rectangle 9"/>
           <p:cNvSpPr/>
           <p:nvPr/>
         </p:nvSpPr>
         <p:spPr>
           <a:xfrm>
-            <a:off x="4590288" y="1719072"/>
-            <a:ext cx="1097280" cy="54864"/>
-          </a:xfrm>
-          <a:prstGeom prst="rect">
+            <a:off x="4425696" y="1600200"/>
+            <a:ext cx="3328416" cy="4663440"/>
+          </a:xfrm>
+          <a:prstGeom prst="roundRect">
             <a:avLst/>
           </a:prstGeom>
           <a:solidFill>
-            <a:srgbClr val="2563EB"/>
+            <a:srgbClr val="FFFFFF"/>
           </a:solidFill>
-          <a:ln>
-            <a:noFill/>
+          <a:ln w="15240">
+            <a:solidFill>
+              <a:srgbClr val="D8D8D8"/>
+            </a:solidFill>
           </a:ln>
         </p:spPr>
         <p:style>
@@ -9057,165 +9729,23 @@
       </p:sp>
       <p:sp>
         <p:nvSpPr>
-          <p:cNvPr id="9" name="TextBox 8"/>
-          <p:cNvSpPr txBox="1"/>
-          <p:nvPr/>
-        </p:nvSpPr>
-        <p:spPr>
-          <a:xfrm>
-            <a:off x="4590288" y="1847088"/>
-            <a:ext cx="2962656" cy="4343400"/>
-          </a:xfrm>
-          <a:prstGeom prst="rect">
-            <a:avLst/>
-          </a:prstGeom>
-          <a:noFill/>
-        </p:spPr>
-        <p:txBody>
-          <a:bodyPr wrap="square">
-            <a:spAutoFit/>
-          </a:bodyPr>
-          <a:lstStyle/>
-          <a:p>
-            <a:pPr>
-              <a:defRPr sz="850" b="1">
-                <a:solidFill>
-                  <a:srgbClr val="2563EB"/>
-                </a:solidFill>
-              </a:defRPr>
-            </a:pPr>
-            <a:r>
-              <a:t>PRIVACIDADE &amp; SEGURANÇA</a:t>
-            </a:r>
-          </a:p>
-          <a:p>
-            <a:pPr>
-              <a:spcAft>
-                <a:spcPts val="200"/>
-              </a:spcAft>
-              <a:defRPr sz="1400" b="1">
-                <a:solidFill>
-                  <a:srgbClr val="0F172A"/>
-                </a:solidFill>
-              </a:defRPr>
-            </a:pPr>
-            <a:r>
-              <a:t>Skills de Compliance dos Agentes</a:t>
-            </a:r>
-          </a:p>
-          <a:p>
-            <a:pPr>
-              <a:spcAft>
-                <a:spcPts val="1000"/>
-              </a:spcAft>
-              <a:defRPr sz="850" b="1">
-                <a:solidFill>
-                  <a:srgbClr val="64748B"/>
-                </a:solidFill>
-              </a:defRPr>
-            </a:pPr>
-            <a:r>
-              <a:t>LGPD • GDPR • HIPAA • CCPA • SOC 2 • ISO 27001 • PCI-DSS</a:t>
-            </a:r>
-          </a:p>
-          <a:p>
-            <a:pPr>
-              <a:spcAft>
-                <a:spcPts val="600"/>
-              </a:spcAft>
-              <a:defRPr sz="900">
-                <a:solidFill>
-                  <a:srgbClr val="1E293B"/>
-                </a:solidFill>
-              </a:defRPr>
-            </a:pPr>
-            <a:r>
-              <a:t>•  Pesquisa e arquitetura de skills para comportamento seguro dos agentes.</a:t>
-            </a:r>
-          </a:p>
-          <a:p>
-            <a:pPr>
-              <a:spcAft>
-                <a:spcPts val="600"/>
-              </a:spcAft>
-              <a:defRPr sz="900">
-                <a:solidFill>
-                  <a:srgbClr val="1E293B"/>
-                </a:solidFill>
-              </a:defRPr>
-            </a:pPr>
-            <a:r>
-              <a:t>•  Técnicas de Anonimização &amp; Pseudonimização (K2View, Protecto.ai): mascaramento dinâmico, tokenização e hashing irreversível com sal.</a:t>
-            </a:r>
-          </a:p>
-          <a:p>
-            <a:pPr>
-              <a:spcAft>
-                <a:spcPts val="600"/>
-              </a:spcAft>
-              <a:defRPr sz="900">
-                <a:solidFill>
-                  <a:srgbClr val="1E293B"/>
-                </a:solidFill>
-              </a:defRPr>
-            </a:pPr>
-            <a:r>
-              <a:t>•  Diretrizes Oficiais ANPD &amp; UFCA: aplicação dos padrões regulatórios brasileiros para desidentificação de dados.</a:t>
-            </a:r>
-          </a:p>
-          <a:p>
-            <a:pPr>
-              <a:spcAft>
-                <a:spcPts val="600"/>
-              </a:spcAft>
-              <a:defRPr sz="900">
-                <a:solidFill>
-                  <a:srgbClr val="1E293B"/>
-                </a:solidFill>
-              </a:defRPr>
-            </a:pPr>
-            <a:r>
-              <a:t>•  Tarjamento de Evidências (MavenDoc): censura automatizada de PII (CPFs, nomes, valores) em screenshots e PDFs de teste.</a:t>
-            </a:r>
-          </a:p>
-          <a:p>
-            <a:pPr>
-              <a:spcAft>
-                <a:spcPts val="600"/>
-              </a:spcAft>
-              <a:defRPr sz="900">
-                <a:solidFill>
-                  <a:srgbClr val="1E293B"/>
-                </a:solidFill>
-              </a:defRPr>
-            </a:pPr>
-            <a:r>
-              <a:t>•  Coleta Segura &amp; OSINT Ético (OSINT Brasil): higiene de dados para evitar vazamento de credenciais e dados em prompts.</a:t>
-            </a:r>
-          </a:p>
-        </p:txBody>
-      </p:sp>
-      <p:sp>
-        <p:nvSpPr>
-          <p:cNvPr id="10" name="Rounded Rectangle 9"/>
+          <p:cNvPr id="11" name="Rectangle 10"/>
           <p:cNvSpPr/>
           <p:nvPr/>
         </p:nvSpPr>
         <p:spPr>
           <a:xfrm>
-            <a:off x="8083296" y="1554480"/>
-            <a:ext cx="3328416" cy="4754880"/>
-          </a:xfrm>
-          <a:prstGeom prst="roundRect">
+            <a:off x="4608576" y="1764792"/>
+            <a:ext cx="1097280" cy="54864"/>
+          </a:xfrm>
+          <a:prstGeom prst="rect">
             <a:avLst/>
           </a:prstGeom>
           <a:solidFill>
-            <a:srgbClr val="FFFFFF"/>
+            <a:srgbClr val="509546"/>
           </a:solidFill>
-          <a:ln w="19050">
-            <a:solidFill>
-              <a:srgbClr val="E2E8F0"/>
-            </a:solidFill>
+          <a:ln>
+            <a:noFill/>
           </a:ln>
         </p:spPr>
         <p:style>
@@ -9242,23 +9772,173 @@
       </p:sp>
       <p:sp>
         <p:nvSpPr>
-          <p:cNvPr id="11" name="Rectangle 10"/>
+          <p:cNvPr id="12" name="TextBox 11"/>
+          <p:cNvSpPr txBox="1"/>
+          <p:nvPr/>
+        </p:nvSpPr>
+        <p:spPr>
+          <a:xfrm>
+            <a:off x="4608576" y="1892808"/>
+            <a:ext cx="2962656" cy="4251960"/>
+          </a:xfrm>
+          <a:prstGeom prst="rect">
+            <a:avLst/>
+          </a:prstGeom>
+          <a:noFill/>
+        </p:spPr>
+        <p:txBody>
+          <a:bodyPr wrap="square">
+            <a:spAutoFit/>
+          </a:bodyPr>
+          <a:lstStyle/>
+          <a:p>
+            <a:pPr>
+              <a:defRPr sz="850" b="1">
+                <a:solidFill>
+                  <a:srgbClr val="509546"/>
+                </a:solidFill>
+                <a:latin typeface="Raleway"/>
+              </a:defRPr>
+            </a:pPr>
+            <a:r>
+              <a:t>PRIVACIDADE &amp; SEGURANÇA</a:t>
+            </a:r>
+          </a:p>
+          <a:p>
+            <a:pPr>
+              <a:spcAft>
+                <a:spcPts val="200"/>
+              </a:spcAft>
+              <a:defRPr sz="1400" b="1">
+                <a:solidFill>
+                  <a:srgbClr val="1A1A1A"/>
+                </a:solidFill>
+                <a:latin typeface="Raleway"/>
+              </a:defRPr>
+            </a:pPr>
+            <a:r>
+              <a:t>Skills de Compliance dos Agentes</a:t>
+            </a:r>
+          </a:p>
+          <a:p>
+            <a:pPr>
+              <a:spcAft>
+                <a:spcPts val="1000"/>
+              </a:spcAft>
+              <a:defRPr sz="850" b="1">
+                <a:solidFill>
+                  <a:srgbClr val="7F7F7F"/>
+                </a:solidFill>
+                <a:latin typeface="Raleway"/>
+              </a:defRPr>
+            </a:pPr>
+            <a:r>
+              <a:t>LGPD • GDPR • HIPAA • CCPA • SOC 2 • ISO 27001 • PCI-DSS</a:t>
+            </a:r>
+          </a:p>
+          <a:p>
+            <a:pPr>
+              <a:spcAft>
+                <a:spcPts val="600"/>
+              </a:spcAft>
+              <a:defRPr sz="900">
+                <a:solidFill>
+                  <a:srgbClr val="1A1A1A"/>
+                </a:solidFill>
+                <a:latin typeface="Raleway"/>
+              </a:defRPr>
+            </a:pPr>
+            <a:r>
+              <a:t>•  Pesquisa e arquitetura de skills para comportamento seguro dos agentes.</a:t>
+            </a:r>
+          </a:p>
+          <a:p>
+            <a:pPr>
+              <a:spcAft>
+                <a:spcPts val="600"/>
+              </a:spcAft>
+              <a:defRPr sz="900">
+                <a:solidFill>
+                  <a:srgbClr val="1A1A1A"/>
+                </a:solidFill>
+                <a:latin typeface="Raleway"/>
+              </a:defRPr>
+            </a:pPr>
+            <a:r>
+              <a:t>•  Técnicas de Anonimização &amp; Pseudonimização (K2View, Protecto.ai): mascaramento dinâmico, tokenização e hashing irreversível com sal.</a:t>
+            </a:r>
+          </a:p>
+          <a:p>
+            <a:pPr>
+              <a:spcAft>
+                <a:spcPts val="600"/>
+              </a:spcAft>
+              <a:defRPr sz="900">
+                <a:solidFill>
+                  <a:srgbClr val="1A1A1A"/>
+                </a:solidFill>
+                <a:latin typeface="Raleway"/>
+              </a:defRPr>
+            </a:pPr>
+            <a:r>
+              <a:t>•  Diretrizes Oficiais ANPD &amp; UFCA: aplicação dos padrões regulatórios brasileiros para desidentificação de dados.</a:t>
+            </a:r>
+          </a:p>
+          <a:p>
+            <a:pPr>
+              <a:spcAft>
+                <a:spcPts val="600"/>
+              </a:spcAft>
+              <a:defRPr sz="900">
+                <a:solidFill>
+                  <a:srgbClr val="1A1A1A"/>
+                </a:solidFill>
+                <a:latin typeface="Raleway"/>
+              </a:defRPr>
+            </a:pPr>
+            <a:r>
+              <a:t>•  Tarjamento de Evidências (MavenDoc): censura automatizada de PII (CPFs, nomes, valores) em screenshots e PDFs de teste.</a:t>
+            </a:r>
+          </a:p>
+          <a:p>
+            <a:pPr>
+              <a:spcAft>
+                <a:spcPts val="600"/>
+              </a:spcAft>
+              <a:defRPr sz="900">
+                <a:solidFill>
+                  <a:srgbClr val="1A1A1A"/>
+                </a:solidFill>
+                <a:latin typeface="Raleway"/>
+              </a:defRPr>
+            </a:pPr>
+            <a:r>
+              <a:t>•  Coleta Segura &amp; OSINT Ético (OSINT Brasil): higiene de dados para evitar vazamento de credenciais e dados em prompts.</a:t>
+            </a:r>
+          </a:p>
+        </p:txBody>
+      </p:sp>
+      <p:sp>
+        <p:nvSpPr>
+          <p:cNvPr id="13" name="Rounded Rectangle 12"/>
           <p:cNvSpPr/>
           <p:nvPr/>
         </p:nvSpPr>
         <p:spPr>
           <a:xfrm>
-            <a:off x="8266176" y="1719072"/>
-            <a:ext cx="1097280" cy="54864"/>
-          </a:xfrm>
-          <a:prstGeom prst="rect">
+            <a:off x="8119872" y="1600200"/>
+            <a:ext cx="3328416" cy="4663440"/>
+          </a:xfrm>
+          <a:prstGeom prst="roundRect">
             <a:avLst/>
           </a:prstGeom>
           <a:solidFill>
-            <a:srgbClr val="9333EA"/>
+            <a:srgbClr val="FFFFFF"/>
           </a:solidFill>
-          <a:ln>
-            <a:noFill/>
+          <a:ln w="15240">
+            <a:solidFill>
+              <a:srgbClr val="D8D8D8"/>
+            </a:solidFill>
           </a:ln>
         </p:spPr>
         <p:style>
@@ -9285,14 +9965,57 @@
       </p:sp>
       <p:sp>
         <p:nvSpPr>
-          <p:cNvPr id="12" name="TextBox 11"/>
+          <p:cNvPr id="14" name="Rectangle 13"/>
+          <p:cNvSpPr/>
+          <p:nvPr/>
+        </p:nvSpPr>
+        <p:spPr>
+          <a:xfrm>
+            <a:off x="8302752" y="1764792"/>
+            <a:ext cx="1097280" cy="54864"/>
+          </a:xfrm>
+          <a:prstGeom prst="rect">
+            <a:avLst/>
+          </a:prstGeom>
+          <a:solidFill>
+            <a:srgbClr val="FF5722"/>
+          </a:solidFill>
+          <a:ln>
+            <a:noFill/>
+          </a:ln>
+        </p:spPr>
+        <p:style>
+          <a:lnRef idx="1">
+            <a:schemeClr val="accent1"/>
+          </a:lnRef>
+          <a:fillRef idx="3">
+            <a:schemeClr val="accent1"/>
+          </a:fillRef>
+          <a:effectRef idx="2">
+            <a:schemeClr val="accent1"/>
+          </a:effectRef>
+          <a:fontRef idx="minor">
+            <a:schemeClr val="lt1"/>
+          </a:fontRef>
+        </p:style>
+        <p:txBody>
+          <a:bodyPr rtlCol="0" anchor="ctr"/>
+          <a:lstStyle/>
+          <a:p>
+            <a:pPr algn="ctr"/>
+          </a:p>
+        </p:txBody>
+      </p:sp>
+      <p:sp>
+        <p:nvSpPr>
+          <p:cNvPr id="15" name="TextBox 14"/>
           <p:cNvSpPr txBox="1"/>
           <p:nvPr/>
         </p:nvSpPr>
         <p:spPr>
           <a:xfrm>
-            <a:off x="8266176" y="1847088"/>
-            <a:ext cx="2962656" cy="4343400"/>
+            <a:off x="8302752" y="1892808"/>
+            <a:ext cx="2962656" cy="4251960"/>
           </a:xfrm>
           <a:prstGeom prst="rect">
             <a:avLst/>
@@ -9308,8 +10031,9 @@
             <a:pPr>
               <a:defRPr sz="850" b="1">
                 <a:solidFill>
-                  <a:srgbClr val="9333EA"/>
-                </a:solidFill>
+                  <a:srgbClr val="FF5722"/>
+                </a:solidFill>
+                <a:latin typeface="Raleway"/>
               </a:defRPr>
             </a:pPr>
             <a:r>
@@ -9323,8 +10047,9 @@
               </a:spcAft>
               <a:defRPr sz="1400" b="1">
                 <a:solidFill>
-                  <a:srgbClr val="0F172A"/>
-                </a:solidFill>
+                  <a:srgbClr val="1A1A1A"/>
+                </a:solidFill>
+                <a:latin typeface="Raleway"/>
               </a:defRPr>
             </a:pPr>
             <a:r>
@@ -9338,8 +10063,9 @@
               </a:spcAft>
               <a:defRPr sz="850" b="1">
                 <a:solidFill>
-                  <a:srgbClr val="64748B"/>
-                </a:solidFill>
+                  <a:srgbClr val="7F7F7F"/>
+                </a:solidFill>
+                <a:latin typeface="Raleway"/>
               </a:defRPr>
             </a:pPr>
             <a:r>
@@ -9353,8 +10079,9 @@
               </a:spcAft>
               <a:defRPr sz="900">
                 <a:solidFill>
-                  <a:srgbClr val="1E293B"/>
-                </a:solidFill>
+                  <a:srgbClr val="1A1A1A"/>
+                </a:solidFill>
+                <a:latin typeface="Raleway"/>
               </a:defRPr>
             </a:pPr>
             <a:r>
@@ -9368,8 +10095,9 @@
               </a:spcAft>
               <a:defRPr sz="900">
                 <a:solidFill>
-                  <a:srgbClr val="1E293B"/>
-                </a:solidFill>
+                  <a:srgbClr val="1A1A1A"/>
+                </a:solidFill>
+                <a:latin typeface="Raleway"/>
               </a:defRPr>
             </a:pPr>
             <a:r>
@@ -9383,8 +10111,9 @@
               </a:spcAft>
               <a:defRPr sz="900">
                 <a:solidFill>
-                  <a:srgbClr val="1E293B"/>
-                </a:solidFill>
+                  <a:srgbClr val="1A1A1A"/>
+                </a:solidFill>
+                <a:latin typeface="Raleway"/>
               </a:defRPr>
             </a:pPr>
             <a:r>
@@ -9398,8 +10127,9 @@
               </a:spcAft>
               <a:defRPr sz="900">
                 <a:solidFill>
-                  <a:srgbClr val="1E293B"/>
-                </a:solidFill>
+                  <a:srgbClr val="1A1A1A"/>
+                </a:solidFill>
+                <a:latin typeface="Raleway"/>
               </a:defRPr>
             </a:pPr>
             <a:r>
